--- a/Innovate2026-AgenticWorkflows_v2.pptx
+++ b/Innovate2026-AgenticWorkflows_v2.pptx
@@ -5,7 +5,7 @@
     <p:sldMasterId id="2147483648" r:id="rId1"/>
   </p:sldMasterIdLst>
   <p:notesMasterIdLst>
-    <p:notesMasterId r:id="rId13"/>
+    <p:notesMasterId r:id="rId14"/>
   </p:notesMasterIdLst>
   <p:sldIdLst>
     <p:sldId id="256" r:id="rId2"/>
@@ -16,9 +16,10 @@
     <p:sldId id="264" r:id="rId7"/>
     <p:sldId id="265" r:id="rId8"/>
     <p:sldId id="266" r:id="rId9"/>
-    <p:sldId id="261" r:id="rId10"/>
-    <p:sldId id="262" r:id="rId11"/>
-    <p:sldId id="263" r:id="rId12"/>
+    <p:sldId id="267" r:id="rId10"/>
+    <p:sldId id="261" r:id="rId11"/>
+    <p:sldId id="262" r:id="rId12"/>
+    <p:sldId id="263" r:id="rId13"/>
   </p:sldIdLst>
   <p:sldSz cx="12192000" cy="6858000"/>
   <p:notesSz cx="6858000" cy="12192000"/>
@@ -275,6 +276,13 @@
           </p:nvPr>
         </p:nvSpPr>
         <p:spPr/>
+        <p:txBody>
+          <a:bodyPr/>
+          <a:lstStyle/>
+          <a:p>
+            <a:endParaRPr lang="en-US"/>
+          </a:p>
+        </p:txBody>
       </p:sp>
       <p:sp>
         <p:nvSpPr>
@@ -359,6 +367,13 @@
           </p:nvPr>
         </p:nvSpPr>
         <p:spPr/>
+        <p:txBody>
+          <a:bodyPr/>
+          <a:lstStyle/>
+          <a:p>
+            <a:endParaRPr lang="en-US"/>
+          </a:p>
+        </p:txBody>
       </p:sp>
       <p:sp>
         <p:nvSpPr>
@@ -396,7 +411,7 @@
           <a:p>
             <a:fld id="{F7021451-1387-4CA6-816F-3879F97B5CBC}" type="slidenum">
               <a:rPr lang="en-US"/>
-              <a:t>10</a:t>
+              <a:t>11</a:t>
             </a:fld>
             <a:endParaRPr lang="en-US"/>
           </a:p>
@@ -443,6 +458,13 @@
           </p:nvPr>
         </p:nvSpPr>
         <p:spPr/>
+        <p:txBody>
+          <a:bodyPr/>
+          <a:lstStyle/>
+          <a:p>
+            <a:endParaRPr lang="en-US"/>
+          </a:p>
+        </p:txBody>
       </p:sp>
       <p:sp>
         <p:nvSpPr>
@@ -480,7 +502,7 @@
           <a:p>
             <a:fld id="{F7021451-1387-4CA6-816F-3879F97B5CBC}" type="slidenum">
               <a:rPr lang="en-US"/>
-              <a:t>11</a:t>
+              <a:t>12</a:t>
             </a:fld>
             <a:endParaRPr lang="en-US"/>
           </a:p>
@@ -527,6 +549,13 @@
           </p:nvPr>
         </p:nvSpPr>
         <p:spPr/>
+        <p:txBody>
+          <a:bodyPr/>
+          <a:lstStyle/>
+          <a:p>
+            <a:endParaRPr lang="en-US"/>
+          </a:p>
+        </p:txBody>
       </p:sp>
       <p:sp>
         <p:nvSpPr>
@@ -611,6 +640,13 @@
           </p:nvPr>
         </p:nvSpPr>
         <p:spPr/>
+        <p:txBody>
+          <a:bodyPr/>
+          <a:lstStyle/>
+          <a:p>
+            <a:endParaRPr lang="en-US"/>
+          </a:p>
+        </p:txBody>
       </p:sp>
       <p:sp>
         <p:nvSpPr>
@@ -695,6 +731,13 @@
           </p:nvPr>
         </p:nvSpPr>
         <p:spPr/>
+        <p:txBody>
+          <a:bodyPr/>
+          <a:lstStyle/>
+          <a:p>
+            <a:endParaRPr lang="en-US"/>
+          </a:p>
+        </p:txBody>
       </p:sp>
       <p:sp>
         <p:nvSpPr>
@@ -779,6 +822,13 @@
           </p:nvPr>
         </p:nvSpPr>
         <p:spPr/>
+        <p:txBody>
+          <a:bodyPr/>
+          <a:lstStyle/>
+          <a:p>
+            <a:endParaRPr lang="en-US"/>
+          </a:p>
+        </p:txBody>
       </p:sp>
       <p:sp>
         <p:nvSpPr>
@@ -1046,6 +1096,13 @@
           </p:nvPr>
         </p:nvSpPr>
         <p:spPr/>
+        <p:txBody>
+          <a:bodyPr/>
+          <a:lstStyle/>
+          <a:p>
+            <a:endParaRPr lang="en-US"/>
+          </a:p>
+        </p:txBody>
       </p:sp>
       <p:sp>
         <p:nvSpPr>
@@ -1083,7 +1140,7 @@
           <a:p>
             <a:fld id="{F7021451-1387-4CA6-816F-3879F97B5CBC}" type="slidenum">
               <a:rPr lang="en-US"/>
-              <a:t>9</a:t>
+              <a:t>10</a:t>
             </a:fld>
             <a:endParaRPr lang="en-US"/>
           </a:p>
@@ -2866,7 +2923,7 @@
         </p:nvSpPr>
         <p:spPr>
           <a:xfrm>
-            <a:off x="731520" y="1097280"/>
+            <a:off x="765209" y="721895"/>
             <a:ext cx="7315200" cy="2560320"/>
           </a:xfrm>
           <a:prstGeom prst="rect">
@@ -2915,6 +2972,24 @@
                 <a:cs typeface="Segoe UI" pitchFamily="34" charset="-120"/>
               </a:rPr>
               <a:t>Agentic Workflows</a:t>
+            </a:r>
+          </a:p>
+          <a:p>
+            <a:pPr marL="0" indent="0">
+              <a:lnSpc>
+                <a:spcPct val="110000"/>
+              </a:lnSpc>
+              <a:buNone/>
+            </a:pPr>
+            <a:r>
+              <a:rPr lang="en-US" sz="6200" b="1" dirty="0">
+                <a:solidFill>
+                  <a:srgbClr val="E6EDF3"/>
+                </a:solidFill>
+                <a:latin typeface="Segoe UI" pitchFamily="34" charset="0"/>
+                <a:cs typeface="Segoe UI" pitchFamily="34" charset="-120"/>
+              </a:rPr>
+              <a:t>Software Factory</a:t>
             </a:r>
             <a:endParaRPr lang="en-US" sz="6200" dirty="0"/>
           </a:p>
@@ -3057,6 +3132,1734 @@
 </file>
 
 <file path=ppt/slides/slide10.xml><?xml version="1.0" encoding="utf-8"?>
+<p:sld xmlns:a="http://schemas.openxmlformats.org/drawingml/2006/main" xmlns:r="http://schemas.openxmlformats.org/officeDocument/2006/relationships" xmlns:p="http://schemas.openxmlformats.org/presentationml/2006/main">
+  <p:cSld name="Slide 6">
+    <p:bg>
+      <p:bgPr>
+        <a:solidFill>
+          <a:srgbClr val="0D1117"/>
+        </a:solidFill>
+        <a:effectLst/>
+      </p:bgPr>
+    </p:bg>
+    <p:spTree>
+      <p:nvGrpSpPr>
+        <p:cNvPr id="1" name=""/>
+        <p:cNvGrpSpPr/>
+        <p:nvPr/>
+      </p:nvGrpSpPr>
+      <p:grpSpPr>
+        <a:xfrm>
+          <a:off x="0" y="0"/>
+          <a:ext cx="0" cy="0"/>
+          <a:chOff x="0" y="0"/>
+          <a:chExt cx="0" cy="0"/>
+        </a:xfrm>
+      </p:grpSpPr>
+      <p:sp>
+        <p:nvSpPr>
+          <p:cNvPr id="2" name="Shape 0"/>
+          <p:cNvSpPr/>
+          <p:nvPr/>
+        </p:nvSpPr>
+        <p:spPr>
+          <a:xfrm>
+            <a:off x="0" y="0"/>
+            <a:ext cx="12188952" cy="36576"/>
+          </a:xfrm>
+          <a:prstGeom prst="rect">
+            <a:avLst/>
+          </a:prstGeom>
+          <a:solidFill>
+            <a:srgbClr val="238636"/>
+          </a:solidFill>
+          <a:ln/>
+        </p:spPr>
+        <p:txBody>
+          <a:bodyPr/>
+          <a:lstStyle/>
+          <a:p>
+            <a:endParaRPr lang="en-US"/>
+          </a:p>
+        </p:txBody>
+      </p:sp>
+      <p:sp>
+        <p:nvSpPr>
+          <p:cNvPr id="3" name="Text 1"/>
+          <p:cNvSpPr/>
+          <p:nvPr/>
+        </p:nvSpPr>
+        <p:spPr>
+          <a:xfrm>
+            <a:off x="731520" y="6400800"/>
+            <a:ext cx="7315200" cy="320040"/>
+          </a:xfrm>
+          <a:prstGeom prst="rect">
+            <a:avLst/>
+          </a:prstGeom>
+          <a:noFill/>
+          <a:ln/>
+        </p:spPr>
+        <p:txBody>
+          <a:bodyPr wrap="square" rtlCol="0" anchor="ctr"/>
+          <a:lstStyle/>
+          <a:p>
+            <a:pPr marL="0" indent="0">
+              <a:buNone/>
+            </a:pPr>
+            <a:r>
+              <a:rPr lang="en-US" sz="1000" dirty="0">
+                <a:solidFill>
+                  <a:srgbClr val="484F58"/>
+                </a:solidFill>
+                <a:latin typeface="Segoe UI" pitchFamily="34" charset="0"/>
+                <a:ea typeface="Segoe UI" pitchFamily="34" charset="-122"/>
+                <a:cs typeface="Segoe UI" pitchFamily="34" charset="-120"/>
+              </a:rPr>
+              <a:t>Innovate 2026  ·  ADO/GitHub with Microsoft</a:t>
+            </a:r>
+            <a:endParaRPr lang="en-US" sz="1000" dirty="0"/>
+          </a:p>
+        </p:txBody>
+      </p:sp>
+      <p:sp>
+        <p:nvSpPr>
+          <p:cNvPr id="4" name="Text 2"/>
+          <p:cNvSpPr/>
+          <p:nvPr/>
+        </p:nvSpPr>
+        <p:spPr>
+          <a:xfrm>
+            <a:off x="11155680" y="6446520"/>
+            <a:ext cx="822960" cy="274320"/>
+          </a:xfrm>
+          <a:prstGeom prst="rect">
+            <a:avLst/>
+          </a:prstGeom>
+          <a:noFill/>
+          <a:ln/>
+        </p:spPr>
+        <p:txBody>
+          <a:bodyPr wrap="square" rtlCol="0" anchor="ctr"/>
+          <a:lstStyle/>
+          <a:p>
+            <a:pPr marL="0" indent="0" algn="r">
+              <a:buNone/>
+            </a:pPr>
+            <a:r>
+              <a:rPr lang="en-US" sz="1000" dirty="0">
+                <a:solidFill>
+                  <a:srgbClr val="484F58"/>
+                </a:solidFill>
+                <a:latin typeface="Segoe UI" pitchFamily="34" charset="0"/>
+                <a:ea typeface="Segoe UI" pitchFamily="34" charset="-122"/>
+                <a:cs typeface="Segoe UI" pitchFamily="34" charset="-120"/>
+              </a:rPr>
+              <a:t>9 / 11</a:t>
+            </a:r>
+            <a:endParaRPr lang="en-US" sz="1000" dirty="0"/>
+          </a:p>
+        </p:txBody>
+      </p:sp>
+      <p:sp>
+        <p:nvSpPr>
+          <p:cNvPr id="5" name="Text 3"/>
+          <p:cNvSpPr/>
+          <p:nvPr/>
+        </p:nvSpPr>
+        <p:spPr>
+          <a:xfrm>
+            <a:off x="731520" y="320040"/>
+            <a:ext cx="10058400" cy="640080"/>
+          </a:xfrm>
+          <a:prstGeom prst="rect">
+            <a:avLst/>
+          </a:prstGeom>
+          <a:noFill/>
+          <a:ln/>
+        </p:spPr>
+        <p:txBody>
+          <a:bodyPr wrap="square" rtlCol="0" anchor="ctr"/>
+          <a:lstStyle/>
+          <a:p>
+            <a:pPr marL="0" indent="0">
+              <a:buNone/>
+            </a:pPr>
+            <a:r>
+              <a:rPr lang="en-US" sz="3800" b="1" dirty="0">
+                <a:solidFill>
+                  <a:srgbClr val="E6EDF3"/>
+                </a:solidFill>
+                <a:latin typeface="Segoe UI" pitchFamily="34" charset="0"/>
+                <a:ea typeface="Segoe UI" pitchFamily="34" charset="-122"/>
+                <a:cs typeface="Segoe UI" pitchFamily="34" charset="-120"/>
+              </a:rPr>
+              <a:t>What Can Your Teams Build?</a:t>
+            </a:r>
+            <a:endParaRPr lang="en-US" sz="3800" dirty="0"/>
+          </a:p>
+        </p:txBody>
+      </p:sp>
+      <p:sp>
+        <p:nvSpPr>
+          <p:cNvPr id="6" name="Text 4"/>
+          <p:cNvSpPr/>
+          <p:nvPr/>
+        </p:nvSpPr>
+        <p:spPr>
+          <a:xfrm>
+            <a:off x="731520" y="914400"/>
+            <a:ext cx="9144000" cy="365760"/>
+          </a:xfrm>
+          <a:prstGeom prst="rect">
+            <a:avLst/>
+          </a:prstGeom>
+          <a:noFill/>
+          <a:ln/>
+        </p:spPr>
+        <p:txBody>
+          <a:bodyPr wrap="square" rtlCol="0" anchor="ctr"/>
+          <a:lstStyle/>
+          <a:p>
+            <a:pPr marL="0" indent="0">
+              <a:buNone/>
+            </a:pPr>
+            <a:r>
+              <a:rPr lang="en-US" sz="1600" i="1" dirty="0">
+                <a:solidFill>
+                  <a:srgbClr val="8B949E"/>
+                </a:solidFill>
+                <a:latin typeface="Segoe UI" pitchFamily="34" charset="0"/>
+                <a:ea typeface="Segoe UI" pitchFamily="34" charset="-122"/>
+                <a:cs typeface="Segoe UI" pitchFamily="34" charset="-120"/>
+              </a:rPr>
+              <a:t>18 design patterns · Ready-made examples at github.com/githubnext/agentics</a:t>
+            </a:r>
+            <a:endParaRPr lang="en-US" sz="1600" dirty="0"/>
+          </a:p>
+        </p:txBody>
+      </p:sp>
+      <p:sp>
+        <p:nvSpPr>
+          <p:cNvPr id="7" name="Shape 5"/>
+          <p:cNvSpPr/>
+          <p:nvPr/>
+        </p:nvSpPr>
+        <p:spPr>
+          <a:xfrm>
+            <a:off x="758952" y="1591056"/>
+            <a:ext cx="3429000" cy="2148840"/>
+          </a:xfrm>
+          <a:prstGeom prst="roundRect">
+            <a:avLst>
+              <a:gd name="adj" fmla="val 5106"/>
+            </a:avLst>
+          </a:prstGeom>
+          <a:solidFill>
+            <a:srgbClr val="000000">
+              <a:alpha val="40000"/>
+            </a:srgbClr>
+          </a:solidFill>
+          <a:ln/>
+        </p:spPr>
+        <p:txBody>
+          <a:bodyPr/>
+          <a:lstStyle/>
+          <a:p>
+            <a:endParaRPr lang="en-US"/>
+          </a:p>
+        </p:txBody>
+      </p:sp>
+      <p:sp>
+        <p:nvSpPr>
+          <p:cNvPr id="8" name="Shape 6"/>
+          <p:cNvSpPr/>
+          <p:nvPr/>
+        </p:nvSpPr>
+        <p:spPr>
+          <a:xfrm>
+            <a:off x="731520" y="1554480"/>
+            <a:ext cx="3429000" cy="2148840"/>
+          </a:xfrm>
+          <a:prstGeom prst="roundRect">
+            <a:avLst>
+              <a:gd name="adj" fmla="val 5106"/>
+            </a:avLst>
+          </a:prstGeom>
+          <a:solidFill>
+            <a:srgbClr val="21262D"/>
+          </a:solidFill>
+          <a:ln w="6350">
+            <a:solidFill>
+              <a:srgbClr val="30363D"/>
+            </a:solidFill>
+            <a:prstDash val="solid"/>
+          </a:ln>
+        </p:spPr>
+        <p:txBody>
+          <a:bodyPr/>
+          <a:lstStyle/>
+          <a:p>
+            <a:endParaRPr lang="en-US"/>
+          </a:p>
+        </p:txBody>
+      </p:sp>
+      <p:sp>
+        <p:nvSpPr>
+          <p:cNvPr id="9" name="Shape 7"/>
+          <p:cNvSpPr/>
+          <p:nvPr/>
+        </p:nvSpPr>
+        <p:spPr>
+          <a:xfrm>
+            <a:off x="868680" y="1554480"/>
+            <a:ext cx="3154680" cy="36576"/>
+          </a:xfrm>
+          <a:prstGeom prst="rect">
+            <a:avLst/>
+          </a:prstGeom>
+          <a:solidFill>
+            <a:srgbClr val="1F6FEB"/>
+          </a:solidFill>
+          <a:ln/>
+        </p:spPr>
+        <p:txBody>
+          <a:bodyPr/>
+          <a:lstStyle/>
+          <a:p>
+            <a:endParaRPr lang="en-US"/>
+          </a:p>
+        </p:txBody>
+      </p:sp>
+      <p:sp>
+        <p:nvSpPr>
+          <p:cNvPr id="10" name="Text 8"/>
+          <p:cNvSpPr/>
+          <p:nvPr/>
+        </p:nvSpPr>
+        <p:spPr>
+          <a:xfrm>
+            <a:off x="914400" y="1783080"/>
+            <a:ext cx="548640" cy="548640"/>
+          </a:xfrm>
+          <a:prstGeom prst="rect">
+            <a:avLst/>
+          </a:prstGeom>
+          <a:noFill/>
+          <a:ln/>
+        </p:spPr>
+        <p:txBody>
+          <a:bodyPr wrap="square" rtlCol="0" anchor="ctr"/>
+          <a:lstStyle/>
+          <a:p>
+            <a:pPr marL="0" indent="0">
+              <a:buNone/>
+            </a:pPr>
+            <a:r>
+              <a:rPr lang="en-US" sz="2800" dirty="0">
+                <a:solidFill>
+                  <a:srgbClr val="000000"/>
+                </a:solidFill>
+              </a:rPr>
+              <a:t>⚡</a:t>
+            </a:r>
+            <a:endParaRPr lang="en-US" sz="2800" dirty="0"/>
+          </a:p>
+        </p:txBody>
+      </p:sp>
+      <p:sp>
+        <p:nvSpPr>
+          <p:cNvPr id="11" name="Text 9"/>
+          <p:cNvSpPr/>
+          <p:nvPr/>
+        </p:nvSpPr>
+        <p:spPr>
+          <a:xfrm>
+            <a:off x="1508760" y="1737360"/>
+            <a:ext cx="2377440" cy="640080"/>
+          </a:xfrm>
+          <a:prstGeom prst="rect">
+            <a:avLst/>
+          </a:prstGeom>
+          <a:noFill/>
+          <a:ln/>
+        </p:spPr>
+        <p:txBody>
+          <a:bodyPr wrap="square" rtlCol="0" anchor="ctr"/>
+          <a:lstStyle/>
+          <a:p>
+            <a:pPr marL="0" indent="0">
+              <a:lnSpc>
+                <a:spcPct val="115000"/>
+              </a:lnSpc>
+              <a:buNone/>
+            </a:pPr>
+            <a:r>
+              <a:rPr lang="en-US" sz="1800" b="1" dirty="0">
+                <a:solidFill>
+                  <a:srgbClr val="E6EDF3"/>
+                </a:solidFill>
+                <a:latin typeface="Segoe UI" pitchFamily="34" charset="0"/>
+                <a:ea typeface="Segoe UI" pitchFamily="34" charset="-122"/>
+                <a:cs typeface="Segoe UI" pitchFamily="34" charset="-120"/>
+              </a:rPr>
+              <a:t>Issue &amp; PR</a:t>
+            </a:r>
+            <a:endParaRPr lang="en-US" sz="1800" dirty="0"/>
+          </a:p>
+          <a:p>
+            <a:pPr marL="0" indent="0">
+              <a:lnSpc>
+                <a:spcPct val="115000"/>
+              </a:lnSpc>
+              <a:buNone/>
+            </a:pPr>
+            <a:r>
+              <a:rPr lang="en-US" sz="1800" b="1" dirty="0">
+                <a:solidFill>
+                  <a:srgbClr val="E6EDF3"/>
+                </a:solidFill>
+                <a:latin typeface="Segoe UI" pitchFamily="34" charset="0"/>
+                <a:ea typeface="Segoe UI" pitchFamily="34" charset="-122"/>
+                <a:cs typeface="Segoe UI" pitchFamily="34" charset="-120"/>
+              </a:rPr>
+              <a:t>Management</a:t>
+            </a:r>
+            <a:endParaRPr lang="en-US" sz="1800" dirty="0"/>
+          </a:p>
+        </p:txBody>
+      </p:sp>
+      <p:sp>
+        <p:nvSpPr>
+          <p:cNvPr id="12" name="Text 10"/>
+          <p:cNvSpPr/>
+          <p:nvPr/>
+        </p:nvSpPr>
+        <p:spPr>
+          <a:xfrm>
+            <a:off x="914400" y="2606040"/>
+            <a:ext cx="3017520" cy="914400"/>
+          </a:xfrm>
+          <a:prstGeom prst="rect">
+            <a:avLst/>
+          </a:prstGeom>
+          <a:noFill/>
+          <a:ln/>
+        </p:spPr>
+        <p:txBody>
+          <a:bodyPr wrap="square" rtlCol="0" anchor="ctr"/>
+          <a:lstStyle/>
+          <a:p>
+            <a:pPr marL="0" indent="0">
+              <a:lnSpc>
+                <a:spcPct val="130000"/>
+              </a:lnSpc>
+              <a:buNone/>
+            </a:pPr>
+            <a:r>
+              <a:rPr lang="en-US" sz="1500" dirty="0">
+                <a:solidFill>
+                  <a:srgbClr val="8B949E"/>
+                </a:solidFill>
+                <a:latin typeface="Segoe UI" pitchFamily="34" charset="0"/>
+                <a:ea typeface="Segoe UI" pitchFamily="34" charset="-122"/>
+                <a:cs typeface="Segoe UI" pitchFamily="34" charset="-120"/>
+              </a:rPr>
+              <a:t>Auto-triage, labeling,</a:t>
+            </a:r>
+            <a:endParaRPr lang="en-US" sz="1500" dirty="0"/>
+          </a:p>
+          <a:p>
+            <a:pPr marL="0" indent="0">
+              <a:lnSpc>
+                <a:spcPct val="130000"/>
+              </a:lnSpc>
+              <a:buNone/>
+            </a:pPr>
+            <a:r>
+              <a:rPr lang="en-US" sz="1500" dirty="0">
+                <a:solidFill>
+                  <a:srgbClr val="8B949E"/>
+                </a:solidFill>
+                <a:latin typeface="Segoe UI" pitchFamily="34" charset="0"/>
+                <a:ea typeface="Segoe UI" pitchFamily="34" charset="-122"/>
+                <a:cs typeface="Segoe UI" pitchFamily="34" charset="-120"/>
+              </a:rPr>
+              <a:t>project coordination</a:t>
+            </a:r>
+            <a:endParaRPr lang="en-US" sz="1500" dirty="0"/>
+          </a:p>
+        </p:txBody>
+      </p:sp>
+      <p:sp>
+        <p:nvSpPr>
+          <p:cNvPr id="13" name="Shape 11"/>
+          <p:cNvSpPr/>
+          <p:nvPr/>
+        </p:nvSpPr>
+        <p:spPr>
+          <a:xfrm>
+            <a:off x="4507992" y="1591056"/>
+            <a:ext cx="3429000" cy="2148840"/>
+          </a:xfrm>
+          <a:prstGeom prst="roundRect">
+            <a:avLst>
+              <a:gd name="adj" fmla="val 5106"/>
+            </a:avLst>
+          </a:prstGeom>
+          <a:solidFill>
+            <a:srgbClr val="000000">
+              <a:alpha val="40000"/>
+            </a:srgbClr>
+          </a:solidFill>
+          <a:ln/>
+        </p:spPr>
+        <p:txBody>
+          <a:bodyPr/>
+          <a:lstStyle/>
+          <a:p>
+            <a:endParaRPr lang="en-US"/>
+          </a:p>
+        </p:txBody>
+      </p:sp>
+      <p:sp>
+        <p:nvSpPr>
+          <p:cNvPr id="14" name="Shape 12"/>
+          <p:cNvSpPr/>
+          <p:nvPr/>
+        </p:nvSpPr>
+        <p:spPr>
+          <a:xfrm>
+            <a:off x="4480560" y="1554480"/>
+            <a:ext cx="3429000" cy="2148840"/>
+          </a:xfrm>
+          <a:prstGeom prst="roundRect">
+            <a:avLst>
+              <a:gd name="adj" fmla="val 5106"/>
+            </a:avLst>
+          </a:prstGeom>
+          <a:solidFill>
+            <a:srgbClr val="21262D"/>
+          </a:solidFill>
+          <a:ln w="6350">
+            <a:solidFill>
+              <a:srgbClr val="30363D"/>
+            </a:solidFill>
+            <a:prstDash val="solid"/>
+          </a:ln>
+        </p:spPr>
+        <p:txBody>
+          <a:bodyPr/>
+          <a:lstStyle/>
+          <a:p>
+            <a:endParaRPr lang="en-US"/>
+          </a:p>
+        </p:txBody>
+      </p:sp>
+      <p:sp>
+        <p:nvSpPr>
+          <p:cNvPr id="15" name="Shape 13"/>
+          <p:cNvSpPr/>
+          <p:nvPr/>
+        </p:nvSpPr>
+        <p:spPr>
+          <a:xfrm>
+            <a:off x="4617720" y="1554480"/>
+            <a:ext cx="3154680" cy="36576"/>
+          </a:xfrm>
+          <a:prstGeom prst="rect">
+            <a:avLst/>
+          </a:prstGeom>
+          <a:solidFill>
+            <a:srgbClr val="58A6FF"/>
+          </a:solidFill>
+          <a:ln/>
+        </p:spPr>
+        <p:txBody>
+          <a:bodyPr/>
+          <a:lstStyle/>
+          <a:p>
+            <a:endParaRPr lang="en-US"/>
+          </a:p>
+        </p:txBody>
+      </p:sp>
+      <p:sp>
+        <p:nvSpPr>
+          <p:cNvPr id="16" name="Text 14"/>
+          <p:cNvSpPr/>
+          <p:nvPr/>
+        </p:nvSpPr>
+        <p:spPr>
+          <a:xfrm>
+            <a:off x="4663440" y="1783080"/>
+            <a:ext cx="548640" cy="548640"/>
+          </a:xfrm>
+          <a:prstGeom prst="rect">
+            <a:avLst/>
+          </a:prstGeom>
+          <a:noFill/>
+          <a:ln/>
+        </p:spPr>
+        <p:txBody>
+          <a:bodyPr wrap="square" rtlCol="0" anchor="ctr"/>
+          <a:lstStyle/>
+          <a:p>
+            <a:pPr marL="0" indent="0">
+              <a:buNone/>
+            </a:pPr>
+            <a:r>
+              <a:rPr lang="en-US" sz="2800" dirty="0">
+                <a:solidFill>
+                  <a:srgbClr val="000000"/>
+                </a:solidFill>
+              </a:rPr>
+              <a:t>📄</a:t>
+            </a:r>
+            <a:endParaRPr lang="en-US" sz="2800" dirty="0"/>
+          </a:p>
+        </p:txBody>
+      </p:sp>
+      <p:sp>
+        <p:nvSpPr>
+          <p:cNvPr id="17" name="Text 15"/>
+          <p:cNvSpPr/>
+          <p:nvPr/>
+        </p:nvSpPr>
+        <p:spPr>
+          <a:xfrm>
+            <a:off x="5257800" y="1737360"/>
+            <a:ext cx="2377440" cy="640080"/>
+          </a:xfrm>
+          <a:prstGeom prst="rect">
+            <a:avLst/>
+          </a:prstGeom>
+          <a:noFill/>
+          <a:ln/>
+        </p:spPr>
+        <p:txBody>
+          <a:bodyPr wrap="square" rtlCol="0" anchor="ctr"/>
+          <a:lstStyle/>
+          <a:p>
+            <a:pPr marL="0" indent="0">
+              <a:lnSpc>
+                <a:spcPct val="115000"/>
+              </a:lnSpc>
+              <a:buNone/>
+            </a:pPr>
+            <a:r>
+              <a:rPr lang="en-US" sz="1800" b="1" dirty="0">
+                <a:solidFill>
+                  <a:srgbClr val="E6EDF3"/>
+                </a:solidFill>
+                <a:latin typeface="Segoe UI" pitchFamily="34" charset="0"/>
+                <a:ea typeface="Segoe UI" pitchFamily="34" charset="-122"/>
+                <a:cs typeface="Segoe UI" pitchFamily="34" charset="-120"/>
+              </a:rPr>
+              <a:t>Continuous</a:t>
+            </a:r>
+            <a:endParaRPr lang="en-US" sz="1800" dirty="0"/>
+          </a:p>
+          <a:p>
+            <a:pPr marL="0" indent="0">
+              <a:lnSpc>
+                <a:spcPct val="115000"/>
+              </a:lnSpc>
+              <a:buNone/>
+            </a:pPr>
+            <a:r>
+              <a:rPr lang="en-US" sz="1800" b="1" dirty="0">
+                <a:solidFill>
+                  <a:srgbClr val="E6EDF3"/>
+                </a:solidFill>
+                <a:latin typeface="Segoe UI" pitchFamily="34" charset="0"/>
+                <a:ea typeface="Segoe UI" pitchFamily="34" charset="-122"/>
+                <a:cs typeface="Segoe UI" pitchFamily="34" charset="-120"/>
+              </a:rPr>
+              <a:t>Documentation</a:t>
+            </a:r>
+            <a:endParaRPr lang="en-US" sz="1800" dirty="0"/>
+          </a:p>
+        </p:txBody>
+      </p:sp>
+      <p:sp>
+        <p:nvSpPr>
+          <p:cNvPr id="18" name="Text 16"/>
+          <p:cNvSpPr/>
+          <p:nvPr/>
+        </p:nvSpPr>
+        <p:spPr>
+          <a:xfrm>
+            <a:off x="4663440" y="2606040"/>
+            <a:ext cx="3017520" cy="914400"/>
+          </a:xfrm>
+          <a:prstGeom prst="rect">
+            <a:avLst/>
+          </a:prstGeom>
+          <a:noFill/>
+          <a:ln/>
+        </p:spPr>
+        <p:txBody>
+          <a:bodyPr wrap="square" rtlCol="0" anchor="ctr"/>
+          <a:lstStyle/>
+          <a:p>
+            <a:pPr marL="0" indent="0">
+              <a:lnSpc>
+                <a:spcPct val="130000"/>
+              </a:lnSpc>
+              <a:buNone/>
+            </a:pPr>
+            <a:r>
+              <a:rPr lang="en-US" sz="1500" dirty="0">
+                <a:solidFill>
+                  <a:srgbClr val="8B949E"/>
+                </a:solidFill>
+                <a:latin typeface="Segoe UI" pitchFamily="34" charset="0"/>
+                <a:ea typeface="Segoe UI" pitchFamily="34" charset="-122"/>
+                <a:cs typeface="Segoe UI" pitchFamily="34" charset="-120"/>
+              </a:rPr>
+              <a:t>Auto-update docs</a:t>
+            </a:r>
+            <a:endParaRPr lang="en-US" sz="1500" dirty="0"/>
+          </a:p>
+          <a:p>
+            <a:pPr marL="0" indent="0">
+              <a:lnSpc>
+                <a:spcPct val="130000"/>
+              </a:lnSpc>
+              <a:buNone/>
+            </a:pPr>
+            <a:r>
+              <a:rPr lang="en-US" sz="1500" dirty="0">
+                <a:solidFill>
+                  <a:srgbClr val="8B949E"/>
+                </a:solidFill>
+                <a:latin typeface="Segoe UI" pitchFamily="34" charset="0"/>
+                <a:ea typeface="Segoe UI" pitchFamily="34" charset="-122"/>
+                <a:cs typeface="Segoe UI" pitchFamily="34" charset="-120"/>
+              </a:rPr>
+              <a:t>when code changes</a:t>
+            </a:r>
+            <a:endParaRPr lang="en-US" sz="1500" dirty="0"/>
+          </a:p>
+        </p:txBody>
+      </p:sp>
+      <p:sp>
+        <p:nvSpPr>
+          <p:cNvPr id="19" name="Shape 17"/>
+          <p:cNvSpPr/>
+          <p:nvPr/>
+        </p:nvSpPr>
+        <p:spPr>
+          <a:xfrm>
+            <a:off x="8257032" y="1591056"/>
+            <a:ext cx="3429000" cy="2148840"/>
+          </a:xfrm>
+          <a:prstGeom prst="roundRect">
+            <a:avLst>
+              <a:gd name="adj" fmla="val 5106"/>
+            </a:avLst>
+          </a:prstGeom>
+          <a:solidFill>
+            <a:srgbClr val="000000">
+              <a:alpha val="40000"/>
+            </a:srgbClr>
+          </a:solidFill>
+          <a:ln/>
+        </p:spPr>
+        <p:txBody>
+          <a:bodyPr/>
+          <a:lstStyle/>
+          <a:p>
+            <a:endParaRPr lang="en-US"/>
+          </a:p>
+        </p:txBody>
+      </p:sp>
+      <p:sp>
+        <p:nvSpPr>
+          <p:cNvPr id="20" name="Shape 18"/>
+          <p:cNvSpPr/>
+          <p:nvPr/>
+        </p:nvSpPr>
+        <p:spPr>
+          <a:xfrm>
+            <a:off x="8229600" y="1554480"/>
+            <a:ext cx="3429000" cy="2148840"/>
+          </a:xfrm>
+          <a:prstGeom prst="roundRect">
+            <a:avLst>
+              <a:gd name="adj" fmla="val 5106"/>
+            </a:avLst>
+          </a:prstGeom>
+          <a:solidFill>
+            <a:srgbClr val="21262D"/>
+          </a:solidFill>
+          <a:ln w="6350">
+            <a:solidFill>
+              <a:srgbClr val="30363D"/>
+            </a:solidFill>
+            <a:prstDash val="solid"/>
+          </a:ln>
+        </p:spPr>
+        <p:txBody>
+          <a:bodyPr/>
+          <a:lstStyle/>
+          <a:p>
+            <a:endParaRPr lang="en-US"/>
+          </a:p>
+        </p:txBody>
+      </p:sp>
+      <p:sp>
+        <p:nvSpPr>
+          <p:cNvPr id="21" name="Shape 19"/>
+          <p:cNvSpPr/>
+          <p:nvPr/>
+        </p:nvSpPr>
+        <p:spPr>
+          <a:xfrm>
+            <a:off x="8366760" y="1554480"/>
+            <a:ext cx="3154680" cy="36576"/>
+          </a:xfrm>
+          <a:prstGeom prst="rect">
+            <a:avLst/>
+          </a:prstGeom>
+          <a:solidFill>
+            <a:srgbClr val="3FB950"/>
+          </a:solidFill>
+          <a:ln/>
+        </p:spPr>
+        <p:txBody>
+          <a:bodyPr/>
+          <a:lstStyle/>
+          <a:p>
+            <a:endParaRPr lang="en-US"/>
+          </a:p>
+        </p:txBody>
+      </p:sp>
+      <p:sp>
+        <p:nvSpPr>
+          <p:cNvPr id="22" name="Text 20"/>
+          <p:cNvSpPr/>
+          <p:nvPr/>
+        </p:nvSpPr>
+        <p:spPr>
+          <a:xfrm>
+            <a:off x="8412480" y="1783080"/>
+            <a:ext cx="548640" cy="548640"/>
+          </a:xfrm>
+          <a:prstGeom prst="rect">
+            <a:avLst/>
+          </a:prstGeom>
+          <a:noFill/>
+          <a:ln/>
+        </p:spPr>
+        <p:txBody>
+          <a:bodyPr wrap="square" rtlCol="0" anchor="ctr"/>
+          <a:lstStyle/>
+          <a:p>
+            <a:pPr marL="0" indent="0">
+              <a:buNone/>
+            </a:pPr>
+            <a:r>
+              <a:rPr lang="en-US" sz="2800" dirty="0">
+                <a:solidFill>
+                  <a:srgbClr val="000000"/>
+                </a:solidFill>
+              </a:rPr>
+              <a:t>🔍</a:t>
+            </a:r>
+            <a:endParaRPr lang="en-US" sz="2800" dirty="0"/>
+          </a:p>
+        </p:txBody>
+      </p:sp>
+      <p:sp>
+        <p:nvSpPr>
+          <p:cNvPr id="23" name="Text 21"/>
+          <p:cNvSpPr/>
+          <p:nvPr/>
+        </p:nvSpPr>
+        <p:spPr>
+          <a:xfrm>
+            <a:off x="9006840" y="1737360"/>
+            <a:ext cx="2377440" cy="640080"/>
+          </a:xfrm>
+          <a:prstGeom prst="rect">
+            <a:avLst/>
+          </a:prstGeom>
+          <a:noFill/>
+          <a:ln/>
+        </p:spPr>
+        <p:txBody>
+          <a:bodyPr wrap="square" rtlCol="0" anchor="ctr"/>
+          <a:lstStyle/>
+          <a:p>
+            <a:pPr marL="0" indent="0">
+              <a:lnSpc>
+                <a:spcPct val="115000"/>
+              </a:lnSpc>
+              <a:buNone/>
+            </a:pPr>
+            <a:r>
+              <a:rPr lang="en-US" sz="1800" b="1" dirty="0">
+                <a:solidFill>
+                  <a:srgbClr val="E6EDF3"/>
+                </a:solidFill>
+                <a:latin typeface="Segoe UI" pitchFamily="34" charset="0"/>
+                <a:ea typeface="Segoe UI" pitchFamily="34" charset="-122"/>
+                <a:cs typeface="Segoe UI" pitchFamily="34" charset="-120"/>
+              </a:rPr>
+              <a:t>Code Quality</a:t>
+            </a:r>
+            <a:endParaRPr lang="en-US" sz="1800" dirty="0"/>
+          </a:p>
+          <a:p>
+            <a:pPr marL="0" indent="0">
+              <a:lnSpc>
+                <a:spcPct val="115000"/>
+              </a:lnSpc>
+              <a:buNone/>
+            </a:pPr>
+            <a:r>
+              <a:rPr lang="en-US" sz="1800" b="1" dirty="0">
+                <a:solidFill>
+                  <a:srgbClr val="E6EDF3"/>
+                </a:solidFill>
+                <a:latin typeface="Segoe UI" pitchFamily="34" charset="0"/>
+                <a:ea typeface="Segoe UI" pitchFamily="34" charset="-122"/>
+                <a:cs typeface="Segoe UI" pitchFamily="34" charset="-120"/>
+              </a:rPr>
+              <a:t>&amp; Testing</a:t>
+            </a:r>
+            <a:endParaRPr lang="en-US" sz="1800" dirty="0"/>
+          </a:p>
+        </p:txBody>
+      </p:sp>
+      <p:sp>
+        <p:nvSpPr>
+          <p:cNvPr id="24" name="Text 22"/>
+          <p:cNvSpPr/>
+          <p:nvPr/>
+        </p:nvSpPr>
+        <p:spPr>
+          <a:xfrm>
+            <a:off x="8412480" y="2606040"/>
+            <a:ext cx="3017520" cy="914400"/>
+          </a:xfrm>
+          <a:prstGeom prst="rect">
+            <a:avLst/>
+          </a:prstGeom>
+          <a:noFill/>
+          <a:ln/>
+        </p:spPr>
+        <p:txBody>
+          <a:bodyPr wrap="square" rtlCol="0" anchor="ctr"/>
+          <a:lstStyle/>
+          <a:p>
+            <a:pPr marL="0" indent="0">
+              <a:lnSpc>
+                <a:spcPct val="130000"/>
+              </a:lnSpc>
+              <a:buNone/>
+            </a:pPr>
+            <a:r>
+              <a:rPr lang="en-US" sz="1500" dirty="0">
+                <a:solidFill>
+                  <a:srgbClr val="8B949E"/>
+                </a:solidFill>
+                <a:latin typeface="Segoe UI" pitchFamily="34" charset="0"/>
+                <a:ea typeface="Segoe UI" pitchFamily="34" charset="-122"/>
+                <a:cs typeface="Segoe UI" pitchFamily="34" charset="-120"/>
+              </a:rPr>
+              <a:t>CI failure diagnosis,</a:t>
+            </a:r>
+            <a:endParaRPr lang="en-US" sz="1500" dirty="0"/>
+          </a:p>
+          <a:p>
+            <a:pPr marL="0" indent="0">
+              <a:lnSpc>
+                <a:spcPct val="130000"/>
+              </a:lnSpc>
+              <a:buNone/>
+            </a:pPr>
+            <a:r>
+              <a:rPr lang="en-US" sz="1500" dirty="0">
+                <a:solidFill>
+                  <a:srgbClr val="8B949E"/>
+                </a:solidFill>
+                <a:latin typeface="Segoe UI" pitchFamily="34" charset="0"/>
+                <a:ea typeface="Segoe UI" pitchFamily="34" charset="-122"/>
+                <a:cs typeface="Segoe UI" pitchFamily="34" charset="-120"/>
+              </a:rPr>
+              <a:t>test improvements</a:t>
+            </a:r>
+            <a:endParaRPr lang="en-US" sz="1500" dirty="0"/>
+          </a:p>
+        </p:txBody>
+      </p:sp>
+      <p:sp>
+        <p:nvSpPr>
+          <p:cNvPr id="25" name="Shape 23"/>
+          <p:cNvSpPr/>
+          <p:nvPr/>
+        </p:nvSpPr>
+        <p:spPr>
+          <a:xfrm>
+            <a:off x="758952" y="4105656"/>
+            <a:ext cx="3429000" cy="2148840"/>
+          </a:xfrm>
+          <a:prstGeom prst="roundRect">
+            <a:avLst>
+              <a:gd name="adj" fmla="val 5106"/>
+            </a:avLst>
+          </a:prstGeom>
+          <a:solidFill>
+            <a:srgbClr val="000000">
+              <a:alpha val="40000"/>
+            </a:srgbClr>
+          </a:solidFill>
+          <a:ln/>
+        </p:spPr>
+        <p:txBody>
+          <a:bodyPr/>
+          <a:lstStyle/>
+          <a:p>
+            <a:endParaRPr lang="en-US"/>
+          </a:p>
+        </p:txBody>
+      </p:sp>
+      <p:sp>
+        <p:nvSpPr>
+          <p:cNvPr id="26" name="Shape 24"/>
+          <p:cNvSpPr/>
+          <p:nvPr/>
+        </p:nvSpPr>
+        <p:spPr>
+          <a:xfrm>
+            <a:off x="731520" y="4069080"/>
+            <a:ext cx="3429000" cy="2148840"/>
+          </a:xfrm>
+          <a:prstGeom prst="roundRect">
+            <a:avLst>
+              <a:gd name="adj" fmla="val 5106"/>
+            </a:avLst>
+          </a:prstGeom>
+          <a:solidFill>
+            <a:srgbClr val="21262D"/>
+          </a:solidFill>
+          <a:ln w="6350">
+            <a:solidFill>
+              <a:srgbClr val="30363D"/>
+            </a:solidFill>
+            <a:prstDash val="solid"/>
+          </a:ln>
+        </p:spPr>
+        <p:txBody>
+          <a:bodyPr/>
+          <a:lstStyle/>
+          <a:p>
+            <a:endParaRPr lang="en-US"/>
+          </a:p>
+        </p:txBody>
+      </p:sp>
+      <p:sp>
+        <p:nvSpPr>
+          <p:cNvPr id="27" name="Shape 25"/>
+          <p:cNvSpPr/>
+          <p:nvPr/>
+        </p:nvSpPr>
+        <p:spPr>
+          <a:xfrm>
+            <a:off x="868680" y="4069080"/>
+            <a:ext cx="3154680" cy="36576"/>
+          </a:xfrm>
+          <a:prstGeom prst="rect">
+            <a:avLst/>
+          </a:prstGeom>
+          <a:solidFill>
+            <a:srgbClr val="A371F7"/>
+          </a:solidFill>
+          <a:ln/>
+        </p:spPr>
+        <p:txBody>
+          <a:bodyPr/>
+          <a:lstStyle/>
+          <a:p>
+            <a:endParaRPr lang="en-US"/>
+          </a:p>
+        </p:txBody>
+      </p:sp>
+      <p:sp>
+        <p:nvSpPr>
+          <p:cNvPr id="28" name="Text 26"/>
+          <p:cNvSpPr/>
+          <p:nvPr/>
+        </p:nvSpPr>
+        <p:spPr>
+          <a:xfrm>
+            <a:off x="914400" y="4297680"/>
+            <a:ext cx="548640" cy="548640"/>
+          </a:xfrm>
+          <a:prstGeom prst="rect">
+            <a:avLst/>
+          </a:prstGeom>
+          <a:noFill/>
+          <a:ln/>
+        </p:spPr>
+        <p:txBody>
+          <a:bodyPr wrap="square" rtlCol="0" anchor="ctr"/>
+          <a:lstStyle/>
+          <a:p>
+            <a:pPr marL="0" indent="0">
+              <a:buNone/>
+            </a:pPr>
+            <a:r>
+              <a:rPr lang="en-US" sz="2800" dirty="0">
+                <a:solidFill>
+                  <a:srgbClr val="000000"/>
+                </a:solidFill>
+              </a:rPr>
+              <a:t>📊</a:t>
+            </a:r>
+            <a:endParaRPr lang="en-US" sz="2800" dirty="0"/>
+          </a:p>
+        </p:txBody>
+      </p:sp>
+      <p:sp>
+        <p:nvSpPr>
+          <p:cNvPr id="29" name="Text 27"/>
+          <p:cNvSpPr/>
+          <p:nvPr/>
+        </p:nvSpPr>
+        <p:spPr>
+          <a:xfrm>
+            <a:off x="1508760" y="4251960"/>
+            <a:ext cx="2377440" cy="640080"/>
+          </a:xfrm>
+          <a:prstGeom prst="rect">
+            <a:avLst/>
+          </a:prstGeom>
+          <a:noFill/>
+          <a:ln/>
+        </p:spPr>
+        <p:txBody>
+          <a:bodyPr wrap="square" rtlCol="0" anchor="ctr"/>
+          <a:lstStyle/>
+          <a:p>
+            <a:pPr marL="0" indent="0">
+              <a:lnSpc>
+                <a:spcPct val="115000"/>
+              </a:lnSpc>
+              <a:buNone/>
+            </a:pPr>
+            <a:r>
+              <a:rPr lang="en-US" sz="1800" b="1" dirty="0">
+                <a:solidFill>
+                  <a:srgbClr val="E6EDF3"/>
+                </a:solidFill>
+                <a:latin typeface="Segoe UI" pitchFamily="34" charset="0"/>
+                <a:ea typeface="Segoe UI" pitchFamily="34" charset="-122"/>
+                <a:cs typeface="Segoe UI" pitchFamily="34" charset="-120"/>
+              </a:rPr>
+              <a:t>Metrics &amp;</a:t>
+            </a:r>
+            <a:endParaRPr lang="en-US" sz="1800" dirty="0"/>
+          </a:p>
+          <a:p>
+            <a:pPr marL="0" indent="0">
+              <a:lnSpc>
+                <a:spcPct val="115000"/>
+              </a:lnSpc>
+              <a:buNone/>
+            </a:pPr>
+            <a:r>
+              <a:rPr lang="en-US" sz="1800" b="1" dirty="0">
+                <a:solidFill>
+                  <a:srgbClr val="E6EDF3"/>
+                </a:solidFill>
+                <a:latin typeface="Segoe UI" pitchFamily="34" charset="0"/>
+                <a:ea typeface="Segoe UI" pitchFamily="34" charset="-122"/>
+                <a:cs typeface="Segoe UI" pitchFamily="34" charset="-120"/>
+              </a:rPr>
+              <a:t>Analytics</a:t>
+            </a:r>
+            <a:endParaRPr lang="en-US" sz="1800" dirty="0"/>
+          </a:p>
+        </p:txBody>
+      </p:sp>
+      <p:sp>
+        <p:nvSpPr>
+          <p:cNvPr id="30" name="Text 28"/>
+          <p:cNvSpPr/>
+          <p:nvPr/>
+        </p:nvSpPr>
+        <p:spPr>
+          <a:xfrm>
+            <a:off x="914400" y="5120640"/>
+            <a:ext cx="3017520" cy="914400"/>
+          </a:xfrm>
+          <a:prstGeom prst="rect">
+            <a:avLst/>
+          </a:prstGeom>
+          <a:noFill/>
+          <a:ln/>
+        </p:spPr>
+        <p:txBody>
+          <a:bodyPr wrap="square" rtlCol="0" anchor="ctr"/>
+          <a:lstStyle/>
+          <a:p>
+            <a:pPr marL="0" indent="0">
+              <a:lnSpc>
+                <a:spcPct val="130000"/>
+              </a:lnSpc>
+              <a:buNone/>
+            </a:pPr>
+            <a:r>
+              <a:rPr lang="en-US" sz="1500" dirty="0">
+                <a:solidFill>
+                  <a:srgbClr val="8B949E"/>
+                </a:solidFill>
+                <a:latin typeface="Segoe UI" pitchFamily="34" charset="0"/>
+                <a:ea typeface="Segoe UI" pitchFamily="34" charset="-122"/>
+                <a:cs typeface="Segoe UI" pitchFamily="34" charset="-120"/>
+              </a:rPr>
+              <a:t>Daily reports, trend</a:t>
+            </a:r>
+            <a:endParaRPr lang="en-US" sz="1500" dirty="0"/>
+          </a:p>
+          <a:p>
+            <a:pPr marL="0" indent="0">
+              <a:lnSpc>
+                <a:spcPct val="130000"/>
+              </a:lnSpc>
+              <a:buNone/>
+            </a:pPr>
+            <a:r>
+              <a:rPr lang="en-US" sz="1500" dirty="0">
+                <a:solidFill>
+                  <a:srgbClr val="8B949E"/>
+                </a:solidFill>
+                <a:latin typeface="Segoe UI" pitchFamily="34" charset="0"/>
+                <a:ea typeface="Segoe UI" pitchFamily="34" charset="-122"/>
+                <a:cs typeface="Segoe UI" pitchFamily="34" charset="-120"/>
+              </a:rPr>
+              <a:t>analysis, health monitoring</a:t>
+            </a:r>
+            <a:endParaRPr lang="en-US" sz="1500" dirty="0"/>
+          </a:p>
+        </p:txBody>
+      </p:sp>
+      <p:sp>
+        <p:nvSpPr>
+          <p:cNvPr id="31" name="Shape 29"/>
+          <p:cNvSpPr/>
+          <p:nvPr/>
+        </p:nvSpPr>
+        <p:spPr>
+          <a:xfrm>
+            <a:off x="4507992" y="4105656"/>
+            <a:ext cx="3429000" cy="2148840"/>
+          </a:xfrm>
+          <a:prstGeom prst="roundRect">
+            <a:avLst>
+              <a:gd name="adj" fmla="val 5106"/>
+            </a:avLst>
+          </a:prstGeom>
+          <a:solidFill>
+            <a:srgbClr val="000000">
+              <a:alpha val="40000"/>
+            </a:srgbClr>
+          </a:solidFill>
+          <a:ln/>
+        </p:spPr>
+        <p:txBody>
+          <a:bodyPr/>
+          <a:lstStyle/>
+          <a:p>
+            <a:endParaRPr lang="en-US"/>
+          </a:p>
+        </p:txBody>
+      </p:sp>
+      <p:sp>
+        <p:nvSpPr>
+          <p:cNvPr id="32" name="Shape 30"/>
+          <p:cNvSpPr/>
+          <p:nvPr/>
+        </p:nvSpPr>
+        <p:spPr>
+          <a:xfrm>
+            <a:off x="4480560" y="4069080"/>
+            <a:ext cx="3429000" cy="2148840"/>
+          </a:xfrm>
+          <a:prstGeom prst="roundRect">
+            <a:avLst>
+              <a:gd name="adj" fmla="val 5106"/>
+            </a:avLst>
+          </a:prstGeom>
+          <a:solidFill>
+            <a:srgbClr val="21262D"/>
+          </a:solidFill>
+          <a:ln w="6350">
+            <a:solidFill>
+              <a:srgbClr val="30363D"/>
+            </a:solidFill>
+            <a:prstDash val="solid"/>
+          </a:ln>
+        </p:spPr>
+        <p:txBody>
+          <a:bodyPr/>
+          <a:lstStyle/>
+          <a:p>
+            <a:endParaRPr lang="en-US"/>
+          </a:p>
+        </p:txBody>
+      </p:sp>
+      <p:sp>
+        <p:nvSpPr>
+          <p:cNvPr id="33" name="Shape 31"/>
+          <p:cNvSpPr/>
+          <p:nvPr/>
+        </p:nvSpPr>
+        <p:spPr>
+          <a:xfrm>
+            <a:off x="4617720" y="4069080"/>
+            <a:ext cx="3154680" cy="36576"/>
+          </a:xfrm>
+          <a:prstGeom prst="rect">
+            <a:avLst/>
+          </a:prstGeom>
+          <a:solidFill>
+            <a:srgbClr val="238636"/>
+          </a:solidFill>
+          <a:ln/>
+        </p:spPr>
+        <p:txBody>
+          <a:bodyPr/>
+          <a:lstStyle/>
+          <a:p>
+            <a:endParaRPr lang="en-US"/>
+          </a:p>
+        </p:txBody>
+      </p:sp>
+      <p:sp>
+        <p:nvSpPr>
+          <p:cNvPr id="34" name="Text 32"/>
+          <p:cNvSpPr/>
+          <p:nvPr/>
+        </p:nvSpPr>
+        <p:spPr>
+          <a:xfrm>
+            <a:off x="4663440" y="4297680"/>
+            <a:ext cx="548640" cy="548640"/>
+          </a:xfrm>
+          <a:prstGeom prst="rect">
+            <a:avLst/>
+          </a:prstGeom>
+          <a:noFill/>
+          <a:ln/>
+        </p:spPr>
+        <p:txBody>
+          <a:bodyPr wrap="square" rtlCol="0" anchor="ctr"/>
+          <a:lstStyle/>
+          <a:p>
+            <a:pPr marL="0" indent="0">
+              <a:buNone/>
+            </a:pPr>
+            <a:r>
+              <a:rPr lang="en-US" sz="2800" dirty="0">
+                <a:solidFill>
+                  <a:srgbClr val="000000"/>
+                </a:solidFill>
+              </a:rPr>
+              <a:t>🔄</a:t>
+            </a:r>
+            <a:endParaRPr lang="en-US" sz="2800" dirty="0"/>
+          </a:p>
+        </p:txBody>
+      </p:sp>
+      <p:sp>
+        <p:nvSpPr>
+          <p:cNvPr id="35" name="Text 33"/>
+          <p:cNvSpPr/>
+          <p:nvPr/>
+        </p:nvSpPr>
+        <p:spPr>
+          <a:xfrm>
+            <a:off x="5257800" y="4251960"/>
+            <a:ext cx="2377440" cy="640080"/>
+          </a:xfrm>
+          <a:prstGeom prst="rect">
+            <a:avLst/>
+          </a:prstGeom>
+          <a:noFill/>
+          <a:ln/>
+        </p:spPr>
+        <p:txBody>
+          <a:bodyPr wrap="square" rtlCol="0" anchor="ctr"/>
+          <a:lstStyle/>
+          <a:p>
+            <a:pPr marL="0" indent="0">
+              <a:lnSpc>
+                <a:spcPct val="115000"/>
+              </a:lnSpc>
+              <a:buNone/>
+            </a:pPr>
+            <a:r>
+              <a:rPr lang="en-US" sz="1800" b="1" dirty="0">
+                <a:solidFill>
+                  <a:srgbClr val="E6EDF3"/>
+                </a:solidFill>
+                <a:latin typeface="Segoe UI" pitchFamily="34" charset="0"/>
+                <a:ea typeface="Segoe UI" pitchFamily="34" charset="-122"/>
+                <a:cs typeface="Segoe UI" pitchFamily="34" charset="-120"/>
+              </a:rPr>
+              <a:t>Continuous</a:t>
+            </a:r>
+            <a:endParaRPr lang="en-US" sz="1800" dirty="0"/>
+          </a:p>
+          <a:p>
+            <a:pPr marL="0" indent="0">
+              <a:lnSpc>
+                <a:spcPct val="115000"/>
+              </a:lnSpc>
+              <a:buNone/>
+            </a:pPr>
+            <a:r>
+              <a:rPr lang="en-US" sz="1800" b="1" dirty="0">
+                <a:solidFill>
+                  <a:srgbClr val="E6EDF3"/>
+                </a:solidFill>
+                <a:latin typeface="Segoe UI" pitchFamily="34" charset="0"/>
+                <a:ea typeface="Segoe UI" pitchFamily="34" charset="-122"/>
+                <a:cs typeface="Segoe UI" pitchFamily="34" charset="-120"/>
+              </a:rPr>
+              <a:t>Improvement</a:t>
+            </a:r>
+            <a:endParaRPr lang="en-US" sz="1800" dirty="0"/>
+          </a:p>
+        </p:txBody>
+      </p:sp>
+      <p:sp>
+        <p:nvSpPr>
+          <p:cNvPr id="36" name="Text 34"/>
+          <p:cNvSpPr/>
+          <p:nvPr/>
+        </p:nvSpPr>
+        <p:spPr>
+          <a:xfrm>
+            <a:off x="4663440" y="5120640"/>
+            <a:ext cx="3017520" cy="914400"/>
+          </a:xfrm>
+          <a:prstGeom prst="rect">
+            <a:avLst/>
+          </a:prstGeom>
+          <a:noFill/>
+          <a:ln/>
+        </p:spPr>
+        <p:txBody>
+          <a:bodyPr wrap="square" rtlCol="0" anchor="ctr"/>
+          <a:lstStyle/>
+          <a:p>
+            <a:pPr marL="0" indent="0">
+              <a:lnSpc>
+                <a:spcPct val="130000"/>
+              </a:lnSpc>
+              <a:buNone/>
+            </a:pPr>
+            <a:r>
+              <a:rPr lang="en-US" sz="1500" dirty="0">
+                <a:solidFill>
+                  <a:srgbClr val="8B949E"/>
+                </a:solidFill>
+                <a:latin typeface="Segoe UI" pitchFamily="34" charset="0"/>
+                <a:ea typeface="Segoe UI" pitchFamily="34" charset="-122"/>
+                <a:cs typeface="Segoe UI" pitchFamily="34" charset="-120"/>
+              </a:rPr>
+              <a:t>Daily code simplification</a:t>
+            </a:r>
+            <a:endParaRPr lang="en-US" sz="1500" dirty="0"/>
+          </a:p>
+          <a:p>
+            <a:pPr marL="0" indent="0">
+              <a:lnSpc>
+                <a:spcPct val="130000"/>
+              </a:lnSpc>
+              <a:buNone/>
+            </a:pPr>
+            <a:r>
+              <a:rPr lang="en-US" sz="1500" dirty="0">
+                <a:solidFill>
+                  <a:srgbClr val="8B949E"/>
+                </a:solidFill>
+                <a:latin typeface="Segoe UI" pitchFamily="34" charset="0"/>
+                <a:ea typeface="Segoe UI" pitchFamily="34" charset="-122"/>
+                <a:cs typeface="Segoe UI" pitchFamily="34" charset="-120"/>
+              </a:rPr>
+              <a:t>&amp; refactoring</a:t>
+            </a:r>
+            <a:endParaRPr lang="en-US" sz="1500" dirty="0"/>
+          </a:p>
+        </p:txBody>
+      </p:sp>
+      <p:sp>
+        <p:nvSpPr>
+          <p:cNvPr id="37" name="Shape 35"/>
+          <p:cNvSpPr/>
+          <p:nvPr/>
+        </p:nvSpPr>
+        <p:spPr>
+          <a:xfrm>
+            <a:off x="8257032" y="4105656"/>
+            <a:ext cx="3429000" cy="2148840"/>
+          </a:xfrm>
+          <a:prstGeom prst="roundRect">
+            <a:avLst>
+              <a:gd name="adj" fmla="val 5106"/>
+            </a:avLst>
+          </a:prstGeom>
+          <a:solidFill>
+            <a:srgbClr val="000000">
+              <a:alpha val="40000"/>
+            </a:srgbClr>
+          </a:solidFill>
+          <a:ln/>
+        </p:spPr>
+        <p:txBody>
+          <a:bodyPr/>
+          <a:lstStyle/>
+          <a:p>
+            <a:endParaRPr lang="en-US"/>
+          </a:p>
+        </p:txBody>
+      </p:sp>
+      <p:sp>
+        <p:nvSpPr>
+          <p:cNvPr id="38" name="Shape 36"/>
+          <p:cNvSpPr/>
+          <p:nvPr/>
+        </p:nvSpPr>
+        <p:spPr>
+          <a:xfrm>
+            <a:off x="8229600" y="4069080"/>
+            <a:ext cx="3429000" cy="2148840"/>
+          </a:xfrm>
+          <a:prstGeom prst="roundRect">
+            <a:avLst>
+              <a:gd name="adj" fmla="val 5106"/>
+            </a:avLst>
+          </a:prstGeom>
+          <a:solidFill>
+            <a:srgbClr val="21262D"/>
+          </a:solidFill>
+          <a:ln w="6350">
+            <a:solidFill>
+              <a:srgbClr val="30363D"/>
+            </a:solidFill>
+            <a:prstDash val="solid"/>
+          </a:ln>
+        </p:spPr>
+        <p:txBody>
+          <a:bodyPr/>
+          <a:lstStyle/>
+          <a:p>
+            <a:endParaRPr lang="en-US"/>
+          </a:p>
+        </p:txBody>
+      </p:sp>
+      <p:sp>
+        <p:nvSpPr>
+          <p:cNvPr id="39" name="Shape 37"/>
+          <p:cNvSpPr/>
+          <p:nvPr/>
+        </p:nvSpPr>
+        <p:spPr>
+          <a:xfrm>
+            <a:off x="8366760" y="4069080"/>
+            <a:ext cx="3154680" cy="36576"/>
+          </a:xfrm>
+          <a:prstGeom prst="rect">
+            <a:avLst/>
+          </a:prstGeom>
+          <a:solidFill>
+            <a:srgbClr val="D29922"/>
+          </a:solidFill>
+          <a:ln/>
+        </p:spPr>
+        <p:txBody>
+          <a:bodyPr/>
+          <a:lstStyle/>
+          <a:p>
+            <a:endParaRPr lang="en-US"/>
+          </a:p>
+        </p:txBody>
+      </p:sp>
+      <p:sp>
+        <p:nvSpPr>
+          <p:cNvPr id="40" name="Text 38"/>
+          <p:cNvSpPr/>
+          <p:nvPr/>
+        </p:nvSpPr>
+        <p:spPr>
+          <a:xfrm>
+            <a:off x="8412480" y="4297680"/>
+            <a:ext cx="548640" cy="548640"/>
+          </a:xfrm>
+          <a:prstGeom prst="rect">
+            <a:avLst/>
+          </a:prstGeom>
+          <a:noFill/>
+          <a:ln/>
+        </p:spPr>
+        <p:txBody>
+          <a:bodyPr wrap="square" rtlCol="0" anchor="ctr"/>
+          <a:lstStyle/>
+          <a:p>
+            <a:pPr marL="0" indent="0">
+              <a:buNone/>
+            </a:pPr>
+            <a:r>
+              <a:rPr lang="en-US" sz="2800" dirty="0">
+                <a:solidFill>
+                  <a:srgbClr val="000000"/>
+                </a:solidFill>
+              </a:rPr>
+              <a:t>🌐</a:t>
+            </a:r>
+            <a:endParaRPr lang="en-US" sz="2800" dirty="0"/>
+          </a:p>
+        </p:txBody>
+      </p:sp>
+      <p:sp>
+        <p:nvSpPr>
+          <p:cNvPr id="41" name="Text 39"/>
+          <p:cNvSpPr/>
+          <p:nvPr/>
+        </p:nvSpPr>
+        <p:spPr>
+          <a:xfrm>
+            <a:off x="9006840" y="4251960"/>
+            <a:ext cx="2377440" cy="640080"/>
+          </a:xfrm>
+          <a:prstGeom prst="rect">
+            <a:avLst/>
+          </a:prstGeom>
+          <a:noFill/>
+          <a:ln/>
+        </p:spPr>
+        <p:txBody>
+          <a:bodyPr wrap="square" rtlCol="0" anchor="ctr"/>
+          <a:lstStyle/>
+          <a:p>
+            <a:pPr marL="0" indent="0">
+              <a:lnSpc>
+                <a:spcPct val="115000"/>
+              </a:lnSpc>
+              <a:buNone/>
+            </a:pPr>
+            <a:r>
+              <a:rPr lang="en-US" sz="1800" b="1" dirty="0">
+                <a:solidFill>
+                  <a:srgbClr val="E6EDF3"/>
+                </a:solidFill>
+                <a:latin typeface="Segoe UI" pitchFamily="34" charset="0"/>
+                <a:ea typeface="Segoe UI" pitchFamily="34" charset="-122"/>
+                <a:cs typeface="Segoe UI" pitchFamily="34" charset="-120"/>
+              </a:rPr>
+              <a:t>Multi-Repo</a:t>
+            </a:r>
+            <a:endParaRPr lang="en-US" sz="1800" dirty="0"/>
+          </a:p>
+          <a:p>
+            <a:pPr marL="0" indent="0">
+              <a:lnSpc>
+                <a:spcPct val="115000"/>
+              </a:lnSpc>
+              <a:buNone/>
+            </a:pPr>
+            <a:r>
+              <a:rPr lang="en-US" sz="1800" b="1" dirty="0">
+                <a:solidFill>
+                  <a:srgbClr val="E6EDF3"/>
+                </a:solidFill>
+                <a:latin typeface="Segoe UI" pitchFamily="34" charset="0"/>
+                <a:ea typeface="Segoe UI" pitchFamily="34" charset="-122"/>
+                <a:cs typeface="Segoe UI" pitchFamily="34" charset="-120"/>
+              </a:rPr>
+              <a:t>Operations</a:t>
+            </a:r>
+            <a:endParaRPr lang="en-US" sz="1800" dirty="0"/>
+          </a:p>
+        </p:txBody>
+      </p:sp>
+      <p:sp>
+        <p:nvSpPr>
+          <p:cNvPr id="42" name="Text 40"/>
+          <p:cNvSpPr/>
+          <p:nvPr/>
+        </p:nvSpPr>
+        <p:spPr>
+          <a:xfrm>
+            <a:off x="8412480" y="5120640"/>
+            <a:ext cx="3017520" cy="914400"/>
+          </a:xfrm>
+          <a:prstGeom prst="rect">
+            <a:avLst/>
+          </a:prstGeom>
+          <a:noFill/>
+          <a:ln/>
+        </p:spPr>
+        <p:txBody>
+          <a:bodyPr wrap="square" rtlCol="0" anchor="ctr"/>
+          <a:lstStyle/>
+          <a:p>
+            <a:pPr marL="0" indent="0">
+              <a:lnSpc>
+                <a:spcPct val="130000"/>
+              </a:lnSpc>
+              <a:buNone/>
+            </a:pPr>
+            <a:r>
+              <a:rPr lang="en-US" sz="1500" dirty="0">
+                <a:solidFill>
+                  <a:srgbClr val="8B949E"/>
+                </a:solidFill>
+                <a:latin typeface="Segoe UI" pitchFamily="34" charset="0"/>
+                <a:ea typeface="Segoe UI" pitchFamily="34" charset="-122"/>
+                <a:cs typeface="Segoe UI" pitchFamily="34" charset="-120"/>
+              </a:rPr>
+              <a:t>Feature sync across</a:t>
+            </a:r>
+            <a:endParaRPr lang="en-US" sz="1500" dirty="0"/>
+          </a:p>
+          <a:p>
+            <a:pPr marL="0" indent="0">
+              <a:lnSpc>
+                <a:spcPct val="130000"/>
+              </a:lnSpc>
+              <a:buNone/>
+            </a:pPr>
+            <a:r>
+              <a:rPr lang="en-US" sz="1500" dirty="0">
+                <a:solidFill>
+                  <a:srgbClr val="8B949E"/>
+                </a:solidFill>
+                <a:latin typeface="Segoe UI" pitchFamily="34" charset="0"/>
+                <a:ea typeface="Segoe UI" pitchFamily="34" charset="-122"/>
+                <a:cs typeface="Segoe UI" pitchFamily="34" charset="-120"/>
+              </a:rPr>
+              <a:t>repositories</a:t>
+            </a:r>
+            <a:endParaRPr lang="en-US" sz="1500" dirty="0"/>
+          </a:p>
+        </p:txBody>
+      </p:sp>
+    </p:spTree>
+  </p:cSld>
+  <p:clrMapOvr>
+    <a:masterClrMapping/>
+  </p:clrMapOvr>
+</p:sld>
+</file>
+
+<file path=ppt/slides/slide11.xml><?xml version="1.0" encoding="utf-8"?>
 <p:sld xmlns:a="http://schemas.openxmlformats.org/drawingml/2006/main" xmlns:r="http://schemas.openxmlformats.org/officeDocument/2006/relationships" xmlns:p="http://schemas.openxmlformats.org/presentationml/2006/main">
   <p:cSld name="Slide 7">
     <p:bg>
@@ -5145,7 +6948,7 @@
 </p:sld>
 </file>
 
-<file path=ppt/slides/slide11.xml><?xml version="1.0" encoding="utf-8"?>
+<file path=ppt/slides/slide12.xml><?xml version="1.0" encoding="utf-8"?>
 <p:sld xmlns:a="http://schemas.openxmlformats.org/drawingml/2006/main" xmlns:r="http://schemas.openxmlformats.org/officeDocument/2006/relationships" xmlns:p="http://schemas.openxmlformats.org/presentationml/2006/main">
   <p:cSld name="Slide 8">
     <p:bg>
@@ -9630,8 +11433,8 @@
         </p:nvSpPr>
         <p:spPr>
           <a:xfrm>
-            <a:off x="731520" y="320040"/>
-            <a:ext cx="10058400" cy="640080"/>
+            <a:off x="731520" y="164592"/>
+            <a:ext cx="10058400" cy="484632"/>
           </a:xfrm>
           <a:prstGeom prst="rect">
             <a:avLst/>
@@ -9647,7 +11450,7 @@
               <a:buNone/>
             </a:pPr>
             <a:r>
-              <a:rPr lang="en-US" sz="3800" b="1" dirty="0">
+              <a:rPr lang="en-US" sz="3200" b="1" dirty="0">
                 <a:solidFill>
                   <a:srgbClr val="E6EDF3"/>
                 </a:solidFill>
@@ -9657,7 +11460,7 @@
               </a:rPr>
               <a:t>Security: 5-Layer Defense-in-Depth</a:t>
             </a:r>
-            <a:endParaRPr lang="en-US" sz="3800" dirty="0"/>
+            <a:endParaRPr lang="en-US" sz="3200" dirty="0"/>
           </a:p>
         </p:txBody>
       </p:sp>
@@ -9669,8 +11472,8 @@
         </p:nvSpPr>
         <p:spPr>
           <a:xfrm>
-            <a:off x="731520" y="914400"/>
-            <a:ext cx="9144000" cy="365760"/>
+            <a:off x="777240" y="649225"/>
+            <a:ext cx="9144000" cy="548638"/>
           </a:xfrm>
           <a:prstGeom prst="rect">
             <a:avLst/>
@@ -9682,9 +11485,6 @@
           <a:bodyPr wrap="square" rtlCol="0" anchor="ctr"/>
           <a:lstStyle/>
           <a:p>
-            <a:pPr marL="0" indent="0">
-              <a:buNone/>
-            </a:pPr>
             <a:r>
               <a:rPr lang="en-US" sz="1800" i="1" dirty="0">
                 <a:solidFill>
@@ -9694,9 +11494,131 @@
                 <a:ea typeface="Segoe UI" pitchFamily="34" charset="-122"/>
                 <a:cs typeface="Segoe UI" pitchFamily="34" charset="-120"/>
               </a:rPr>
-              <a:t>Intelligence of an agent  +  guardrails of CI/CD</a:t>
-            </a:r>
-            <a:endParaRPr lang="en-US" sz="1800" dirty="0"/>
+              <a:t>Intelligence of an agent  +  guardrails of </a:t>
+            </a:r>
+            <a:r>
+              <a:rPr lang="en-US" i="1" dirty="0">
+                <a:solidFill>
+                  <a:srgbClr val="8B949E"/>
+                </a:solidFill>
+                <a:latin typeface="Segoe UI" pitchFamily="34" charset="0"/>
+                <a:ea typeface="Segoe UI" pitchFamily="34" charset="-122"/>
+                <a:cs typeface="Segoe UI" pitchFamily="34" charset="-120"/>
+              </a:rPr>
+              <a:t>workflow </a:t>
+            </a:r>
+          </a:p>
+          <a:p>
+            <a:r>
+              <a:rPr lang="en-US" sz="1100" dirty="0">
+                <a:solidFill>
+                  <a:schemeClr val="bg1"/>
+                </a:solidFill>
+                <a:latin typeface="Segoe UI" pitchFamily="34" charset="0"/>
+                <a:ea typeface="Segoe UI" pitchFamily="34" charset="-122"/>
+                <a:cs typeface="Segoe UI" pitchFamily="34" charset="-120"/>
+                <a:hlinkClick r:id="rId3"/>
+              </a:rPr>
+              <a:t>modernize-</a:t>
+            </a:r>
+            <a:r>
+              <a:rPr lang="en-US" sz="1100" dirty="0" err="1">
+                <a:solidFill>
+                  <a:schemeClr val="bg1"/>
+                </a:solidFill>
+                <a:latin typeface="Segoe UI" pitchFamily="34" charset="0"/>
+                <a:ea typeface="Segoe UI" pitchFamily="34" charset="-122"/>
+                <a:cs typeface="Segoe UI" pitchFamily="34" charset="-120"/>
+                <a:hlinkClick r:id="rId3"/>
+              </a:rPr>
+              <a:t>compat</a:t>
+            </a:r>
+            <a:r>
+              <a:rPr lang="en-US" sz="1100" dirty="0">
+                <a:solidFill>
+                  <a:schemeClr val="bg1"/>
+                </a:solidFill>
+                <a:latin typeface="Segoe UI" pitchFamily="34" charset="0"/>
+                <a:ea typeface="Segoe UI" pitchFamily="34" charset="-122"/>
+                <a:cs typeface="Segoe UI" pitchFamily="34" charset="-120"/>
+                <a:hlinkClick r:id="rId3"/>
+              </a:rPr>
+              <a:t>-</a:t>
+            </a:r>
+            <a:r>
+              <a:rPr lang="en-US" sz="1100" dirty="0" err="1">
+                <a:solidFill>
+                  <a:schemeClr val="bg1"/>
+                </a:solidFill>
+                <a:latin typeface="Segoe UI" pitchFamily="34" charset="0"/>
+                <a:ea typeface="Segoe UI" pitchFamily="34" charset="-122"/>
+                <a:cs typeface="Segoe UI" pitchFamily="34" charset="-120"/>
+                <a:hlinkClick r:id="rId3"/>
+              </a:rPr>
+              <a:t>analyst</a:t>
+            </a:r>
+            <a:r>
+              <a:rPr lang="en-US" sz="1100" dirty="0" err="1">
+                <a:solidFill>
+                  <a:schemeClr val="bg1"/>
+                </a:solidFill>
+                <a:latin typeface="Segoe UI" pitchFamily="34" charset="0"/>
+                <a:ea typeface="Segoe UI" pitchFamily="34" charset="-122"/>
+                <a:cs typeface="Segoe UI" pitchFamily="34" charset="-120"/>
+              </a:rPr>
+              <a:t>.lock.yml</a:t>
+            </a:r>
+            <a:r>
+              <a:rPr lang="en-US" sz="1100" dirty="0">
+                <a:solidFill>
+                  <a:schemeClr val="bg1"/>
+                </a:solidFill>
+                <a:latin typeface="Segoe UI" pitchFamily="34" charset="0"/>
+                <a:ea typeface="Segoe UI" pitchFamily="34" charset="-122"/>
+                <a:cs typeface="Segoe UI" pitchFamily="34" charset="-120"/>
+              </a:rPr>
+              <a:t> </a:t>
+            </a:r>
+            <a:r>
+              <a:rPr lang="en-US" sz="1100" dirty="0">
+                <a:solidFill>
+                  <a:schemeClr val="bg1"/>
+                </a:solidFill>
+              </a:rPr>
+              <a:t>              </a:t>
+            </a:r>
+            <a:r>
+              <a:rPr lang="en-US" sz="1100" dirty="0" err="1">
+                <a:solidFill>
+                  <a:schemeClr val="bg1"/>
+                </a:solidFill>
+              </a:rPr>
+              <a:t>pre_activation</a:t>
+            </a:r>
+            <a:r>
+              <a:rPr lang="en-US" sz="1100" dirty="0">
+                <a:solidFill>
+                  <a:schemeClr val="bg1"/>
+                </a:solidFill>
+              </a:rPr>
+              <a:t> → activation → agent → detection → </a:t>
+            </a:r>
+            <a:r>
+              <a:rPr lang="en-US" sz="1100" dirty="0" err="1">
+                <a:solidFill>
+                  <a:schemeClr val="bg1"/>
+                </a:solidFill>
+              </a:rPr>
+              <a:t>safe_outputs</a:t>
+            </a:r>
+            <a:r>
+              <a:rPr lang="en-US" sz="1100" dirty="0">
+                <a:solidFill>
+                  <a:schemeClr val="bg1"/>
+                </a:solidFill>
+              </a:rPr>
+              <a:t> → conclusion</a:t>
+            </a:r>
           </a:p>
         </p:txBody>
       </p:sp>
@@ -9925,6 +11847,39 @@
           <a:bodyPr wrap="square" rtlCol="0" anchor="ctr"/>
           <a:lstStyle/>
           <a:p>
+            <a:r>
+              <a:rPr lang="en-US" sz="1200" dirty="0">
+                <a:solidFill>
+                  <a:srgbClr val="8B949E"/>
+                </a:solidFill>
+                <a:latin typeface="Segoe UI" pitchFamily="34" charset="0"/>
+                <a:cs typeface="Segoe UI" pitchFamily="34" charset="-120"/>
+              </a:rPr>
+              <a:t>Every Actions job gets a temporary </a:t>
+            </a:r>
+            <a:r>
+              <a:rPr lang="en-US" sz="1200" dirty="0">
+                <a:solidFill>
+                  <a:srgbClr val="8B949E"/>
+                </a:solidFill>
+                <a:latin typeface="Segoe UI" pitchFamily="34" charset="0"/>
+                <a:cs typeface="Segoe UI" pitchFamily="34" charset="-120"/>
+                <a:hlinkClick r:id="rId4"/>
+              </a:rPr>
+              <a:t>GITHUB_TOKEN </a:t>
+            </a:r>
+            <a:r>
+              <a:rPr lang="en-US" sz="1200" dirty="0">
+                <a:solidFill>
+                  <a:srgbClr val="8B949E"/>
+                </a:solidFill>
+                <a:latin typeface="Segoe UI" pitchFamily="34" charset="0"/>
+                <a:cs typeface="Segoe UI" pitchFamily="34" charset="-120"/>
+              </a:rPr>
+              <a:t>with only the permissions that job lists.</a:t>
+            </a:r>
+          </a:p>
+          <a:p>
             <a:pPr marL="0" indent="0">
               <a:lnSpc>
                 <a:spcPct val="130000"/>
@@ -9932,7 +11887,7 @@
               <a:buNone/>
             </a:pPr>
             <a:r>
-              <a:rPr lang="en-US" sz="1500" dirty="0">
+              <a:rPr lang="en-US" sz="1200" dirty="0">
                 <a:solidFill>
                   <a:srgbClr val="8B949E"/>
                 </a:solidFill>
@@ -9940,10 +11895,474 @@
                 <a:ea typeface="Segoe UI" pitchFamily="34" charset="-122"/>
                 <a:cs typeface="Segoe UI" pitchFamily="34" charset="-120"/>
               </a:rPr>
-              <a:t>Agent gets read-only GitHub token.</a:t>
-            </a:r>
-            <a:endParaRPr lang="en-US" sz="1500" dirty="0"/>
-          </a:p>
+              <a:t>Cannot push, create PRs, or delete.</a:t>
+            </a:r>
+            <a:endParaRPr lang="en-US" sz="1200" dirty="0"/>
+          </a:p>
+        </p:txBody>
+      </p:sp>
+      <p:sp>
+        <p:nvSpPr>
+          <p:cNvPr id="14" name="Shape 12"/>
+          <p:cNvSpPr/>
+          <p:nvPr/>
+        </p:nvSpPr>
+        <p:spPr>
+          <a:xfrm>
+            <a:off x="758952" y="2505456"/>
+            <a:ext cx="10698480" cy="822960"/>
+          </a:xfrm>
+          <a:prstGeom prst="roundRect">
+            <a:avLst>
+              <a:gd name="adj" fmla="val 13333"/>
+            </a:avLst>
+          </a:prstGeom>
+          <a:solidFill>
+            <a:srgbClr val="000000">
+              <a:alpha val="40000"/>
+            </a:srgbClr>
+          </a:solidFill>
+          <a:ln/>
+        </p:spPr>
+        <p:txBody>
+          <a:bodyPr/>
+          <a:lstStyle/>
+          <a:p>
+            <a:endParaRPr lang="en-US"/>
+          </a:p>
+        </p:txBody>
+      </p:sp>
+      <p:sp>
+        <p:nvSpPr>
+          <p:cNvPr id="15" name="Shape 13"/>
+          <p:cNvSpPr/>
+          <p:nvPr/>
+        </p:nvSpPr>
+        <p:spPr>
+          <a:xfrm>
+            <a:off x="731520" y="2484555"/>
+            <a:ext cx="10698480" cy="822960"/>
+          </a:xfrm>
+          <a:prstGeom prst="roundRect">
+            <a:avLst>
+              <a:gd name="adj" fmla="val 13333"/>
+            </a:avLst>
+          </a:prstGeom>
+          <a:solidFill>
+            <a:srgbClr val="21262D"/>
+          </a:solidFill>
+          <a:ln w="6350">
+            <a:solidFill>
+              <a:srgbClr val="30363D"/>
+            </a:solidFill>
+            <a:prstDash val="solid"/>
+          </a:ln>
+        </p:spPr>
+        <p:txBody>
+          <a:bodyPr/>
+          <a:lstStyle/>
+          <a:p>
+            <a:endParaRPr lang="en-US"/>
+          </a:p>
+        </p:txBody>
+      </p:sp>
+      <p:sp>
+        <p:nvSpPr>
+          <p:cNvPr id="16" name="Shape 14"/>
+          <p:cNvSpPr/>
+          <p:nvPr/>
+        </p:nvSpPr>
+        <p:spPr>
+          <a:xfrm>
+            <a:off x="731520" y="2560320"/>
+            <a:ext cx="45720" cy="640080"/>
+          </a:xfrm>
+          <a:prstGeom prst="rect">
+            <a:avLst/>
+          </a:prstGeom>
+          <a:solidFill>
+            <a:srgbClr val="58A6FF"/>
+          </a:solidFill>
+          <a:ln/>
+        </p:spPr>
+        <p:txBody>
+          <a:bodyPr/>
+          <a:lstStyle/>
+          <a:p>
+            <a:endParaRPr lang="en-US"/>
+          </a:p>
+        </p:txBody>
+      </p:sp>
+      <p:sp>
+        <p:nvSpPr>
+          <p:cNvPr id="17" name="Shape 15"/>
+          <p:cNvSpPr/>
+          <p:nvPr/>
+        </p:nvSpPr>
+        <p:spPr>
+          <a:xfrm>
+            <a:off x="1051560" y="2633472"/>
+            <a:ext cx="502920" cy="502920"/>
+          </a:xfrm>
+          <a:prstGeom prst="ellipse">
+            <a:avLst/>
+          </a:prstGeom>
+          <a:solidFill>
+            <a:srgbClr val="58A6FF">
+              <a:alpha val="20000"/>
+            </a:srgbClr>
+          </a:solidFill>
+          <a:ln w="19050">
+            <a:solidFill>
+              <a:srgbClr val="58A6FF"/>
+            </a:solidFill>
+            <a:prstDash val="solid"/>
+          </a:ln>
+        </p:spPr>
+        <p:txBody>
+          <a:bodyPr/>
+          <a:lstStyle/>
+          <a:p>
+            <a:endParaRPr lang="en-US"/>
+          </a:p>
+        </p:txBody>
+      </p:sp>
+      <p:sp>
+        <p:nvSpPr>
+          <p:cNvPr id="18" name="Text 16"/>
+          <p:cNvSpPr/>
+          <p:nvPr/>
+        </p:nvSpPr>
+        <p:spPr>
+          <a:xfrm>
+            <a:off x="1051560" y="2633472"/>
+            <a:ext cx="502920" cy="502920"/>
+          </a:xfrm>
+          <a:prstGeom prst="rect">
+            <a:avLst/>
+          </a:prstGeom>
+          <a:noFill/>
+          <a:ln/>
+        </p:spPr>
+        <p:txBody>
+          <a:bodyPr wrap="square" rtlCol="0" anchor="ctr"/>
+          <a:lstStyle/>
+          <a:p>
+            <a:pPr marL="0" indent="0" algn="ctr">
+              <a:buNone/>
+            </a:pPr>
+            <a:r>
+              <a:rPr lang="en-US" sz="1800" b="1" dirty="0">
+                <a:solidFill>
+                  <a:srgbClr val="58A6FF"/>
+                </a:solidFill>
+                <a:latin typeface="Segoe UI" pitchFamily="34" charset="0"/>
+                <a:ea typeface="Segoe UI" pitchFamily="34" charset="-122"/>
+                <a:cs typeface="Segoe UI" pitchFamily="34" charset="-120"/>
+              </a:rPr>
+              <a:t>2</a:t>
+            </a:r>
+            <a:endParaRPr lang="en-US" sz="1800" dirty="0"/>
+          </a:p>
+        </p:txBody>
+      </p:sp>
+      <p:sp>
+        <p:nvSpPr>
+          <p:cNvPr id="19" name="Text 17"/>
+          <p:cNvSpPr/>
+          <p:nvPr/>
+        </p:nvSpPr>
+        <p:spPr>
+          <a:xfrm>
+            <a:off x="1828800" y="2560320"/>
+            <a:ext cx="3200400" cy="640080"/>
+          </a:xfrm>
+          <a:prstGeom prst="rect">
+            <a:avLst/>
+          </a:prstGeom>
+          <a:noFill/>
+          <a:ln/>
+        </p:spPr>
+        <p:txBody>
+          <a:bodyPr wrap="square" rtlCol="0" anchor="ctr"/>
+          <a:lstStyle/>
+          <a:p>
+            <a:pPr marL="0" indent="0">
+              <a:buNone/>
+            </a:pPr>
+            <a:r>
+              <a:rPr lang="en-US" sz="2000" b="1" dirty="0">
+                <a:solidFill>
+                  <a:srgbClr val="E6EDF3"/>
+                </a:solidFill>
+                <a:latin typeface="Segoe UI" pitchFamily="34" charset="0"/>
+                <a:ea typeface="Segoe UI" pitchFamily="34" charset="-122"/>
+                <a:cs typeface="Segoe UI" pitchFamily="34" charset="-120"/>
+              </a:rPr>
+              <a:t>Zero Secrets</a:t>
+            </a:r>
+            <a:endParaRPr lang="en-US" sz="2000" dirty="0"/>
+          </a:p>
+        </p:txBody>
+      </p:sp>
+      <p:sp>
+        <p:nvSpPr>
+          <p:cNvPr id="20" name="Text 18"/>
+          <p:cNvSpPr/>
+          <p:nvPr/>
+        </p:nvSpPr>
+        <p:spPr>
+          <a:xfrm>
+            <a:off x="5029200" y="2542032"/>
+            <a:ext cx="5943600" cy="685800"/>
+          </a:xfrm>
+          <a:prstGeom prst="rect">
+            <a:avLst/>
+          </a:prstGeom>
+          <a:noFill/>
+          <a:ln/>
+        </p:spPr>
+        <p:txBody>
+          <a:bodyPr wrap="square" rtlCol="0" anchor="ctr"/>
+          <a:lstStyle/>
+          <a:p>
+            <a:r>
+              <a:rPr lang="en-US" sz="1200" dirty="0">
+                <a:solidFill>
+                  <a:srgbClr val="8B949E"/>
+                </a:solidFill>
+                <a:latin typeface="Segoe UI" pitchFamily="34" charset="0"/>
+                <a:cs typeface="Segoe UI" pitchFamily="34" charset="-120"/>
+              </a:rPr>
+              <a:t>The write permission (contents: write) appears only in the later safe_outputs and conclusion jobs. Those run on a different machine after the AI has finished.</a:t>
+            </a:r>
+          </a:p>
+        </p:txBody>
+      </p:sp>
+      <p:sp>
+        <p:nvSpPr>
+          <p:cNvPr id="21" name="Shape 19"/>
+          <p:cNvSpPr/>
+          <p:nvPr/>
+        </p:nvSpPr>
+        <p:spPr>
+          <a:xfrm>
+            <a:off x="758952" y="3465576"/>
+            <a:ext cx="10698480" cy="822960"/>
+          </a:xfrm>
+          <a:prstGeom prst="roundRect">
+            <a:avLst>
+              <a:gd name="adj" fmla="val 13333"/>
+            </a:avLst>
+          </a:prstGeom>
+          <a:solidFill>
+            <a:srgbClr val="000000">
+              <a:alpha val="40000"/>
+            </a:srgbClr>
+          </a:solidFill>
+          <a:ln/>
+        </p:spPr>
+        <p:txBody>
+          <a:bodyPr/>
+          <a:lstStyle/>
+          <a:p>
+            <a:endParaRPr lang="en-US"/>
+          </a:p>
+        </p:txBody>
+      </p:sp>
+      <p:sp>
+        <p:nvSpPr>
+          <p:cNvPr id="22" name="Shape 20"/>
+          <p:cNvSpPr/>
+          <p:nvPr/>
+        </p:nvSpPr>
+        <p:spPr>
+          <a:xfrm>
+            <a:off x="731520" y="3429000"/>
+            <a:ext cx="10698480" cy="822960"/>
+          </a:xfrm>
+          <a:prstGeom prst="roundRect">
+            <a:avLst>
+              <a:gd name="adj" fmla="val 13333"/>
+            </a:avLst>
+          </a:prstGeom>
+          <a:solidFill>
+            <a:srgbClr val="21262D"/>
+          </a:solidFill>
+          <a:ln w="6350">
+            <a:solidFill>
+              <a:srgbClr val="30363D"/>
+            </a:solidFill>
+            <a:prstDash val="solid"/>
+          </a:ln>
+        </p:spPr>
+        <p:txBody>
+          <a:bodyPr/>
+          <a:lstStyle/>
+          <a:p>
+            <a:endParaRPr lang="en-US"/>
+          </a:p>
+        </p:txBody>
+      </p:sp>
+      <p:sp>
+        <p:nvSpPr>
+          <p:cNvPr id="23" name="Shape 21"/>
+          <p:cNvSpPr/>
+          <p:nvPr/>
+        </p:nvSpPr>
+        <p:spPr>
+          <a:xfrm>
+            <a:off x="731520" y="3520440"/>
+            <a:ext cx="45720" cy="640080"/>
+          </a:xfrm>
+          <a:prstGeom prst="rect">
+            <a:avLst/>
+          </a:prstGeom>
+          <a:solidFill>
+            <a:srgbClr val="3FB950"/>
+          </a:solidFill>
+          <a:ln/>
+        </p:spPr>
+        <p:txBody>
+          <a:bodyPr/>
+          <a:lstStyle/>
+          <a:p>
+            <a:endParaRPr lang="en-US"/>
+          </a:p>
+        </p:txBody>
+      </p:sp>
+      <p:sp>
+        <p:nvSpPr>
+          <p:cNvPr id="24" name="Shape 22"/>
+          <p:cNvSpPr/>
+          <p:nvPr/>
+        </p:nvSpPr>
+        <p:spPr>
+          <a:xfrm>
+            <a:off x="1051560" y="3593592"/>
+            <a:ext cx="502920" cy="502920"/>
+          </a:xfrm>
+          <a:prstGeom prst="ellipse">
+            <a:avLst/>
+          </a:prstGeom>
+          <a:solidFill>
+            <a:srgbClr val="3FB950">
+              <a:alpha val="20000"/>
+            </a:srgbClr>
+          </a:solidFill>
+          <a:ln w="19050">
+            <a:solidFill>
+              <a:srgbClr val="3FB950"/>
+            </a:solidFill>
+            <a:prstDash val="solid"/>
+          </a:ln>
+        </p:spPr>
+        <p:txBody>
+          <a:bodyPr/>
+          <a:lstStyle/>
+          <a:p>
+            <a:endParaRPr lang="en-US"/>
+          </a:p>
+        </p:txBody>
+      </p:sp>
+      <p:sp>
+        <p:nvSpPr>
+          <p:cNvPr id="25" name="Text 23"/>
+          <p:cNvSpPr/>
+          <p:nvPr/>
+        </p:nvSpPr>
+        <p:spPr>
+          <a:xfrm>
+            <a:off x="1051560" y="3593592"/>
+            <a:ext cx="502920" cy="502920"/>
+          </a:xfrm>
+          <a:prstGeom prst="rect">
+            <a:avLst/>
+          </a:prstGeom>
+          <a:noFill/>
+          <a:ln/>
+        </p:spPr>
+        <p:txBody>
+          <a:bodyPr wrap="square" rtlCol="0" anchor="ctr"/>
+          <a:lstStyle/>
+          <a:p>
+            <a:pPr marL="0" indent="0" algn="ctr">
+              <a:buNone/>
+            </a:pPr>
+            <a:r>
+              <a:rPr lang="en-US" sz="1800" b="1" dirty="0">
+                <a:solidFill>
+                  <a:srgbClr val="3FB950"/>
+                </a:solidFill>
+                <a:latin typeface="Segoe UI" pitchFamily="34" charset="0"/>
+                <a:ea typeface="Segoe UI" pitchFamily="34" charset="-122"/>
+                <a:cs typeface="Segoe UI" pitchFamily="34" charset="-120"/>
+              </a:rPr>
+              <a:t>3</a:t>
+            </a:r>
+            <a:endParaRPr lang="en-US" sz="1800" dirty="0"/>
+          </a:p>
+        </p:txBody>
+      </p:sp>
+      <p:sp>
+        <p:nvSpPr>
+          <p:cNvPr id="26" name="Text 24"/>
+          <p:cNvSpPr/>
+          <p:nvPr/>
+        </p:nvSpPr>
+        <p:spPr>
+          <a:xfrm>
+            <a:off x="1828800" y="3520440"/>
+            <a:ext cx="3200400" cy="640080"/>
+          </a:xfrm>
+          <a:prstGeom prst="rect">
+            <a:avLst/>
+          </a:prstGeom>
+          <a:noFill/>
+          <a:ln/>
+        </p:spPr>
+        <p:txBody>
+          <a:bodyPr wrap="square" rtlCol="0" anchor="ctr"/>
+          <a:lstStyle/>
+          <a:p>
+            <a:pPr marL="0" indent="0">
+              <a:buNone/>
+            </a:pPr>
+            <a:r>
+              <a:rPr lang="en-US" sz="2000" b="1" dirty="0">
+                <a:solidFill>
+                  <a:srgbClr val="E6EDF3"/>
+                </a:solidFill>
+                <a:latin typeface="Segoe UI" pitchFamily="34" charset="0"/>
+                <a:ea typeface="Segoe UI" pitchFamily="34" charset="-122"/>
+                <a:cs typeface="Segoe UI" pitchFamily="34" charset="-120"/>
+              </a:rPr>
+              <a:t>Container + Firewall</a:t>
+            </a:r>
+            <a:endParaRPr lang="en-US" sz="2000" dirty="0"/>
+          </a:p>
+        </p:txBody>
+      </p:sp>
+      <p:sp>
+        <p:nvSpPr>
+          <p:cNvPr id="27" name="Text 25"/>
+          <p:cNvSpPr/>
+          <p:nvPr/>
+        </p:nvSpPr>
+        <p:spPr>
+          <a:xfrm>
+            <a:off x="5029200" y="3502152"/>
+            <a:ext cx="5943600" cy="685800"/>
+          </a:xfrm>
+          <a:prstGeom prst="rect">
+            <a:avLst/>
+          </a:prstGeom>
+          <a:noFill/>
+          <a:ln/>
+        </p:spPr>
+        <p:txBody>
+          <a:bodyPr wrap="square" rtlCol="0" anchor="ctr"/>
+          <a:lstStyle/>
           <a:p>
             <a:pPr marL="0" indent="0">
               <a:lnSpc>
@@ -9952,6 +12371,16 @@
               <a:buNone/>
             </a:pPr>
             <a:r>
+              <a:rPr lang="en-US" sz="1200" dirty="0">
+                <a:solidFill>
+                  <a:srgbClr val="8B949E"/>
+                </a:solidFill>
+                <a:latin typeface="Segoe UI" pitchFamily="34" charset="0"/>
+                <a:cs typeface="Segoe UI" pitchFamily="34" charset="-120"/>
+              </a:rPr>
+              <a:t>Isolated container. AWF proxy enforces domain allowlist. Non-allowed = dropped</a:t>
+            </a:r>
+            <a:r>
               <a:rPr lang="en-US" sz="1500" dirty="0">
                 <a:solidFill>
                   <a:srgbClr val="8B949E"/>
@@ -9960,21 +12389,45 @@
                 <a:ea typeface="Segoe UI" pitchFamily="34" charset="-122"/>
                 <a:cs typeface="Segoe UI" pitchFamily="34" charset="-120"/>
               </a:rPr>
-              <a:t>Cannot push, create PRs, or delete.</a:t>
-            </a:r>
-            <a:endParaRPr lang="en-US" sz="1500" dirty="0"/>
-          </a:p>
-        </p:txBody>
-      </p:sp>
-      <p:sp>
-        <p:nvSpPr>
-          <p:cNvPr id="14" name="Shape 12"/>
-          <p:cNvSpPr/>
-          <p:nvPr/>
-        </p:nvSpPr>
-        <p:spPr>
-          <a:xfrm>
-            <a:off x="758952" y="2505456"/>
+              <a:t>.</a:t>
+            </a:r>
+          </a:p>
+          <a:p>
+            <a:pPr>
+              <a:lnSpc>
+                <a:spcPct val="130000"/>
+              </a:lnSpc>
+            </a:pPr>
+            <a:r>
+              <a:rPr lang="en-US" sz="1200" dirty="0">
+                <a:solidFill>
+                  <a:srgbClr val="8B949E"/>
+                </a:solidFill>
+                <a:latin typeface="Segoe UI" pitchFamily="34" charset="0"/>
+                <a:cs typeface="Segoe UI" pitchFamily="34" charset="-120"/>
+                <a:hlinkClick r:id="rId5"/>
+              </a:rPr>
+              <a:t>modernize-code-fixer.md </a:t>
+            </a:r>
+            <a:endParaRPr lang="en-US" sz="1200" dirty="0">
+              <a:solidFill>
+                <a:srgbClr val="8B949E"/>
+              </a:solidFill>
+              <a:latin typeface="Segoe UI" pitchFamily="34" charset="0"/>
+              <a:cs typeface="Segoe UI" pitchFamily="34" charset="-120"/>
+            </a:endParaRPr>
+          </a:p>
+        </p:txBody>
+      </p:sp>
+      <p:sp>
+        <p:nvSpPr>
+          <p:cNvPr id="28" name="Shape 26"/>
+          <p:cNvSpPr/>
+          <p:nvPr/>
+        </p:nvSpPr>
+        <p:spPr>
+          <a:xfrm>
+            <a:off x="758952" y="4425696"/>
             <a:ext cx="10698480" cy="822960"/>
           </a:xfrm>
           <a:prstGeom prst="roundRect">
@@ -9999,13 +12452,13 @@
       </p:sp>
       <p:sp>
         <p:nvSpPr>
-          <p:cNvPr id="15" name="Shape 13"/>
-          <p:cNvSpPr/>
-          <p:nvPr/>
-        </p:nvSpPr>
-        <p:spPr>
-          <a:xfrm>
-            <a:off x="731520" y="2468880"/>
+          <p:cNvPr id="29" name="Shape 27"/>
+          <p:cNvSpPr/>
+          <p:nvPr/>
+        </p:nvSpPr>
+        <p:spPr>
+          <a:xfrm>
+            <a:off x="731520" y="4389120"/>
             <a:ext cx="10698480" cy="822960"/>
           </a:xfrm>
           <a:prstGeom prst="roundRect">
@@ -10033,53 +12486,53 @@
       </p:sp>
       <p:sp>
         <p:nvSpPr>
-          <p:cNvPr id="16" name="Shape 14"/>
-          <p:cNvSpPr/>
-          <p:nvPr/>
-        </p:nvSpPr>
-        <p:spPr>
-          <a:xfrm>
-            <a:off x="731520" y="2560320"/>
+          <p:cNvPr id="30" name="Shape 28"/>
+          <p:cNvSpPr/>
+          <p:nvPr/>
+        </p:nvSpPr>
+        <p:spPr>
+          <a:xfrm>
+            <a:off x="731520" y="4480560"/>
             <a:ext cx="45720" cy="640080"/>
           </a:xfrm>
           <a:prstGeom prst="rect">
             <a:avLst/>
           </a:prstGeom>
           <a:solidFill>
-            <a:srgbClr val="58A6FF"/>
-          </a:solidFill>
-          <a:ln/>
-        </p:spPr>
-        <p:txBody>
-          <a:bodyPr/>
-          <a:lstStyle/>
-          <a:p>
-            <a:endParaRPr lang="en-US"/>
-          </a:p>
-        </p:txBody>
-      </p:sp>
-      <p:sp>
-        <p:nvSpPr>
-          <p:cNvPr id="17" name="Shape 15"/>
-          <p:cNvSpPr/>
-          <p:nvPr/>
-        </p:nvSpPr>
-        <p:spPr>
-          <a:xfrm>
-            <a:off x="1051560" y="2633472"/>
+            <a:srgbClr val="A371F7"/>
+          </a:solidFill>
+          <a:ln/>
+        </p:spPr>
+        <p:txBody>
+          <a:bodyPr/>
+          <a:lstStyle/>
+          <a:p>
+            <a:endParaRPr lang="en-US"/>
+          </a:p>
+        </p:txBody>
+      </p:sp>
+      <p:sp>
+        <p:nvSpPr>
+          <p:cNvPr id="31" name="Shape 29"/>
+          <p:cNvSpPr/>
+          <p:nvPr/>
+        </p:nvSpPr>
+        <p:spPr>
+          <a:xfrm>
+            <a:off x="1051560" y="4553712"/>
             <a:ext cx="502920" cy="502920"/>
           </a:xfrm>
           <a:prstGeom prst="ellipse">
             <a:avLst/>
           </a:prstGeom>
           <a:solidFill>
-            <a:srgbClr val="58A6FF">
+            <a:srgbClr val="A371F7">
               <a:alpha val="20000"/>
             </a:srgbClr>
           </a:solidFill>
           <a:ln w="19050">
             <a:solidFill>
-              <a:srgbClr val="58A6FF"/>
+              <a:srgbClr val="A371F7"/>
             </a:solidFill>
             <a:prstDash val="solid"/>
           </a:ln>
@@ -10094,13 +12547,13 @@
       </p:sp>
       <p:sp>
         <p:nvSpPr>
-          <p:cNvPr id="18" name="Text 16"/>
-          <p:cNvSpPr/>
-          <p:nvPr/>
-        </p:nvSpPr>
-        <p:spPr>
-          <a:xfrm>
-            <a:off x="1051560" y="2633472"/>
+          <p:cNvPr id="32" name="Text 30"/>
+          <p:cNvSpPr/>
+          <p:nvPr/>
+        </p:nvSpPr>
+        <p:spPr>
+          <a:xfrm>
+            <a:off x="1051560" y="4553712"/>
             <a:ext cx="502920" cy="502920"/>
           </a:xfrm>
           <a:prstGeom prst="rect">
@@ -10119,13 +12572,13 @@
             <a:r>
               <a:rPr lang="en-US" sz="1800" b="1" dirty="0">
                 <a:solidFill>
-                  <a:srgbClr val="58A6FF"/>
+                  <a:srgbClr val="A371F7"/>
                 </a:solidFill>
                 <a:latin typeface="Segoe UI" pitchFamily="34" charset="0"/>
                 <a:ea typeface="Segoe UI" pitchFamily="34" charset="-122"/>
                 <a:cs typeface="Segoe UI" pitchFamily="34" charset="-120"/>
               </a:rPr>
-              <a:t>2</a:t>
+              <a:t>4</a:t>
             </a:r>
             <a:endParaRPr lang="en-US" sz="1800" dirty="0"/>
           </a:p>
@@ -10133,13 +12586,13 @@
       </p:sp>
       <p:sp>
         <p:nvSpPr>
-          <p:cNvPr id="19" name="Text 17"/>
-          <p:cNvSpPr/>
-          <p:nvPr/>
-        </p:nvSpPr>
-        <p:spPr>
-          <a:xfrm>
-            <a:off x="1828800" y="2560320"/>
+          <p:cNvPr id="33" name="Text 31"/>
+          <p:cNvSpPr/>
+          <p:nvPr/>
+        </p:nvSpPr>
+        <p:spPr>
+          <a:xfrm>
+            <a:off x="1828800" y="4480560"/>
             <a:ext cx="3200400" cy="640080"/>
           </a:xfrm>
           <a:prstGeom prst="rect">
@@ -10164,7 +12617,7 @@
                 <a:ea typeface="Segoe UI" pitchFamily="34" charset="-122"/>
                 <a:cs typeface="Segoe UI" pitchFamily="34" charset="-120"/>
               </a:rPr>
-              <a:t>Zero Secrets</a:t>
+              <a:t>Safe Outputs</a:t>
             </a:r>
             <a:endParaRPr lang="en-US" sz="2000" dirty="0"/>
           </a:p>
@@ -10172,13 +12625,13 @@
       </p:sp>
       <p:sp>
         <p:nvSpPr>
-          <p:cNvPr id="20" name="Text 18"/>
-          <p:cNvSpPr/>
-          <p:nvPr/>
-        </p:nvSpPr>
-        <p:spPr>
-          <a:xfrm>
-            <a:off x="5029200" y="2542032"/>
+          <p:cNvPr id="34" name="Text 32"/>
+          <p:cNvSpPr/>
+          <p:nvPr/>
+        </p:nvSpPr>
+        <p:spPr>
+          <a:xfrm>
+            <a:off x="5029200" y="4462272"/>
             <a:ext cx="5943600" cy="685800"/>
           </a:xfrm>
           <a:prstGeom prst="rect">
@@ -10190,6 +12643,62 @@
         <p:txBody>
           <a:bodyPr wrap="square" rtlCol="0" anchor="ctr"/>
           <a:lstStyle/>
+          <a:p>
+            <a:pPr>
+              <a:lnSpc>
+                <a:spcPct val="100000"/>
+              </a:lnSpc>
+            </a:pPr>
+            <a:r>
+              <a:rPr lang="en-US" sz="1500" dirty="0">
+                <a:solidFill>
+                  <a:srgbClr val="8B949E"/>
+                </a:solidFill>
+                <a:latin typeface="Segoe UI" pitchFamily="34" charset="0"/>
+                <a:ea typeface="Segoe UI" pitchFamily="34" charset="-122"/>
+                <a:cs typeface="Segoe UI" pitchFamily="34" charset="-120"/>
+              </a:rPr>
+              <a:t>Agent produces structured artifact. </a:t>
+            </a:r>
+          </a:p>
+          <a:p>
+            <a:pPr>
+              <a:lnSpc>
+                <a:spcPct val="100000"/>
+              </a:lnSpc>
+            </a:pPr>
+            <a:r>
+              <a:rPr lang="en-US" sz="1500" dirty="0">
+                <a:solidFill>
+                  <a:srgbClr val="8B949E"/>
+                </a:solidFill>
+                <a:latin typeface="Segoe UI" pitchFamily="34" charset="0"/>
+                <a:cs typeface="Segoe UI" pitchFamily="34" charset="-120"/>
+              </a:rPr>
+              <a:t>The agent can't push, so it </a:t>
+            </a:r>
+            <a:r>
+              <a:rPr lang="en-US" sz="1500" dirty="0">
+                <a:solidFill>
+                  <a:srgbClr val="8B949E"/>
+                </a:solidFill>
+                <a:latin typeface="Segoe UI" pitchFamily="34" charset="0"/>
+                <a:cs typeface="Segoe UI" pitchFamily="34" charset="-120"/>
+                <a:hlinkClick r:id="rId6"/>
+              </a:rPr>
+              <a:t>writes a request file </a:t>
+            </a:r>
+            <a:r>
+              <a:rPr lang="en-US" sz="1500" dirty="0">
+                <a:solidFill>
+                  <a:srgbClr val="8B949E"/>
+                </a:solidFill>
+                <a:latin typeface="Segoe UI" pitchFamily="34" charset="0"/>
+                <a:cs typeface="Segoe UI" pitchFamily="34" charset="-120"/>
+              </a:rPr>
+              <a:t>instead</a:t>
+            </a:r>
+          </a:p>
           <a:p>
             <a:pPr marL="0" indent="0">
               <a:lnSpc>
@@ -10197,19 +12706,234 @@
               </a:lnSpc>
               <a:buNone/>
             </a:pPr>
-            <a:r>
-              <a:rPr lang="en-US" sz="1500" dirty="0">
-                <a:solidFill>
-                  <a:srgbClr val="8B949E"/>
+            <a:endParaRPr lang="en-US" sz="1500" dirty="0"/>
+          </a:p>
+        </p:txBody>
+      </p:sp>
+      <p:sp>
+        <p:nvSpPr>
+          <p:cNvPr id="35" name="Shape 33"/>
+          <p:cNvSpPr/>
+          <p:nvPr/>
+        </p:nvSpPr>
+        <p:spPr>
+          <a:xfrm>
+            <a:off x="758952" y="5385816"/>
+            <a:ext cx="10698480" cy="822960"/>
+          </a:xfrm>
+          <a:prstGeom prst="roundRect">
+            <a:avLst>
+              <a:gd name="adj" fmla="val 13333"/>
+            </a:avLst>
+          </a:prstGeom>
+          <a:solidFill>
+            <a:srgbClr val="000000">
+              <a:alpha val="40000"/>
+            </a:srgbClr>
+          </a:solidFill>
+          <a:ln/>
+        </p:spPr>
+        <p:txBody>
+          <a:bodyPr/>
+          <a:lstStyle/>
+          <a:p>
+            <a:endParaRPr lang="en-US"/>
+          </a:p>
+        </p:txBody>
+      </p:sp>
+      <p:sp>
+        <p:nvSpPr>
+          <p:cNvPr id="36" name="Shape 34"/>
+          <p:cNvSpPr/>
+          <p:nvPr/>
+        </p:nvSpPr>
+        <p:spPr>
+          <a:xfrm>
+            <a:off x="731520" y="5349240"/>
+            <a:ext cx="10698480" cy="822960"/>
+          </a:xfrm>
+          <a:prstGeom prst="roundRect">
+            <a:avLst>
+              <a:gd name="adj" fmla="val 13333"/>
+            </a:avLst>
+          </a:prstGeom>
+          <a:solidFill>
+            <a:srgbClr val="21262D"/>
+          </a:solidFill>
+          <a:ln w="6350">
+            <a:solidFill>
+              <a:srgbClr val="30363D"/>
+            </a:solidFill>
+            <a:prstDash val="solid"/>
+          </a:ln>
+        </p:spPr>
+        <p:txBody>
+          <a:bodyPr/>
+          <a:lstStyle/>
+          <a:p>
+            <a:endParaRPr lang="en-US"/>
+          </a:p>
+        </p:txBody>
+      </p:sp>
+      <p:sp>
+        <p:nvSpPr>
+          <p:cNvPr id="37" name="Shape 35"/>
+          <p:cNvSpPr/>
+          <p:nvPr/>
+        </p:nvSpPr>
+        <p:spPr>
+          <a:xfrm>
+            <a:off x="731520" y="5440680"/>
+            <a:ext cx="45720" cy="640080"/>
+          </a:xfrm>
+          <a:prstGeom prst="rect">
+            <a:avLst/>
+          </a:prstGeom>
+          <a:solidFill>
+            <a:srgbClr val="F85149"/>
+          </a:solidFill>
+          <a:ln/>
+        </p:spPr>
+        <p:txBody>
+          <a:bodyPr/>
+          <a:lstStyle/>
+          <a:p>
+            <a:endParaRPr lang="en-US"/>
+          </a:p>
+        </p:txBody>
+      </p:sp>
+      <p:sp>
+        <p:nvSpPr>
+          <p:cNvPr id="38" name="Shape 36"/>
+          <p:cNvSpPr/>
+          <p:nvPr/>
+        </p:nvSpPr>
+        <p:spPr>
+          <a:xfrm>
+            <a:off x="1051560" y="5513832"/>
+            <a:ext cx="502920" cy="502920"/>
+          </a:xfrm>
+          <a:prstGeom prst="ellipse">
+            <a:avLst/>
+          </a:prstGeom>
+          <a:solidFill>
+            <a:srgbClr val="F85149">
+              <a:alpha val="20000"/>
+            </a:srgbClr>
+          </a:solidFill>
+          <a:ln w="19050">
+            <a:solidFill>
+              <a:srgbClr val="F85149"/>
+            </a:solidFill>
+            <a:prstDash val="solid"/>
+          </a:ln>
+        </p:spPr>
+        <p:txBody>
+          <a:bodyPr/>
+          <a:lstStyle/>
+          <a:p>
+            <a:endParaRPr lang="en-US"/>
+          </a:p>
+        </p:txBody>
+      </p:sp>
+      <p:sp>
+        <p:nvSpPr>
+          <p:cNvPr id="39" name="Text 37"/>
+          <p:cNvSpPr/>
+          <p:nvPr/>
+        </p:nvSpPr>
+        <p:spPr>
+          <a:xfrm>
+            <a:off x="1051560" y="5513832"/>
+            <a:ext cx="502920" cy="502920"/>
+          </a:xfrm>
+          <a:prstGeom prst="rect">
+            <a:avLst/>
+          </a:prstGeom>
+          <a:noFill/>
+          <a:ln/>
+        </p:spPr>
+        <p:txBody>
+          <a:bodyPr wrap="square" rtlCol="0" anchor="ctr"/>
+          <a:lstStyle/>
+          <a:p>
+            <a:pPr marL="0" indent="0" algn="ctr">
+              <a:buNone/>
+            </a:pPr>
+            <a:r>
+              <a:rPr lang="en-US" sz="1800" b="1" dirty="0">
+                <a:solidFill>
+                  <a:srgbClr val="F85149"/>
                 </a:solidFill>
                 <a:latin typeface="Segoe UI" pitchFamily="34" charset="0"/>
                 <a:ea typeface="Segoe UI" pitchFamily="34" charset="-122"/>
                 <a:cs typeface="Segoe UI" pitchFamily="34" charset="-120"/>
               </a:rPr>
-              <a:t>Write tokens exist only in isolated</a:t>
-            </a:r>
-            <a:endParaRPr lang="en-US" sz="1500" dirty="0"/>
-          </a:p>
+              <a:t>5</a:t>
+            </a:r>
+            <a:endParaRPr lang="en-US" sz="1800" dirty="0"/>
+          </a:p>
+        </p:txBody>
+      </p:sp>
+      <p:sp>
+        <p:nvSpPr>
+          <p:cNvPr id="40" name="Text 38"/>
+          <p:cNvSpPr/>
+          <p:nvPr/>
+        </p:nvSpPr>
+        <p:spPr>
+          <a:xfrm>
+            <a:off x="1828800" y="5440680"/>
+            <a:ext cx="3200400" cy="640080"/>
+          </a:xfrm>
+          <a:prstGeom prst="rect">
+            <a:avLst/>
+          </a:prstGeom>
+          <a:noFill/>
+          <a:ln/>
+        </p:spPr>
+        <p:txBody>
+          <a:bodyPr wrap="square" rtlCol="0" anchor="ctr"/>
+          <a:lstStyle/>
+          <a:p>
+            <a:pPr marL="0" indent="0">
+              <a:buNone/>
+            </a:pPr>
+            <a:r>
+              <a:rPr lang="en-US" sz="2000" b="1" dirty="0">
+                <a:solidFill>
+                  <a:srgbClr val="E6EDF3"/>
+                </a:solidFill>
+                <a:latin typeface="Segoe UI" pitchFamily="34" charset="0"/>
+                <a:ea typeface="Segoe UI" pitchFamily="34" charset="-122"/>
+                <a:cs typeface="Segoe UI" pitchFamily="34" charset="-120"/>
+              </a:rPr>
+              <a:t>Threat Detection</a:t>
+            </a:r>
+            <a:endParaRPr lang="en-US" sz="2000" dirty="0"/>
+          </a:p>
+        </p:txBody>
+      </p:sp>
+      <p:sp>
+        <p:nvSpPr>
+          <p:cNvPr id="41" name="Text 39"/>
+          <p:cNvSpPr/>
+          <p:nvPr/>
+        </p:nvSpPr>
+        <p:spPr>
+          <a:xfrm>
+            <a:off x="5029200" y="5422392"/>
+            <a:ext cx="5943600" cy="685800"/>
+          </a:xfrm>
+          <a:prstGeom prst="rect">
+            <a:avLst/>
+          </a:prstGeom>
+          <a:noFill/>
+          <a:ln/>
+        </p:spPr>
+        <p:txBody>
+          <a:bodyPr wrap="square" rtlCol="0" anchor="ctr"/>
+          <a:lstStyle/>
           <a:p>
             <a:pPr marL="0" indent="0">
               <a:lnSpc>
@@ -10225,786 +12949,20 @@
                 <a:latin typeface="Segoe UI" pitchFamily="34" charset="0"/>
                 <a:ea typeface="Segoe UI" pitchFamily="34" charset="-122"/>
                 <a:cs typeface="Segoe UI" pitchFamily="34" charset="-120"/>
-              </a:rPr>
-              <a:t>post-agent jobs. Nothing to steal.</a:t>
-            </a:r>
-            <a:endParaRPr lang="en-US" sz="1500" dirty="0"/>
-          </a:p>
-        </p:txBody>
-      </p:sp>
-      <p:sp>
-        <p:nvSpPr>
-          <p:cNvPr id="21" name="Shape 19"/>
-          <p:cNvSpPr/>
-          <p:nvPr/>
-        </p:nvSpPr>
-        <p:spPr>
-          <a:xfrm>
-            <a:off x="758952" y="3465576"/>
-            <a:ext cx="10698480" cy="822960"/>
-          </a:xfrm>
-          <a:prstGeom prst="roundRect">
-            <a:avLst>
-              <a:gd name="adj" fmla="val 13333"/>
-            </a:avLst>
-          </a:prstGeom>
-          <a:solidFill>
-            <a:srgbClr val="000000">
-              <a:alpha val="40000"/>
-            </a:srgbClr>
-          </a:solidFill>
-          <a:ln/>
-        </p:spPr>
-        <p:txBody>
-          <a:bodyPr/>
-          <a:lstStyle/>
-          <a:p>
-            <a:endParaRPr lang="en-US"/>
-          </a:p>
-        </p:txBody>
-      </p:sp>
-      <p:sp>
-        <p:nvSpPr>
-          <p:cNvPr id="22" name="Shape 20"/>
-          <p:cNvSpPr/>
-          <p:nvPr/>
-        </p:nvSpPr>
-        <p:spPr>
-          <a:xfrm>
-            <a:off x="731520" y="3429000"/>
-            <a:ext cx="10698480" cy="822960"/>
-          </a:xfrm>
-          <a:prstGeom prst="roundRect">
-            <a:avLst>
-              <a:gd name="adj" fmla="val 13333"/>
-            </a:avLst>
-          </a:prstGeom>
-          <a:solidFill>
-            <a:srgbClr val="21262D"/>
-          </a:solidFill>
-          <a:ln w="6350">
-            <a:solidFill>
-              <a:srgbClr val="30363D"/>
-            </a:solidFill>
-            <a:prstDash val="solid"/>
-          </a:ln>
-        </p:spPr>
-        <p:txBody>
-          <a:bodyPr/>
-          <a:lstStyle/>
-          <a:p>
-            <a:endParaRPr lang="en-US"/>
-          </a:p>
-        </p:txBody>
-      </p:sp>
-      <p:sp>
-        <p:nvSpPr>
-          <p:cNvPr id="23" name="Shape 21"/>
-          <p:cNvSpPr/>
-          <p:nvPr/>
-        </p:nvSpPr>
-        <p:spPr>
-          <a:xfrm>
-            <a:off x="731520" y="3520440"/>
-            <a:ext cx="45720" cy="640080"/>
-          </a:xfrm>
-          <a:prstGeom prst="rect">
-            <a:avLst/>
-          </a:prstGeom>
-          <a:solidFill>
-            <a:srgbClr val="3FB950"/>
-          </a:solidFill>
-          <a:ln/>
-        </p:spPr>
-        <p:txBody>
-          <a:bodyPr/>
-          <a:lstStyle/>
-          <a:p>
-            <a:endParaRPr lang="en-US"/>
-          </a:p>
-        </p:txBody>
-      </p:sp>
-      <p:sp>
-        <p:nvSpPr>
-          <p:cNvPr id="24" name="Shape 22"/>
-          <p:cNvSpPr/>
-          <p:nvPr/>
-        </p:nvSpPr>
-        <p:spPr>
-          <a:xfrm>
-            <a:off x="1051560" y="3593592"/>
-            <a:ext cx="502920" cy="502920"/>
-          </a:xfrm>
-          <a:prstGeom prst="ellipse">
-            <a:avLst/>
-          </a:prstGeom>
-          <a:solidFill>
-            <a:srgbClr val="3FB950">
-              <a:alpha val="20000"/>
-            </a:srgbClr>
-          </a:solidFill>
-          <a:ln w="19050">
-            <a:solidFill>
-              <a:srgbClr val="3FB950"/>
-            </a:solidFill>
-            <a:prstDash val="solid"/>
-          </a:ln>
-        </p:spPr>
-        <p:txBody>
-          <a:bodyPr/>
-          <a:lstStyle/>
-          <a:p>
-            <a:endParaRPr lang="en-US"/>
-          </a:p>
-        </p:txBody>
-      </p:sp>
-      <p:sp>
-        <p:nvSpPr>
-          <p:cNvPr id="25" name="Text 23"/>
-          <p:cNvSpPr/>
-          <p:nvPr/>
-        </p:nvSpPr>
-        <p:spPr>
-          <a:xfrm>
-            <a:off x="1051560" y="3593592"/>
-            <a:ext cx="502920" cy="502920"/>
-          </a:xfrm>
-          <a:prstGeom prst="rect">
-            <a:avLst/>
-          </a:prstGeom>
-          <a:noFill/>
-          <a:ln/>
-        </p:spPr>
-        <p:txBody>
-          <a:bodyPr wrap="square" rtlCol="0" anchor="ctr"/>
-          <a:lstStyle/>
-          <a:p>
-            <a:pPr marL="0" indent="0" algn="ctr">
-              <a:buNone/>
-            </a:pPr>
-            <a:r>
-              <a:rPr lang="en-US" sz="1800" b="1" dirty="0">
-                <a:solidFill>
-                  <a:srgbClr val="3FB950"/>
+                <a:hlinkClick r:id="rId7"/>
+              </a:rPr>
+              <a:t>AI-powered scan</a:t>
+            </a:r>
+            <a:r>
+              <a:rPr lang="en-US" sz="1500" dirty="0">
+                <a:solidFill>
+                  <a:srgbClr val="8B949E"/>
                 </a:solidFill>
                 <a:latin typeface="Segoe UI" pitchFamily="34" charset="0"/>
                 <a:ea typeface="Segoe UI" pitchFamily="34" charset="-122"/>
                 <a:cs typeface="Segoe UI" pitchFamily="34" charset="-120"/>
               </a:rPr>
-              <a:t>3</a:t>
-            </a:r>
-            <a:endParaRPr lang="en-US" sz="1800" dirty="0"/>
-          </a:p>
-        </p:txBody>
-      </p:sp>
-      <p:sp>
-        <p:nvSpPr>
-          <p:cNvPr id="26" name="Text 24"/>
-          <p:cNvSpPr/>
-          <p:nvPr/>
-        </p:nvSpPr>
-        <p:spPr>
-          <a:xfrm>
-            <a:off x="1828800" y="3520440"/>
-            <a:ext cx="3200400" cy="640080"/>
-          </a:xfrm>
-          <a:prstGeom prst="rect">
-            <a:avLst/>
-          </a:prstGeom>
-          <a:noFill/>
-          <a:ln/>
-        </p:spPr>
-        <p:txBody>
-          <a:bodyPr wrap="square" rtlCol="0" anchor="ctr"/>
-          <a:lstStyle/>
-          <a:p>
-            <a:pPr marL="0" indent="0">
-              <a:buNone/>
-            </a:pPr>
-            <a:r>
-              <a:rPr lang="en-US" sz="2000" b="1" dirty="0">
-                <a:solidFill>
-                  <a:srgbClr val="E6EDF3"/>
-                </a:solidFill>
-                <a:latin typeface="Segoe UI" pitchFamily="34" charset="0"/>
-                <a:ea typeface="Segoe UI" pitchFamily="34" charset="-122"/>
-                <a:cs typeface="Segoe UI" pitchFamily="34" charset="-120"/>
-              </a:rPr>
-              <a:t>Container + Firewall</a:t>
-            </a:r>
-            <a:endParaRPr lang="en-US" sz="2000" dirty="0"/>
-          </a:p>
-        </p:txBody>
-      </p:sp>
-      <p:sp>
-        <p:nvSpPr>
-          <p:cNvPr id="27" name="Text 25"/>
-          <p:cNvSpPr/>
-          <p:nvPr/>
-        </p:nvSpPr>
-        <p:spPr>
-          <a:xfrm>
-            <a:off x="5029200" y="3502152"/>
-            <a:ext cx="5943600" cy="685800"/>
-          </a:xfrm>
-          <a:prstGeom prst="rect">
-            <a:avLst/>
-          </a:prstGeom>
-          <a:noFill/>
-          <a:ln/>
-        </p:spPr>
-        <p:txBody>
-          <a:bodyPr wrap="square" rtlCol="0" anchor="ctr"/>
-          <a:lstStyle/>
-          <a:p>
-            <a:pPr marL="0" indent="0">
-              <a:lnSpc>
-                <a:spcPct val="130000"/>
-              </a:lnSpc>
-              <a:buNone/>
-            </a:pPr>
-            <a:r>
-              <a:rPr lang="en-US" sz="1500" dirty="0">
-                <a:solidFill>
-                  <a:srgbClr val="8B949E"/>
-                </a:solidFill>
-                <a:latin typeface="Segoe UI" pitchFamily="34" charset="0"/>
-                <a:ea typeface="Segoe UI" pitchFamily="34" charset="-122"/>
-                <a:cs typeface="Segoe UI" pitchFamily="34" charset="-120"/>
-              </a:rPr>
-              <a:t>Isolated container. AWF proxy enforces</a:t>
-            </a:r>
-            <a:endParaRPr lang="en-US" sz="1500" dirty="0"/>
-          </a:p>
-          <a:p>
-            <a:pPr marL="0" indent="0">
-              <a:lnSpc>
-                <a:spcPct val="130000"/>
-              </a:lnSpc>
-              <a:buNone/>
-            </a:pPr>
-            <a:r>
-              <a:rPr lang="en-US" sz="1500" dirty="0">
-                <a:solidFill>
-                  <a:srgbClr val="8B949E"/>
-                </a:solidFill>
-                <a:latin typeface="Segoe UI" pitchFamily="34" charset="0"/>
-                <a:ea typeface="Segoe UI" pitchFamily="34" charset="-122"/>
-                <a:cs typeface="Segoe UI" pitchFamily="34" charset="-120"/>
-              </a:rPr>
-              <a:t>domain allowlist. Non-allowed = dropped.</a:t>
-            </a:r>
-            <a:endParaRPr lang="en-US" sz="1500" dirty="0"/>
-          </a:p>
-        </p:txBody>
-      </p:sp>
-      <p:sp>
-        <p:nvSpPr>
-          <p:cNvPr id="28" name="Shape 26"/>
-          <p:cNvSpPr/>
-          <p:nvPr/>
-        </p:nvSpPr>
-        <p:spPr>
-          <a:xfrm>
-            <a:off x="758952" y="4425696"/>
-            <a:ext cx="10698480" cy="822960"/>
-          </a:xfrm>
-          <a:prstGeom prst="roundRect">
-            <a:avLst>
-              <a:gd name="adj" fmla="val 13333"/>
-            </a:avLst>
-          </a:prstGeom>
-          <a:solidFill>
-            <a:srgbClr val="000000">
-              <a:alpha val="40000"/>
-            </a:srgbClr>
-          </a:solidFill>
-          <a:ln/>
-        </p:spPr>
-        <p:txBody>
-          <a:bodyPr/>
-          <a:lstStyle/>
-          <a:p>
-            <a:endParaRPr lang="en-US"/>
-          </a:p>
-        </p:txBody>
-      </p:sp>
-      <p:sp>
-        <p:nvSpPr>
-          <p:cNvPr id="29" name="Shape 27"/>
-          <p:cNvSpPr/>
-          <p:nvPr/>
-        </p:nvSpPr>
-        <p:spPr>
-          <a:xfrm>
-            <a:off x="731520" y="4389120"/>
-            <a:ext cx="10698480" cy="822960"/>
-          </a:xfrm>
-          <a:prstGeom prst="roundRect">
-            <a:avLst>
-              <a:gd name="adj" fmla="val 13333"/>
-            </a:avLst>
-          </a:prstGeom>
-          <a:solidFill>
-            <a:srgbClr val="21262D"/>
-          </a:solidFill>
-          <a:ln w="6350">
-            <a:solidFill>
-              <a:srgbClr val="30363D"/>
-            </a:solidFill>
-            <a:prstDash val="solid"/>
-          </a:ln>
-        </p:spPr>
-        <p:txBody>
-          <a:bodyPr/>
-          <a:lstStyle/>
-          <a:p>
-            <a:endParaRPr lang="en-US"/>
-          </a:p>
-        </p:txBody>
-      </p:sp>
-      <p:sp>
-        <p:nvSpPr>
-          <p:cNvPr id="30" name="Shape 28"/>
-          <p:cNvSpPr/>
-          <p:nvPr/>
-        </p:nvSpPr>
-        <p:spPr>
-          <a:xfrm>
-            <a:off x="731520" y="4480560"/>
-            <a:ext cx="45720" cy="640080"/>
-          </a:xfrm>
-          <a:prstGeom prst="rect">
-            <a:avLst/>
-          </a:prstGeom>
-          <a:solidFill>
-            <a:srgbClr val="A371F7"/>
-          </a:solidFill>
-          <a:ln/>
-        </p:spPr>
-        <p:txBody>
-          <a:bodyPr/>
-          <a:lstStyle/>
-          <a:p>
-            <a:endParaRPr lang="en-US"/>
-          </a:p>
-        </p:txBody>
-      </p:sp>
-      <p:sp>
-        <p:nvSpPr>
-          <p:cNvPr id="31" name="Shape 29"/>
-          <p:cNvSpPr/>
-          <p:nvPr/>
-        </p:nvSpPr>
-        <p:spPr>
-          <a:xfrm>
-            <a:off x="1051560" y="4553712"/>
-            <a:ext cx="502920" cy="502920"/>
-          </a:xfrm>
-          <a:prstGeom prst="ellipse">
-            <a:avLst/>
-          </a:prstGeom>
-          <a:solidFill>
-            <a:srgbClr val="A371F7">
-              <a:alpha val="20000"/>
-            </a:srgbClr>
-          </a:solidFill>
-          <a:ln w="19050">
-            <a:solidFill>
-              <a:srgbClr val="A371F7"/>
-            </a:solidFill>
-            <a:prstDash val="solid"/>
-          </a:ln>
-        </p:spPr>
-        <p:txBody>
-          <a:bodyPr/>
-          <a:lstStyle/>
-          <a:p>
-            <a:endParaRPr lang="en-US"/>
-          </a:p>
-        </p:txBody>
-      </p:sp>
-      <p:sp>
-        <p:nvSpPr>
-          <p:cNvPr id="32" name="Text 30"/>
-          <p:cNvSpPr/>
-          <p:nvPr/>
-        </p:nvSpPr>
-        <p:spPr>
-          <a:xfrm>
-            <a:off x="1051560" y="4553712"/>
-            <a:ext cx="502920" cy="502920"/>
-          </a:xfrm>
-          <a:prstGeom prst="rect">
-            <a:avLst/>
-          </a:prstGeom>
-          <a:noFill/>
-          <a:ln/>
-        </p:spPr>
-        <p:txBody>
-          <a:bodyPr wrap="square" rtlCol="0" anchor="ctr"/>
-          <a:lstStyle/>
-          <a:p>
-            <a:pPr marL="0" indent="0" algn="ctr">
-              <a:buNone/>
-            </a:pPr>
-            <a:r>
-              <a:rPr lang="en-US" sz="1800" b="1" dirty="0">
-                <a:solidFill>
-                  <a:srgbClr val="A371F7"/>
-                </a:solidFill>
-                <a:latin typeface="Segoe UI" pitchFamily="34" charset="0"/>
-                <a:ea typeface="Segoe UI" pitchFamily="34" charset="-122"/>
-                <a:cs typeface="Segoe UI" pitchFamily="34" charset="-120"/>
-              </a:rPr>
-              <a:t>4</a:t>
-            </a:r>
-            <a:endParaRPr lang="en-US" sz="1800" dirty="0"/>
-          </a:p>
-        </p:txBody>
-      </p:sp>
-      <p:sp>
-        <p:nvSpPr>
-          <p:cNvPr id="33" name="Text 31"/>
-          <p:cNvSpPr/>
-          <p:nvPr/>
-        </p:nvSpPr>
-        <p:spPr>
-          <a:xfrm>
-            <a:off x="1828800" y="4480560"/>
-            <a:ext cx="3200400" cy="640080"/>
-          </a:xfrm>
-          <a:prstGeom prst="rect">
-            <a:avLst/>
-          </a:prstGeom>
-          <a:noFill/>
-          <a:ln/>
-        </p:spPr>
-        <p:txBody>
-          <a:bodyPr wrap="square" rtlCol="0" anchor="ctr"/>
-          <a:lstStyle/>
-          <a:p>
-            <a:pPr marL="0" indent="0">
-              <a:buNone/>
-            </a:pPr>
-            <a:r>
-              <a:rPr lang="en-US" sz="2000" b="1" dirty="0">
-                <a:solidFill>
-                  <a:srgbClr val="E6EDF3"/>
-                </a:solidFill>
-                <a:latin typeface="Segoe UI" pitchFamily="34" charset="0"/>
-                <a:ea typeface="Segoe UI" pitchFamily="34" charset="-122"/>
-                <a:cs typeface="Segoe UI" pitchFamily="34" charset="-120"/>
-              </a:rPr>
-              <a:t>Safe Outputs</a:t>
-            </a:r>
-            <a:endParaRPr lang="en-US" sz="2000" dirty="0"/>
-          </a:p>
-        </p:txBody>
-      </p:sp>
-      <p:sp>
-        <p:nvSpPr>
-          <p:cNvPr id="34" name="Text 32"/>
-          <p:cNvSpPr/>
-          <p:nvPr/>
-        </p:nvSpPr>
-        <p:spPr>
-          <a:xfrm>
-            <a:off x="5029200" y="4462272"/>
-            <a:ext cx="5943600" cy="685800"/>
-          </a:xfrm>
-          <a:prstGeom prst="rect">
-            <a:avLst/>
-          </a:prstGeom>
-          <a:noFill/>
-          <a:ln/>
-        </p:spPr>
-        <p:txBody>
-          <a:bodyPr wrap="square" rtlCol="0" anchor="ctr"/>
-          <a:lstStyle/>
-          <a:p>
-            <a:pPr marL="0" indent="0">
-              <a:lnSpc>
-                <a:spcPct val="130000"/>
-              </a:lnSpc>
-              <a:buNone/>
-            </a:pPr>
-            <a:r>
-              <a:rPr lang="en-US" sz="1500" dirty="0">
-                <a:solidFill>
-                  <a:srgbClr val="8B949E"/>
-                </a:solidFill>
-                <a:latin typeface="Segoe UI" pitchFamily="34" charset="0"/>
-                <a:ea typeface="Segoe UI" pitchFamily="34" charset="-122"/>
-                <a:cs typeface="Segoe UI" pitchFamily="34" charset="-120"/>
-              </a:rPr>
-              <a:t>Agent produces structured artifact.</a:t>
-            </a:r>
-            <a:endParaRPr lang="en-US" sz="1500" dirty="0"/>
-          </a:p>
-          <a:p>
-            <a:pPr marL="0" indent="0">
-              <a:lnSpc>
-                <a:spcPct val="130000"/>
-              </a:lnSpc>
-              <a:buNone/>
-            </a:pPr>
-            <a:r>
-              <a:rPr lang="en-US" sz="1500" dirty="0">
-                <a:solidFill>
-                  <a:srgbClr val="8B949E"/>
-                </a:solidFill>
-                <a:latin typeface="Segoe UI" pitchFamily="34" charset="0"/>
-                <a:ea typeface="Segoe UI" pitchFamily="34" charset="-122"/>
-                <a:cs typeface="Segoe UI" pitchFamily="34" charset="-120"/>
-              </a:rPr>
-              <a:t>Gated write job applies only permitted ops.</a:t>
-            </a:r>
-            <a:endParaRPr lang="en-US" sz="1500" dirty="0"/>
-          </a:p>
-        </p:txBody>
-      </p:sp>
-      <p:sp>
-        <p:nvSpPr>
-          <p:cNvPr id="35" name="Shape 33"/>
-          <p:cNvSpPr/>
-          <p:nvPr/>
-        </p:nvSpPr>
-        <p:spPr>
-          <a:xfrm>
-            <a:off x="758952" y="5385816"/>
-            <a:ext cx="10698480" cy="822960"/>
-          </a:xfrm>
-          <a:prstGeom prst="roundRect">
-            <a:avLst>
-              <a:gd name="adj" fmla="val 13333"/>
-            </a:avLst>
-          </a:prstGeom>
-          <a:solidFill>
-            <a:srgbClr val="000000">
-              <a:alpha val="40000"/>
-            </a:srgbClr>
-          </a:solidFill>
-          <a:ln/>
-        </p:spPr>
-        <p:txBody>
-          <a:bodyPr/>
-          <a:lstStyle/>
-          <a:p>
-            <a:endParaRPr lang="en-US"/>
-          </a:p>
-        </p:txBody>
-      </p:sp>
-      <p:sp>
-        <p:nvSpPr>
-          <p:cNvPr id="36" name="Shape 34"/>
-          <p:cNvSpPr/>
-          <p:nvPr/>
-        </p:nvSpPr>
-        <p:spPr>
-          <a:xfrm>
-            <a:off x="731520" y="5349240"/>
-            <a:ext cx="10698480" cy="822960"/>
-          </a:xfrm>
-          <a:prstGeom prst="roundRect">
-            <a:avLst>
-              <a:gd name="adj" fmla="val 13333"/>
-            </a:avLst>
-          </a:prstGeom>
-          <a:solidFill>
-            <a:srgbClr val="21262D"/>
-          </a:solidFill>
-          <a:ln w="6350">
-            <a:solidFill>
-              <a:srgbClr val="30363D"/>
-            </a:solidFill>
-            <a:prstDash val="solid"/>
-          </a:ln>
-        </p:spPr>
-        <p:txBody>
-          <a:bodyPr/>
-          <a:lstStyle/>
-          <a:p>
-            <a:endParaRPr lang="en-US"/>
-          </a:p>
-        </p:txBody>
-      </p:sp>
-      <p:sp>
-        <p:nvSpPr>
-          <p:cNvPr id="37" name="Shape 35"/>
-          <p:cNvSpPr/>
-          <p:nvPr/>
-        </p:nvSpPr>
-        <p:spPr>
-          <a:xfrm>
-            <a:off x="731520" y="5440680"/>
-            <a:ext cx="45720" cy="640080"/>
-          </a:xfrm>
-          <a:prstGeom prst="rect">
-            <a:avLst/>
-          </a:prstGeom>
-          <a:solidFill>
-            <a:srgbClr val="F85149"/>
-          </a:solidFill>
-          <a:ln/>
-        </p:spPr>
-        <p:txBody>
-          <a:bodyPr/>
-          <a:lstStyle/>
-          <a:p>
-            <a:endParaRPr lang="en-US"/>
-          </a:p>
-        </p:txBody>
-      </p:sp>
-      <p:sp>
-        <p:nvSpPr>
-          <p:cNvPr id="38" name="Shape 36"/>
-          <p:cNvSpPr/>
-          <p:nvPr/>
-        </p:nvSpPr>
-        <p:spPr>
-          <a:xfrm>
-            <a:off x="1051560" y="5513832"/>
-            <a:ext cx="502920" cy="502920"/>
-          </a:xfrm>
-          <a:prstGeom prst="ellipse">
-            <a:avLst/>
-          </a:prstGeom>
-          <a:solidFill>
-            <a:srgbClr val="F85149">
-              <a:alpha val="20000"/>
-            </a:srgbClr>
-          </a:solidFill>
-          <a:ln w="19050">
-            <a:solidFill>
-              <a:srgbClr val="F85149"/>
-            </a:solidFill>
-            <a:prstDash val="solid"/>
-          </a:ln>
-        </p:spPr>
-        <p:txBody>
-          <a:bodyPr/>
-          <a:lstStyle/>
-          <a:p>
-            <a:endParaRPr lang="en-US"/>
-          </a:p>
-        </p:txBody>
-      </p:sp>
-      <p:sp>
-        <p:nvSpPr>
-          <p:cNvPr id="39" name="Text 37"/>
-          <p:cNvSpPr/>
-          <p:nvPr/>
-        </p:nvSpPr>
-        <p:spPr>
-          <a:xfrm>
-            <a:off x="1051560" y="5513832"/>
-            <a:ext cx="502920" cy="502920"/>
-          </a:xfrm>
-          <a:prstGeom prst="rect">
-            <a:avLst/>
-          </a:prstGeom>
-          <a:noFill/>
-          <a:ln/>
-        </p:spPr>
-        <p:txBody>
-          <a:bodyPr wrap="square" rtlCol="0" anchor="ctr"/>
-          <a:lstStyle/>
-          <a:p>
-            <a:pPr marL="0" indent="0" algn="ctr">
-              <a:buNone/>
-            </a:pPr>
-            <a:r>
-              <a:rPr lang="en-US" sz="1800" b="1" dirty="0">
-                <a:solidFill>
-                  <a:srgbClr val="F85149"/>
-                </a:solidFill>
-                <a:latin typeface="Segoe UI" pitchFamily="34" charset="0"/>
-                <a:ea typeface="Segoe UI" pitchFamily="34" charset="-122"/>
-                <a:cs typeface="Segoe UI" pitchFamily="34" charset="-120"/>
-              </a:rPr>
-              <a:t>5</a:t>
-            </a:r>
-            <a:endParaRPr lang="en-US" sz="1800" dirty="0"/>
-          </a:p>
-        </p:txBody>
-      </p:sp>
-      <p:sp>
-        <p:nvSpPr>
-          <p:cNvPr id="40" name="Text 38"/>
-          <p:cNvSpPr/>
-          <p:nvPr/>
-        </p:nvSpPr>
-        <p:spPr>
-          <a:xfrm>
-            <a:off x="1828800" y="5440680"/>
-            <a:ext cx="3200400" cy="640080"/>
-          </a:xfrm>
-          <a:prstGeom prst="rect">
-            <a:avLst/>
-          </a:prstGeom>
-          <a:noFill/>
-          <a:ln/>
-        </p:spPr>
-        <p:txBody>
-          <a:bodyPr wrap="square" rtlCol="0" anchor="ctr"/>
-          <a:lstStyle/>
-          <a:p>
-            <a:pPr marL="0" indent="0">
-              <a:buNone/>
-            </a:pPr>
-            <a:r>
-              <a:rPr lang="en-US" sz="2000" b="1" dirty="0">
-                <a:solidFill>
-                  <a:srgbClr val="E6EDF3"/>
-                </a:solidFill>
-                <a:latin typeface="Segoe UI" pitchFamily="34" charset="0"/>
-                <a:ea typeface="Segoe UI" pitchFamily="34" charset="-122"/>
-                <a:cs typeface="Segoe UI" pitchFamily="34" charset="-120"/>
-              </a:rPr>
-              <a:t>Threat Detection</a:t>
-            </a:r>
-            <a:endParaRPr lang="en-US" sz="2000" dirty="0"/>
-          </a:p>
-        </p:txBody>
-      </p:sp>
-      <p:sp>
-        <p:nvSpPr>
-          <p:cNvPr id="41" name="Text 39"/>
-          <p:cNvSpPr/>
-          <p:nvPr/>
-        </p:nvSpPr>
-        <p:spPr>
-          <a:xfrm>
-            <a:off x="5029200" y="5422392"/>
-            <a:ext cx="5943600" cy="685800"/>
-          </a:xfrm>
-          <a:prstGeom prst="rect">
-            <a:avLst/>
-          </a:prstGeom>
-          <a:noFill/>
-          <a:ln/>
-        </p:spPr>
-        <p:txBody>
-          <a:bodyPr wrap="square" rtlCol="0" anchor="ctr"/>
-          <a:lstStyle/>
-          <a:p>
-            <a:pPr marL="0" indent="0">
-              <a:lnSpc>
-                <a:spcPct val="130000"/>
-              </a:lnSpc>
-              <a:buNone/>
-            </a:pPr>
-            <a:r>
-              <a:rPr lang="en-US" sz="1500" dirty="0">
-                <a:solidFill>
-                  <a:srgbClr val="8B949E"/>
-                </a:solidFill>
-                <a:latin typeface="Segoe UI" pitchFamily="34" charset="0"/>
-                <a:ea typeface="Segoe UI" pitchFamily="34" charset="-122"/>
-                <a:cs typeface="Segoe UI" pitchFamily="34" charset="-120"/>
-              </a:rPr>
-              <a:t>AI-powered scan: prompt injection,</a:t>
+              <a:t>: prompt injection,</a:t>
             </a:r>
             <a:endParaRPr lang="en-US" sz="1500" dirty="0"/>
           </a:p>
@@ -11112,7 +13070,7 @@
 </file>
 
 <file path=ppt/slides/slide5.xml><?xml version="1.0" encoding="utf-8"?>
-<p:sld xmlns:a="http://schemas.openxmlformats.org/drawingml/2006/main" xmlns:r="http://schemas.openxmlformats.org/officeDocument/2006/relationships" xmlns:p="http://schemas.openxmlformats.org/presentationml/2006/main">
+<p:sld xmlns:a="http://schemas.openxmlformats.org/drawingml/2006/main" xmlns:r="http://schemas.openxmlformats.org/officeDocument/2006/relationships" xmlns:p="http://schemas.openxmlformats.org/presentationml/2006/main" show="0">
   <p:cSld name="Slide 5">
     <p:bg>
       <p:bgPr>
@@ -14987,7 +16945,7 @@
           <a:p>
             <a:pPr algn="l"/>
             <a:r>
-              <a:rPr sz="3800" b="1" i="0">
+              <a:rPr sz="3800" b="1" i="0" dirty="0">
                 <a:solidFill>
                   <a:srgbClr val="E6EDF3"/>
                 </a:solidFill>
@@ -16484,11 +18442,11 @@
 
 <file path=ppt/slides/slide9.xml><?xml version="1.0" encoding="utf-8"?>
 <p:sld xmlns:a="http://schemas.openxmlformats.org/drawingml/2006/main" xmlns:r="http://schemas.openxmlformats.org/officeDocument/2006/relationships" xmlns:p="http://schemas.openxmlformats.org/presentationml/2006/main">
-  <p:cSld name="Slide 6">
+  <p:cSld>
     <p:bg>
       <p:bgPr>
         <a:solidFill>
-          <a:srgbClr val="0D1117"/>
+          <a:schemeClr val="bg1"/>
         </a:solidFill>
         <a:effectLst/>
       </p:bgPr>
@@ -16507,1702 +18465,422 @@
           <a:chExt cx="0" cy="0"/>
         </a:xfrm>
       </p:grpSpPr>
-      <p:sp>
-        <p:nvSpPr>
-          <p:cNvPr id="2" name="Shape 0"/>
-          <p:cNvSpPr/>
-          <p:nvPr/>
+      <p:sp useBgFill="1">
+        <p:nvSpPr>
+          <p:cNvPr id="8" name="Rectangle 7">
+            <a:extLst>
+              <a:ext uri="{FF2B5EF4-FFF2-40B4-BE49-F238E27FC236}">
+                <a16:creationId xmlns:a16="http://schemas.microsoft.com/office/drawing/2014/main" id="{AB8C311F-7253-4AED-9701-7FC0708C41C7}"/>
+              </a:ext>
+              <a:ext uri="{C183D7F6-B498-43B3-948B-1728B52AA6E4}">
+                <adec:decorative xmlns:adec="http://schemas.microsoft.com/office/drawing/2017/decorative" val="1"/>
+              </a:ext>
+            </a:extLst>
+          </p:cNvPr>
+          <p:cNvSpPr>
+            <a:spLocks noGrp="1" noRot="1" noChangeAspect="1" noMove="1" noResize="1" noEditPoints="1" noAdjustHandles="1" noChangeArrowheads="1" noChangeShapeType="1" noTextEdit="1"/>
+          </p:cNvSpPr>
+          <p:nvPr>
+            <p:extLst>
+              <p:ext uri="{386F3935-93C4-4BCD-93E2-E3B085C9AB24}">
+                <p16:designElem xmlns:p16="http://schemas.microsoft.com/office/powerpoint/2015/main" val="1"/>
+              </p:ext>
+            </p:extLst>
+          </p:nvPr>
         </p:nvSpPr>
         <p:spPr>
           <a:xfrm>
             <a:off x="0" y="0"/>
-            <a:ext cx="12188952" cy="36576"/>
-          </a:xfrm>
-          <a:prstGeom prst="rect">
-            <a:avLst/>
-          </a:prstGeom>
-          <a:solidFill>
-            <a:srgbClr val="238636"/>
-          </a:solidFill>
-          <a:ln/>
-        </p:spPr>
-        <p:txBody>
-          <a:bodyPr/>
-          <a:lstStyle/>
-          <a:p>
-            <a:endParaRPr lang="en-US"/>
-          </a:p>
-        </p:txBody>
-      </p:sp>
-      <p:sp>
-        <p:nvSpPr>
-          <p:cNvPr id="3" name="Text 1"/>
-          <p:cNvSpPr/>
-          <p:nvPr/>
-        </p:nvSpPr>
-        <p:spPr>
-          <a:xfrm>
-            <a:off x="731520" y="6400800"/>
-            <a:ext cx="7315200" cy="320040"/>
+            <a:ext cx="12192000" cy="6858000"/>
+          </a:xfrm>
+          <a:prstGeom prst="rect">
+            <a:avLst/>
+          </a:prstGeom>
+          <a:ln w="12700" cap="flat" cmpd="sng" algn="ctr">
+            <a:noFill/>
+            <a:prstDash val="solid"/>
+            <a:miter lim="800000"/>
+          </a:ln>
+          <a:effectLst/>
+          <a:extLst>
+            <a:ext uri="{91240B29-F687-4F45-9708-019B960494DF}">
+              <a14:hiddenLine xmlns:a14="http://schemas.microsoft.com/office/drawing/2010/main" w="12700" cap="flat" cmpd="sng" algn="ctr">
+                <a:solidFill>
+                  <a:schemeClr val="accent1">
+                    <a:shade val="50000"/>
+                  </a:schemeClr>
+                </a:solidFill>
+                <a:prstDash val="solid"/>
+                <a:miter lim="800000"/>
+              </a14:hiddenLine>
+            </a:ext>
+          </a:extLst>
+        </p:spPr>
+        <p:style>
+          <a:lnRef idx="2">
+            <a:schemeClr val="accent1">
+              <a:shade val="50000"/>
+            </a:schemeClr>
+          </a:lnRef>
+          <a:fillRef idx="1">
+            <a:schemeClr val="accent1"/>
+          </a:fillRef>
+          <a:effectRef idx="0">
+            <a:schemeClr val="accent1"/>
+          </a:effectRef>
+          <a:fontRef idx="minor">
+            <a:schemeClr val="lt1"/>
+          </a:fontRef>
+        </p:style>
+        <p:txBody>
+          <a:bodyPr rtlCol="0" anchor="ctr"/>
+          <a:lstStyle/>
+          <a:p>
+            <a:pPr algn="ctr"/>
+            <a:endParaRPr lang="en-US"/>
+          </a:p>
+        </p:txBody>
+      </p:sp>
+      <p:sp>
+        <p:nvSpPr>
+          <p:cNvPr id="10" name="Rectangle 9">
+            <a:extLst>
+              <a:ext uri="{FF2B5EF4-FFF2-40B4-BE49-F238E27FC236}">
+                <a16:creationId xmlns:a16="http://schemas.microsoft.com/office/drawing/2014/main" id="{E2384209-CB15-4CDF-9D31-C44FD9A3F20D}"/>
+              </a:ext>
+              <a:ext uri="{C183D7F6-B498-43B3-948B-1728B52AA6E4}">
+                <adec:decorative xmlns:adec="http://schemas.microsoft.com/office/drawing/2017/decorative" val="1"/>
+              </a:ext>
+            </a:extLst>
+          </p:cNvPr>
+          <p:cNvSpPr>
+            <a:spLocks noGrp="1" noRot="1" noChangeAspect="1" noMove="1" noResize="1" noEditPoints="1" noAdjustHandles="1" noChangeArrowheads="1" noChangeShapeType="1" noTextEdit="1"/>
+          </p:cNvSpPr>
+          <p:nvPr>
+            <p:extLst>
+              <p:ext uri="{386F3935-93C4-4BCD-93E2-E3B085C9AB24}">
+                <p16:designElem xmlns:p16="http://schemas.microsoft.com/office/powerpoint/2015/main" val="1"/>
+              </p:ext>
+            </p:extLst>
+          </p:nvPr>
+        </p:nvSpPr>
+        <p:spPr>
+          <a:xfrm rot="16200000" flipH="1">
+            <a:off x="2666617" y="-2666188"/>
+            <a:ext cx="6858000" cy="12191233"/>
+          </a:xfrm>
+          <a:prstGeom prst="rect">
+            <a:avLst/>
+          </a:prstGeom>
+          <a:gradFill>
+            <a:gsLst>
+              <a:gs pos="8000">
+                <a:schemeClr val="accent1"/>
+              </a:gs>
+              <a:gs pos="100000">
+                <a:schemeClr val="accent1">
+                  <a:lumMod val="50000"/>
+                </a:schemeClr>
+              </a:gs>
+            </a:gsLst>
+            <a:lin ang="12000000" scaled="0"/>
+          </a:gradFill>
+          <a:ln>
+            <a:noFill/>
+          </a:ln>
+        </p:spPr>
+        <p:style>
+          <a:lnRef idx="2">
+            <a:schemeClr val="accent1">
+              <a:shade val="50000"/>
+            </a:schemeClr>
+          </a:lnRef>
+          <a:fillRef idx="1">
+            <a:schemeClr val="accent1"/>
+          </a:fillRef>
+          <a:effectRef idx="0">
+            <a:schemeClr val="accent1"/>
+          </a:effectRef>
+          <a:fontRef idx="minor">
+            <a:schemeClr val="lt1"/>
+          </a:fontRef>
+        </p:style>
+        <p:txBody>
+          <a:bodyPr rtlCol="0" anchor="ctr"/>
+          <a:lstStyle/>
+          <a:p>
+            <a:pPr algn="ctr"/>
+            <a:endParaRPr lang="en-US"/>
+          </a:p>
+        </p:txBody>
+      </p:sp>
+      <p:sp>
+        <p:nvSpPr>
+          <p:cNvPr id="12" name="Rectangle 11">
+            <a:extLst>
+              <a:ext uri="{FF2B5EF4-FFF2-40B4-BE49-F238E27FC236}">
+                <a16:creationId xmlns:a16="http://schemas.microsoft.com/office/drawing/2014/main" id="{2633B3B5-CC90-43F0-8714-D31D1F3F0209}"/>
+              </a:ext>
+              <a:ext uri="{C183D7F6-B498-43B3-948B-1728B52AA6E4}">
+                <adec:decorative xmlns:adec="http://schemas.microsoft.com/office/drawing/2017/decorative" val="1"/>
+              </a:ext>
+            </a:extLst>
+          </p:cNvPr>
+          <p:cNvSpPr>
+            <a:spLocks noGrp="1" noRot="1" noChangeAspect="1" noMove="1" noResize="1" noEditPoints="1" noAdjustHandles="1" noChangeArrowheads="1" noChangeShapeType="1" noTextEdit="1"/>
+          </p:cNvSpPr>
+          <p:nvPr>
+            <p:extLst>
+              <p:ext uri="{386F3935-93C4-4BCD-93E2-E3B085C9AB24}">
+                <p16:designElem xmlns:p16="http://schemas.microsoft.com/office/powerpoint/2015/main" val="1"/>
+              </p:ext>
+            </p:extLst>
+          </p:nvPr>
+        </p:nvSpPr>
+        <p:spPr>
+          <a:xfrm rot="10800000" flipH="1">
+            <a:off x="-2311" y="0"/>
+            <a:ext cx="9070846" cy="6857572"/>
+          </a:xfrm>
+          <a:prstGeom prst="rect">
+            <a:avLst/>
+          </a:prstGeom>
+          <a:gradFill>
+            <a:gsLst>
+              <a:gs pos="8000">
+                <a:srgbClr val="000000">
+                  <a:alpha val="52000"/>
+                </a:srgbClr>
+              </a:gs>
+              <a:gs pos="100000">
+                <a:schemeClr val="accent1"/>
+              </a:gs>
+            </a:gsLst>
+            <a:lin ang="4800000" scaled="0"/>
+          </a:gradFill>
+          <a:ln>
+            <a:noFill/>
+          </a:ln>
+        </p:spPr>
+        <p:style>
+          <a:lnRef idx="2">
+            <a:schemeClr val="accent1">
+              <a:shade val="50000"/>
+            </a:schemeClr>
+          </a:lnRef>
+          <a:fillRef idx="1">
+            <a:schemeClr val="accent1"/>
+          </a:fillRef>
+          <a:effectRef idx="0">
+            <a:schemeClr val="accent1"/>
+          </a:effectRef>
+          <a:fontRef idx="minor">
+            <a:schemeClr val="lt1"/>
+          </a:fontRef>
+        </p:style>
+        <p:txBody>
+          <a:bodyPr rtlCol="0" anchor="ctr"/>
+          <a:lstStyle/>
+          <a:p>
+            <a:pPr algn="ctr"/>
+            <a:endParaRPr lang="en-US"/>
+          </a:p>
+        </p:txBody>
+      </p:sp>
+      <p:sp>
+        <p:nvSpPr>
+          <p:cNvPr id="14" name="Rectangle 13">
+            <a:extLst>
+              <a:ext uri="{FF2B5EF4-FFF2-40B4-BE49-F238E27FC236}">
+                <a16:creationId xmlns:a16="http://schemas.microsoft.com/office/drawing/2014/main" id="{A8D57A06-A426-446D-B02C-A2DC6B62E45E}"/>
+              </a:ext>
+              <a:ext uri="{C183D7F6-B498-43B3-948B-1728B52AA6E4}">
+                <adec:decorative xmlns:adec="http://schemas.microsoft.com/office/drawing/2017/decorative" val="1"/>
+              </a:ext>
+            </a:extLst>
+          </p:cNvPr>
+          <p:cNvSpPr>
+            <a:spLocks noGrp="1" noRot="1" noChangeAspect="1" noMove="1" noResize="1" noEditPoints="1" noAdjustHandles="1" noChangeArrowheads="1" noChangeShapeType="1" noTextEdit="1"/>
+          </p:cNvSpPr>
+          <p:nvPr>
+            <p:extLst>
+              <p:ext uri="{386F3935-93C4-4BCD-93E2-E3B085C9AB24}">
+                <p16:designElem xmlns:p16="http://schemas.microsoft.com/office/powerpoint/2015/main" val="1"/>
+              </p:ext>
+            </p:extLst>
+          </p:nvPr>
+        </p:nvSpPr>
+        <p:spPr>
+          <a:xfrm rot="16200000" flipH="1">
+            <a:off x="3649491" y="-1685840"/>
+            <a:ext cx="4894564" cy="12193546"/>
+          </a:xfrm>
+          <a:prstGeom prst="rect">
+            <a:avLst/>
+          </a:prstGeom>
+          <a:gradFill>
+            <a:gsLst>
+              <a:gs pos="0">
+                <a:schemeClr val="accent5">
+                  <a:lumMod val="60000"/>
+                  <a:lumOff val="40000"/>
+                  <a:alpha val="0"/>
+                </a:schemeClr>
+              </a:gs>
+              <a:gs pos="100000">
+                <a:srgbClr val="000000">
+                  <a:alpha val="46000"/>
+                </a:srgbClr>
+              </a:gs>
+            </a:gsLst>
+            <a:lin ang="1200000" scaled="0"/>
+          </a:gradFill>
+          <a:ln>
+            <a:noFill/>
+          </a:ln>
+        </p:spPr>
+        <p:style>
+          <a:lnRef idx="2">
+            <a:schemeClr val="accent1">
+              <a:shade val="50000"/>
+            </a:schemeClr>
+          </a:lnRef>
+          <a:fillRef idx="1">
+            <a:schemeClr val="accent1"/>
+          </a:fillRef>
+          <a:effectRef idx="0">
+            <a:schemeClr val="accent1"/>
+          </a:effectRef>
+          <a:fontRef idx="minor">
+            <a:schemeClr val="lt1"/>
+          </a:fontRef>
+        </p:style>
+        <p:txBody>
+          <a:bodyPr rtlCol="0" anchor="ctr"/>
+          <a:lstStyle/>
+          <a:p>
+            <a:pPr algn="ctr"/>
+            <a:endParaRPr lang="en-US"/>
+          </a:p>
+        </p:txBody>
+      </p:sp>
+      <p:pic>
+        <p:nvPicPr>
+          <p:cNvPr id="3" name="Picture 2">
+            <a:extLst>
+              <a:ext uri="{FF2B5EF4-FFF2-40B4-BE49-F238E27FC236}">
+                <a16:creationId xmlns:a16="http://schemas.microsoft.com/office/drawing/2014/main" id="{273CB3E2-B4F0-F1B3-DFD6-85F1DC881EB3}"/>
+              </a:ext>
+            </a:extLst>
+          </p:cNvPr>
+          <p:cNvPicPr>
+            <a:picLocks noChangeAspect="1"/>
+          </p:cNvPicPr>
+          <p:nvPr/>
+        </p:nvPicPr>
+        <p:blipFill>
+          <a:blip r:embed="rId2"/>
+          <a:stretch>
+            <a:fillRect/>
+          </a:stretch>
+        </p:blipFill>
+        <p:spPr>
+          <a:xfrm>
+            <a:off x="464451" y="795167"/>
+            <a:ext cx="11277600" cy="3411474"/>
+          </a:xfrm>
+          <a:prstGeom prst="rect">
+            <a:avLst/>
+          </a:prstGeom>
+        </p:spPr>
+      </p:pic>
+      <p:pic>
+        <p:nvPicPr>
+          <p:cNvPr id="5" name="Picture 4">
+            <a:extLst>
+              <a:ext uri="{FF2B5EF4-FFF2-40B4-BE49-F238E27FC236}">
+                <a16:creationId xmlns:a16="http://schemas.microsoft.com/office/drawing/2014/main" id="{D26C4F66-DF62-132F-AEA5-B19CA54E17E5}"/>
+              </a:ext>
+            </a:extLst>
+          </p:cNvPr>
+          <p:cNvPicPr>
+            <a:picLocks noChangeAspect="1"/>
+          </p:cNvPicPr>
+          <p:nvPr/>
+        </p:nvPicPr>
+        <p:blipFill>
+          <a:blip r:embed="rId3"/>
+          <a:stretch>
+            <a:fillRect/>
+          </a:stretch>
+        </p:blipFill>
+        <p:spPr>
+          <a:xfrm>
+            <a:off x="464451" y="4336991"/>
+            <a:ext cx="6776956" cy="2390232"/>
+          </a:xfrm>
+          <a:prstGeom prst="rect">
+            <a:avLst/>
+          </a:prstGeom>
+        </p:spPr>
+      </p:pic>
+      <p:sp>
+        <p:nvSpPr>
+          <p:cNvPr id="7" name="TextBox 6">
+            <a:extLst>
+              <a:ext uri="{FF2B5EF4-FFF2-40B4-BE49-F238E27FC236}">
+                <a16:creationId xmlns:a16="http://schemas.microsoft.com/office/drawing/2014/main" id="{454DAE69-C64C-BF34-FBBE-D385C24D9915}"/>
+              </a:ext>
+            </a:extLst>
+          </p:cNvPr>
+          <p:cNvSpPr txBox="1"/>
+          <p:nvPr/>
+        </p:nvSpPr>
+        <p:spPr>
+          <a:xfrm>
+            <a:off x="258945" y="59244"/>
+            <a:ext cx="8548334" cy="677108"/>
           </a:xfrm>
           <a:prstGeom prst="rect">
             <a:avLst/>
           </a:prstGeom>
           <a:noFill/>
-          <a:ln/>
-        </p:spPr>
-        <p:txBody>
-          <a:bodyPr wrap="square" rtlCol="0" anchor="ctr"/>
-          <a:lstStyle/>
-          <a:p>
-            <a:pPr marL="0" indent="0">
-              <a:buNone/>
-            </a:pPr>
-            <a:r>
-              <a:rPr lang="en-US" sz="1000" dirty="0">
-                <a:solidFill>
-                  <a:srgbClr val="484F58"/>
-                </a:solidFill>
-                <a:latin typeface="Segoe UI" pitchFamily="34" charset="0"/>
-                <a:ea typeface="Segoe UI" pitchFamily="34" charset="-122"/>
-                <a:cs typeface="Segoe UI" pitchFamily="34" charset="-120"/>
-              </a:rPr>
-              <a:t>Innovate 2026  ·  ADO/GitHub with Microsoft</a:t>
-            </a:r>
-            <a:endParaRPr lang="en-US" sz="1000" dirty="0"/>
-          </a:p>
-        </p:txBody>
-      </p:sp>
-      <p:sp>
-        <p:nvSpPr>
-          <p:cNvPr id="4" name="Text 2"/>
-          <p:cNvSpPr/>
-          <p:nvPr/>
-        </p:nvSpPr>
-        <p:spPr>
-          <a:xfrm>
-            <a:off x="11155680" y="6446520"/>
-            <a:ext cx="822960" cy="274320"/>
-          </a:xfrm>
-          <a:prstGeom prst="rect">
-            <a:avLst/>
-          </a:prstGeom>
-          <a:noFill/>
-          <a:ln/>
-        </p:spPr>
-        <p:txBody>
-          <a:bodyPr wrap="square" rtlCol="0" anchor="ctr"/>
-          <a:lstStyle/>
-          <a:p>
-            <a:pPr marL="0" indent="0" algn="r">
-              <a:buNone/>
-            </a:pPr>
-            <a:r>
-              <a:rPr lang="en-US" sz="1000" dirty="0">
-                <a:solidFill>
-                  <a:srgbClr val="484F58"/>
-                </a:solidFill>
-                <a:latin typeface="Segoe UI" pitchFamily="34" charset="0"/>
-                <a:ea typeface="Segoe UI" pitchFamily="34" charset="-122"/>
-                <a:cs typeface="Segoe UI" pitchFamily="34" charset="-120"/>
-              </a:rPr>
-              <a:t>9 / 11</a:t>
-            </a:r>
-            <a:endParaRPr lang="en-US" sz="1000" dirty="0"/>
-          </a:p>
-        </p:txBody>
-      </p:sp>
-      <p:sp>
-        <p:nvSpPr>
-          <p:cNvPr id="5" name="Text 3"/>
-          <p:cNvSpPr/>
-          <p:nvPr/>
-        </p:nvSpPr>
-        <p:spPr>
-          <a:xfrm>
-            <a:off x="731520" y="320040"/>
-            <a:ext cx="10058400" cy="640080"/>
-          </a:xfrm>
-          <a:prstGeom prst="rect">
-            <a:avLst/>
-          </a:prstGeom>
-          <a:noFill/>
-          <a:ln/>
-        </p:spPr>
-        <p:txBody>
-          <a:bodyPr wrap="square" rtlCol="0" anchor="ctr"/>
-          <a:lstStyle/>
-          <a:p>
-            <a:pPr marL="0" indent="0">
-              <a:buNone/>
-            </a:pPr>
-            <a:r>
-              <a:rPr lang="en-US" sz="3800" b="1" dirty="0">
+        </p:spPr>
+        <p:txBody>
+          <a:bodyPr wrap="square" anchor="ctr">
+            <a:spAutoFit/>
+          </a:bodyPr>
+          <a:lstStyle/>
+          <a:p>
+            <a:pPr algn="l"/>
+            <a:r>
+              <a:rPr lang="en-US" sz="3800" b="1" i="0" dirty="0">
                 <a:solidFill>
                   <a:srgbClr val="E6EDF3"/>
                 </a:solidFill>
-                <a:latin typeface="Segoe UI" pitchFamily="34" charset="0"/>
-                <a:ea typeface="Segoe UI" pitchFamily="34" charset="-122"/>
-                <a:cs typeface="Segoe UI" pitchFamily="34" charset="-120"/>
-              </a:rPr>
-              <a:t>What Can Your Teams Build?</a:t>
-            </a:r>
-            <a:endParaRPr lang="en-US" sz="3800" dirty="0"/>
-          </a:p>
-        </p:txBody>
-      </p:sp>
-      <p:sp>
-        <p:nvSpPr>
-          <p:cNvPr id="6" name="Text 4"/>
-          <p:cNvSpPr/>
-          <p:nvPr/>
-        </p:nvSpPr>
-        <p:spPr>
-          <a:xfrm>
-            <a:off x="731520" y="914400"/>
-            <a:ext cx="9144000" cy="365760"/>
-          </a:xfrm>
-          <a:prstGeom prst="rect">
-            <a:avLst/>
-          </a:prstGeom>
-          <a:noFill/>
-          <a:ln/>
-        </p:spPr>
-        <p:txBody>
-          <a:bodyPr wrap="square" rtlCol="0" anchor="ctr"/>
-          <a:lstStyle/>
-          <a:p>
-            <a:pPr marL="0" indent="0">
-              <a:buNone/>
-            </a:pPr>
-            <a:r>
-              <a:rPr lang="en-US" sz="1600" i="1" dirty="0">
-                <a:solidFill>
-                  <a:srgbClr val="8B949E"/>
-                </a:solidFill>
-                <a:latin typeface="Segoe UI" pitchFamily="34" charset="0"/>
-                <a:ea typeface="Segoe UI" pitchFamily="34" charset="-122"/>
-                <a:cs typeface="Segoe UI" pitchFamily="34" charset="-120"/>
-              </a:rPr>
-              <a:t>18 design patterns · Ready-made examples at github.com/githubnext/agentics</a:t>
-            </a:r>
-            <a:endParaRPr lang="en-US" sz="1600" dirty="0"/>
-          </a:p>
-        </p:txBody>
-      </p:sp>
-      <p:sp>
-        <p:nvSpPr>
-          <p:cNvPr id="7" name="Shape 5"/>
-          <p:cNvSpPr/>
-          <p:nvPr/>
-        </p:nvSpPr>
-        <p:spPr>
-          <a:xfrm>
-            <a:off x="758952" y="1591056"/>
-            <a:ext cx="3429000" cy="2148840"/>
-          </a:xfrm>
-          <a:prstGeom prst="roundRect">
-            <a:avLst>
-              <a:gd name="adj" fmla="val 5106"/>
-            </a:avLst>
-          </a:prstGeom>
-          <a:solidFill>
-            <a:srgbClr val="000000">
-              <a:alpha val="40000"/>
-            </a:srgbClr>
-          </a:solidFill>
-          <a:ln/>
-        </p:spPr>
-        <p:txBody>
-          <a:bodyPr/>
-          <a:lstStyle/>
-          <a:p>
-            <a:endParaRPr lang="en-US"/>
-          </a:p>
-        </p:txBody>
-      </p:sp>
-      <p:sp>
-        <p:nvSpPr>
-          <p:cNvPr id="8" name="Shape 6"/>
-          <p:cNvSpPr/>
-          <p:nvPr/>
-        </p:nvSpPr>
-        <p:spPr>
-          <a:xfrm>
-            <a:off x="731520" y="1554480"/>
-            <a:ext cx="3429000" cy="2148840"/>
-          </a:xfrm>
-          <a:prstGeom prst="roundRect">
-            <a:avLst>
-              <a:gd name="adj" fmla="val 5106"/>
-            </a:avLst>
-          </a:prstGeom>
-          <a:solidFill>
-            <a:srgbClr val="21262D"/>
-          </a:solidFill>
-          <a:ln w="6350">
-            <a:solidFill>
-              <a:srgbClr val="30363D"/>
-            </a:solidFill>
-            <a:prstDash val="solid"/>
-          </a:ln>
-        </p:spPr>
-        <p:txBody>
-          <a:bodyPr/>
-          <a:lstStyle/>
-          <a:p>
-            <a:endParaRPr lang="en-US"/>
-          </a:p>
-        </p:txBody>
-      </p:sp>
-      <p:sp>
-        <p:nvSpPr>
-          <p:cNvPr id="9" name="Shape 7"/>
-          <p:cNvSpPr/>
-          <p:nvPr/>
-        </p:nvSpPr>
-        <p:spPr>
-          <a:xfrm>
-            <a:off x="868680" y="1554480"/>
-            <a:ext cx="3154680" cy="36576"/>
-          </a:xfrm>
-          <a:prstGeom prst="rect">
-            <a:avLst/>
-          </a:prstGeom>
-          <a:solidFill>
-            <a:srgbClr val="1F6FEB"/>
-          </a:solidFill>
-          <a:ln/>
-        </p:spPr>
-        <p:txBody>
-          <a:bodyPr/>
-          <a:lstStyle/>
-          <a:p>
-            <a:endParaRPr lang="en-US"/>
-          </a:p>
-        </p:txBody>
-      </p:sp>
-      <p:sp>
-        <p:nvSpPr>
-          <p:cNvPr id="10" name="Text 8"/>
-          <p:cNvSpPr/>
-          <p:nvPr/>
-        </p:nvSpPr>
-        <p:spPr>
-          <a:xfrm>
-            <a:off x="914400" y="1783080"/>
-            <a:ext cx="548640" cy="548640"/>
-          </a:xfrm>
-          <a:prstGeom prst="rect">
-            <a:avLst/>
-          </a:prstGeom>
-          <a:noFill/>
-          <a:ln/>
-        </p:spPr>
-        <p:txBody>
-          <a:bodyPr wrap="square" rtlCol="0" anchor="ctr"/>
-          <a:lstStyle/>
-          <a:p>
-            <a:pPr marL="0" indent="0">
-              <a:buNone/>
-            </a:pPr>
-            <a:r>
-              <a:rPr lang="en-US" sz="2800" dirty="0">
-                <a:solidFill>
-                  <a:srgbClr val="000000"/>
-                </a:solidFill>
-              </a:rPr>
-              <a:t>⚡</a:t>
-            </a:r>
-            <a:endParaRPr lang="en-US" sz="2800" dirty="0"/>
-          </a:p>
-        </p:txBody>
-      </p:sp>
-      <p:sp>
-        <p:nvSpPr>
-          <p:cNvPr id="11" name="Text 9"/>
-          <p:cNvSpPr/>
-          <p:nvPr/>
-        </p:nvSpPr>
-        <p:spPr>
-          <a:xfrm>
-            <a:off x="1508760" y="1737360"/>
-            <a:ext cx="2377440" cy="640080"/>
-          </a:xfrm>
-          <a:prstGeom prst="rect">
-            <a:avLst/>
-          </a:prstGeom>
-          <a:noFill/>
-          <a:ln/>
-        </p:spPr>
-        <p:txBody>
-          <a:bodyPr wrap="square" rtlCol="0" anchor="ctr"/>
-          <a:lstStyle/>
-          <a:p>
-            <a:pPr marL="0" indent="0">
-              <a:lnSpc>
-                <a:spcPct val="115000"/>
-              </a:lnSpc>
-              <a:buNone/>
-            </a:pPr>
-            <a:r>
-              <a:rPr lang="en-US" sz="1800" b="1" dirty="0">
-                <a:solidFill>
-                  <a:srgbClr val="E6EDF3"/>
-                </a:solidFill>
-                <a:latin typeface="Segoe UI" pitchFamily="34" charset="0"/>
-                <a:ea typeface="Segoe UI" pitchFamily="34" charset="-122"/>
-                <a:cs typeface="Segoe UI" pitchFamily="34" charset="-120"/>
-              </a:rPr>
-              <a:t>Issue &amp; PR</a:t>
-            </a:r>
-            <a:endParaRPr lang="en-US" sz="1800" dirty="0"/>
-          </a:p>
-          <a:p>
-            <a:pPr marL="0" indent="0">
-              <a:lnSpc>
-                <a:spcPct val="115000"/>
-              </a:lnSpc>
-              <a:buNone/>
-            </a:pPr>
-            <a:r>
-              <a:rPr lang="en-US" sz="1800" b="1" dirty="0">
-                <a:solidFill>
-                  <a:srgbClr val="E6EDF3"/>
-                </a:solidFill>
-                <a:latin typeface="Segoe UI" pitchFamily="34" charset="0"/>
-                <a:ea typeface="Segoe UI" pitchFamily="34" charset="-122"/>
-                <a:cs typeface="Segoe UI" pitchFamily="34" charset="-120"/>
-              </a:rPr>
-              <a:t>Management</a:t>
-            </a:r>
-            <a:endParaRPr lang="en-US" sz="1800" dirty="0"/>
-          </a:p>
-        </p:txBody>
-      </p:sp>
-      <p:sp>
-        <p:nvSpPr>
-          <p:cNvPr id="12" name="Text 10"/>
-          <p:cNvSpPr/>
-          <p:nvPr/>
-        </p:nvSpPr>
-        <p:spPr>
-          <a:xfrm>
-            <a:off x="914400" y="2606040"/>
-            <a:ext cx="3017520" cy="914400"/>
-          </a:xfrm>
-          <a:prstGeom prst="rect">
-            <a:avLst/>
-          </a:prstGeom>
-          <a:noFill/>
-          <a:ln/>
-        </p:spPr>
-        <p:txBody>
-          <a:bodyPr wrap="square" rtlCol="0" anchor="ctr"/>
-          <a:lstStyle/>
-          <a:p>
-            <a:pPr marL="0" indent="0">
-              <a:lnSpc>
-                <a:spcPct val="130000"/>
-              </a:lnSpc>
-              <a:buNone/>
-            </a:pPr>
-            <a:r>
-              <a:rPr lang="en-US" sz="1500" dirty="0">
-                <a:solidFill>
-                  <a:srgbClr val="8B949E"/>
-                </a:solidFill>
-                <a:latin typeface="Segoe UI" pitchFamily="34" charset="0"/>
-                <a:ea typeface="Segoe UI" pitchFamily="34" charset="-122"/>
-                <a:cs typeface="Segoe UI" pitchFamily="34" charset="-120"/>
-              </a:rPr>
-              <a:t>Auto-triage, labeling,</a:t>
-            </a:r>
-            <a:endParaRPr lang="en-US" sz="1500" dirty="0"/>
-          </a:p>
-          <a:p>
-            <a:pPr marL="0" indent="0">
-              <a:lnSpc>
-                <a:spcPct val="130000"/>
-              </a:lnSpc>
-              <a:buNone/>
-            </a:pPr>
-            <a:r>
-              <a:rPr lang="en-US" sz="1500" dirty="0">
-                <a:solidFill>
-                  <a:srgbClr val="8B949E"/>
-                </a:solidFill>
-                <a:latin typeface="Segoe UI" pitchFamily="34" charset="0"/>
-                <a:ea typeface="Segoe UI" pitchFamily="34" charset="-122"/>
-                <a:cs typeface="Segoe UI" pitchFamily="34" charset="-120"/>
-              </a:rPr>
-              <a:t>project coordination</a:t>
-            </a:r>
-            <a:endParaRPr lang="en-US" sz="1500" dirty="0"/>
-          </a:p>
-        </p:txBody>
-      </p:sp>
-      <p:sp>
-        <p:nvSpPr>
-          <p:cNvPr id="13" name="Shape 11"/>
-          <p:cNvSpPr/>
-          <p:nvPr/>
-        </p:nvSpPr>
-        <p:spPr>
-          <a:xfrm>
-            <a:off x="4507992" y="1591056"/>
-            <a:ext cx="3429000" cy="2148840"/>
-          </a:xfrm>
-          <a:prstGeom prst="roundRect">
-            <a:avLst>
-              <a:gd name="adj" fmla="val 5106"/>
-            </a:avLst>
-          </a:prstGeom>
-          <a:solidFill>
-            <a:srgbClr val="000000">
-              <a:alpha val="40000"/>
-            </a:srgbClr>
-          </a:solidFill>
-          <a:ln/>
-        </p:spPr>
-        <p:txBody>
-          <a:bodyPr/>
-          <a:lstStyle/>
-          <a:p>
-            <a:endParaRPr lang="en-US"/>
-          </a:p>
-        </p:txBody>
-      </p:sp>
-      <p:sp>
-        <p:nvSpPr>
-          <p:cNvPr id="14" name="Shape 12"/>
-          <p:cNvSpPr/>
-          <p:nvPr/>
-        </p:nvSpPr>
-        <p:spPr>
-          <a:xfrm>
-            <a:off x="4480560" y="1554480"/>
-            <a:ext cx="3429000" cy="2148840"/>
-          </a:xfrm>
-          <a:prstGeom prst="roundRect">
-            <a:avLst>
-              <a:gd name="adj" fmla="val 5106"/>
-            </a:avLst>
-          </a:prstGeom>
-          <a:solidFill>
-            <a:srgbClr val="21262D"/>
-          </a:solidFill>
-          <a:ln w="6350">
-            <a:solidFill>
-              <a:srgbClr val="30363D"/>
-            </a:solidFill>
-            <a:prstDash val="solid"/>
-          </a:ln>
-        </p:spPr>
-        <p:txBody>
-          <a:bodyPr/>
-          <a:lstStyle/>
-          <a:p>
-            <a:endParaRPr lang="en-US"/>
-          </a:p>
-        </p:txBody>
-      </p:sp>
-      <p:sp>
-        <p:nvSpPr>
-          <p:cNvPr id="15" name="Shape 13"/>
-          <p:cNvSpPr/>
-          <p:nvPr/>
-        </p:nvSpPr>
-        <p:spPr>
-          <a:xfrm>
-            <a:off x="4617720" y="1554480"/>
-            <a:ext cx="3154680" cy="36576"/>
-          </a:xfrm>
-          <a:prstGeom prst="rect">
-            <a:avLst/>
-          </a:prstGeom>
-          <a:solidFill>
-            <a:srgbClr val="58A6FF"/>
-          </a:solidFill>
-          <a:ln/>
-        </p:spPr>
-        <p:txBody>
-          <a:bodyPr/>
-          <a:lstStyle/>
-          <a:p>
-            <a:endParaRPr lang="en-US"/>
-          </a:p>
-        </p:txBody>
-      </p:sp>
-      <p:sp>
-        <p:nvSpPr>
-          <p:cNvPr id="16" name="Text 14"/>
-          <p:cNvSpPr/>
-          <p:nvPr/>
-        </p:nvSpPr>
-        <p:spPr>
-          <a:xfrm>
-            <a:off x="4663440" y="1783080"/>
-            <a:ext cx="548640" cy="548640"/>
-          </a:xfrm>
-          <a:prstGeom prst="rect">
-            <a:avLst/>
-          </a:prstGeom>
-          <a:noFill/>
-          <a:ln/>
-        </p:spPr>
-        <p:txBody>
-          <a:bodyPr wrap="square" rtlCol="0" anchor="ctr"/>
-          <a:lstStyle/>
-          <a:p>
-            <a:pPr marL="0" indent="0">
-              <a:buNone/>
-            </a:pPr>
-            <a:r>
-              <a:rPr lang="en-US" sz="2800" dirty="0">
-                <a:solidFill>
-                  <a:srgbClr val="000000"/>
-                </a:solidFill>
-              </a:rPr>
-              <a:t>📄</a:t>
-            </a:r>
-            <a:endParaRPr lang="en-US" sz="2800" dirty="0"/>
-          </a:p>
-        </p:txBody>
-      </p:sp>
-      <p:sp>
-        <p:nvSpPr>
-          <p:cNvPr id="17" name="Text 15"/>
-          <p:cNvSpPr/>
-          <p:nvPr/>
-        </p:nvSpPr>
-        <p:spPr>
-          <a:xfrm>
-            <a:off x="5257800" y="1737360"/>
-            <a:ext cx="2377440" cy="640080"/>
-          </a:xfrm>
-          <a:prstGeom prst="rect">
-            <a:avLst/>
-          </a:prstGeom>
-          <a:noFill/>
-          <a:ln/>
-        </p:spPr>
-        <p:txBody>
-          <a:bodyPr wrap="square" rtlCol="0" anchor="ctr"/>
-          <a:lstStyle/>
-          <a:p>
-            <a:pPr marL="0" indent="0">
-              <a:lnSpc>
-                <a:spcPct val="115000"/>
-              </a:lnSpc>
-              <a:buNone/>
-            </a:pPr>
-            <a:r>
-              <a:rPr lang="en-US" sz="1800" b="1" dirty="0">
-                <a:solidFill>
-                  <a:srgbClr val="E6EDF3"/>
-                </a:solidFill>
-                <a:latin typeface="Segoe UI" pitchFamily="34" charset="0"/>
-                <a:ea typeface="Segoe UI" pitchFamily="34" charset="-122"/>
-                <a:cs typeface="Segoe UI" pitchFamily="34" charset="-120"/>
-              </a:rPr>
-              <a:t>Continuous</a:t>
-            </a:r>
-            <a:endParaRPr lang="en-US" sz="1800" dirty="0"/>
-          </a:p>
-          <a:p>
-            <a:pPr marL="0" indent="0">
-              <a:lnSpc>
-                <a:spcPct val="115000"/>
-              </a:lnSpc>
-              <a:buNone/>
-            </a:pPr>
-            <a:r>
-              <a:rPr lang="en-US" sz="1800" b="1" dirty="0">
-                <a:solidFill>
-                  <a:srgbClr val="E6EDF3"/>
-                </a:solidFill>
-                <a:latin typeface="Segoe UI" pitchFamily="34" charset="0"/>
-                <a:ea typeface="Segoe UI" pitchFamily="34" charset="-122"/>
-                <a:cs typeface="Segoe UI" pitchFamily="34" charset="-120"/>
-              </a:rPr>
-              <a:t>Documentation</a:t>
-            </a:r>
-            <a:endParaRPr lang="en-US" sz="1800" dirty="0"/>
-          </a:p>
-        </p:txBody>
-      </p:sp>
-      <p:sp>
-        <p:nvSpPr>
-          <p:cNvPr id="18" name="Text 16"/>
-          <p:cNvSpPr/>
-          <p:nvPr/>
-        </p:nvSpPr>
-        <p:spPr>
-          <a:xfrm>
-            <a:off x="4663440" y="2606040"/>
-            <a:ext cx="3017520" cy="914400"/>
-          </a:xfrm>
-          <a:prstGeom prst="rect">
-            <a:avLst/>
-          </a:prstGeom>
-          <a:noFill/>
-          <a:ln/>
-        </p:spPr>
-        <p:txBody>
-          <a:bodyPr wrap="square" rtlCol="0" anchor="ctr"/>
-          <a:lstStyle/>
-          <a:p>
-            <a:pPr marL="0" indent="0">
-              <a:lnSpc>
-                <a:spcPct val="130000"/>
-              </a:lnSpc>
-              <a:buNone/>
-            </a:pPr>
-            <a:r>
-              <a:rPr lang="en-US" sz="1500" dirty="0">
-                <a:solidFill>
-                  <a:srgbClr val="8B949E"/>
-                </a:solidFill>
-                <a:latin typeface="Segoe UI" pitchFamily="34" charset="0"/>
-                <a:ea typeface="Segoe UI" pitchFamily="34" charset="-122"/>
-                <a:cs typeface="Segoe UI" pitchFamily="34" charset="-120"/>
-              </a:rPr>
-              <a:t>Auto-update docs</a:t>
-            </a:r>
-            <a:endParaRPr lang="en-US" sz="1500" dirty="0"/>
-          </a:p>
-          <a:p>
-            <a:pPr marL="0" indent="0">
-              <a:lnSpc>
-                <a:spcPct val="130000"/>
-              </a:lnSpc>
-              <a:buNone/>
-            </a:pPr>
-            <a:r>
-              <a:rPr lang="en-US" sz="1500" dirty="0">
-                <a:solidFill>
-                  <a:srgbClr val="8B949E"/>
-                </a:solidFill>
-                <a:latin typeface="Segoe UI" pitchFamily="34" charset="0"/>
-                <a:ea typeface="Segoe UI" pitchFamily="34" charset="-122"/>
-                <a:cs typeface="Segoe UI" pitchFamily="34" charset="-120"/>
-              </a:rPr>
-              <a:t>when code changes</a:t>
-            </a:r>
-            <a:endParaRPr lang="en-US" sz="1500" dirty="0"/>
-          </a:p>
-        </p:txBody>
-      </p:sp>
-      <p:sp>
-        <p:nvSpPr>
-          <p:cNvPr id="19" name="Shape 17"/>
-          <p:cNvSpPr/>
-          <p:nvPr/>
-        </p:nvSpPr>
-        <p:spPr>
-          <a:xfrm>
-            <a:off x="8257032" y="1591056"/>
-            <a:ext cx="3429000" cy="2148840"/>
-          </a:xfrm>
-          <a:prstGeom prst="roundRect">
-            <a:avLst>
-              <a:gd name="adj" fmla="val 5106"/>
-            </a:avLst>
-          </a:prstGeom>
-          <a:solidFill>
-            <a:srgbClr val="000000">
-              <a:alpha val="40000"/>
-            </a:srgbClr>
-          </a:solidFill>
-          <a:ln/>
-        </p:spPr>
-        <p:txBody>
-          <a:bodyPr/>
-          <a:lstStyle/>
-          <a:p>
-            <a:endParaRPr lang="en-US"/>
-          </a:p>
-        </p:txBody>
-      </p:sp>
-      <p:sp>
-        <p:nvSpPr>
-          <p:cNvPr id="20" name="Shape 18"/>
-          <p:cNvSpPr/>
-          <p:nvPr/>
-        </p:nvSpPr>
-        <p:spPr>
-          <a:xfrm>
-            <a:off x="8229600" y="1554480"/>
-            <a:ext cx="3429000" cy="2148840"/>
-          </a:xfrm>
-          <a:prstGeom prst="roundRect">
-            <a:avLst>
-              <a:gd name="adj" fmla="val 5106"/>
-            </a:avLst>
-          </a:prstGeom>
-          <a:solidFill>
-            <a:srgbClr val="21262D"/>
-          </a:solidFill>
-          <a:ln w="6350">
-            <a:solidFill>
-              <a:srgbClr val="30363D"/>
-            </a:solidFill>
-            <a:prstDash val="solid"/>
-          </a:ln>
-        </p:spPr>
-        <p:txBody>
-          <a:bodyPr/>
-          <a:lstStyle/>
-          <a:p>
-            <a:endParaRPr lang="en-US"/>
-          </a:p>
-        </p:txBody>
-      </p:sp>
-      <p:sp>
-        <p:nvSpPr>
-          <p:cNvPr id="21" name="Shape 19"/>
-          <p:cNvSpPr/>
-          <p:nvPr/>
-        </p:nvSpPr>
-        <p:spPr>
-          <a:xfrm>
-            <a:off x="8366760" y="1554480"/>
-            <a:ext cx="3154680" cy="36576"/>
-          </a:xfrm>
-          <a:prstGeom prst="rect">
-            <a:avLst/>
-          </a:prstGeom>
-          <a:solidFill>
-            <a:srgbClr val="3FB950"/>
-          </a:solidFill>
-          <a:ln/>
-        </p:spPr>
-        <p:txBody>
-          <a:bodyPr/>
-          <a:lstStyle/>
-          <a:p>
-            <a:endParaRPr lang="en-US"/>
-          </a:p>
-        </p:txBody>
-      </p:sp>
-      <p:sp>
-        <p:nvSpPr>
-          <p:cNvPr id="22" name="Text 20"/>
-          <p:cNvSpPr/>
-          <p:nvPr/>
-        </p:nvSpPr>
-        <p:spPr>
-          <a:xfrm>
-            <a:off x="8412480" y="1783080"/>
-            <a:ext cx="548640" cy="548640"/>
-          </a:xfrm>
-          <a:prstGeom prst="rect">
-            <a:avLst/>
-          </a:prstGeom>
-          <a:noFill/>
-          <a:ln/>
-        </p:spPr>
-        <p:txBody>
-          <a:bodyPr wrap="square" rtlCol="0" anchor="ctr"/>
-          <a:lstStyle/>
-          <a:p>
-            <a:pPr marL="0" indent="0">
-              <a:buNone/>
-            </a:pPr>
-            <a:r>
-              <a:rPr lang="en-US" sz="2800" dirty="0">
-                <a:solidFill>
-                  <a:srgbClr val="000000"/>
-                </a:solidFill>
-              </a:rPr>
-              <a:t>🔍</a:t>
-            </a:r>
-            <a:endParaRPr lang="en-US" sz="2800" dirty="0"/>
-          </a:p>
-        </p:txBody>
-      </p:sp>
-      <p:sp>
-        <p:nvSpPr>
-          <p:cNvPr id="23" name="Text 21"/>
-          <p:cNvSpPr/>
-          <p:nvPr/>
-        </p:nvSpPr>
-        <p:spPr>
-          <a:xfrm>
-            <a:off x="9006840" y="1737360"/>
-            <a:ext cx="2377440" cy="640080"/>
-          </a:xfrm>
-          <a:prstGeom prst="rect">
-            <a:avLst/>
-          </a:prstGeom>
-          <a:noFill/>
-          <a:ln/>
-        </p:spPr>
-        <p:txBody>
-          <a:bodyPr wrap="square" rtlCol="0" anchor="ctr"/>
-          <a:lstStyle/>
-          <a:p>
-            <a:pPr marL="0" indent="0">
-              <a:lnSpc>
-                <a:spcPct val="115000"/>
-              </a:lnSpc>
-              <a:buNone/>
-            </a:pPr>
-            <a:r>
-              <a:rPr lang="en-US" sz="1800" b="1" dirty="0">
-                <a:solidFill>
-                  <a:srgbClr val="E6EDF3"/>
-                </a:solidFill>
-                <a:latin typeface="Segoe UI" pitchFamily="34" charset="0"/>
-                <a:ea typeface="Segoe UI" pitchFamily="34" charset="-122"/>
-                <a:cs typeface="Segoe UI" pitchFamily="34" charset="-120"/>
-              </a:rPr>
-              <a:t>Code Quality</a:t>
-            </a:r>
-            <a:endParaRPr lang="en-US" sz="1800" dirty="0"/>
-          </a:p>
-          <a:p>
-            <a:pPr marL="0" indent="0">
-              <a:lnSpc>
-                <a:spcPct val="115000"/>
-              </a:lnSpc>
-              <a:buNone/>
-            </a:pPr>
-            <a:r>
-              <a:rPr lang="en-US" sz="1800" b="1" dirty="0">
-                <a:solidFill>
-                  <a:srgbClr val="E6EDF3"/>
-                </a:solidFill>
-                <a:latin typeface="Segoe UI" pitchFamily="34" charset="0"/>
-                <a:ea typeface="Segoe UI" pitchFamily="34" charset="-122"/>
-                <a:cs typeface="Segoe UI" pitchFamily="34" charset="-120"/>
-              </a:rPr>
-              <a:t>&amp; Testing</a:t>
-            </a:r>
-            <a:endParaRPr lang="en-US" sz="1800" dirty="0"/>
-          </a:p>
-        </p:txBody>
-      </p:sp>
-      <p:sp>
-        <p:nvSpPr>
-          <p:cNvPr id="24" name="Text 22"/>
-          <p:cNvSpPr/>
-          <p:nvPr/>
-        </p:nvSpPr>
-        <p:spPr>
-          <a:xfrm>
-            <a:off x="8412480" y="2606040"/>
-            <a:ext cx="3017520" cy="914400"/>
-          </a:xfrm>
-          <a:prstGeom prst="rect">
-            <a:avLst/>
-          </a:prstGeom>
-          <a:noFill/>
-          <a:ln/>
-        </p:spPr>
-        <p:txBody>
-          <a:bodyPr wrap="square" rtlCol="0" anchor="ctr"/>
-          <a:lstStyle/>
-          <a:p>
-            <a:pPr marL="0" indent="0">
-              <a:lnSpc>
-                <a:spcPct val="130000"/>
-              </a:lnSpc>
-              <a:buNone/>
-            </a:pPr>
-            <a:r>
-              <a:rPr lang="en-US" sz="1500" dirty="0">
-                <a:solidFill>
-                  <a:srgbClr val="8B949E"/>
-                </a:solidFill>
-                <a:latin typeface="Segoe UI" pitchFamily="34" charset="0"/>
-                <a:ea typeface="Segoe UI" pitchFamily="34" charset="-122"/>
-                <a:cs typeface="Segoe UI" pitchFamily="34" charset="-120"/>
-              </a:rPr>
-              <a:t>CI failure diagnosis,</a:t>
-            </a:r>
-            <a:endParaRPr lang="en-US" sz="1500" dirty="0"/>
-          </a:p>
-          <a:p>
-            <a:pPr marL="0" indent="0">
-              <a:lnSpc>
-                <a:spcPct val="130000"/>
-              </a:lnSpc>
-              <a:buNone/>
-            </a:pPr>
-            <a:r>
-              <a:rPr lang="en-US" sz="1500" dirty="0">
-                <a:solidFill>
-                  <a:srgbClr val="8B949E"/>
-                </a:solidFill>
-                <a:latin typeface="Segoe UI" pitchFamily="34" charset="0"/>
-                <a:ea typeface="Segoe UI" pitchFamily="34" charset="-122"/>
-                <a:cs typeface="Segoe UI" pitchFamily="34" charset="-120"/>
-              </a:rPr>
-              <a:t>test improvements</a:t>
-            </a:r>
-            <a:endParaRPr lang="en-US" sz="1500" dirty="0"/>
-          </a:p>
-        </p:txBody>
-      </p:sp>
-      <p:sp>
-        <p:nvSpPr>
-          <p:cNvPr id="25" name="Shape 23"/>
-          <p:cNvSpPr/>
-          <p:nvPr/>
-        </p:nvSpPr>
-        <p:spPr>
-          <a:xfrm>
-            <a:off x="758952" y="4105656"/>
-            <a:ext cx="3429000" cy="2148840"/>
-          </a:xfrm>
-          <a:prstGeom prst="roundRect">
-            <a:avLst>
-              <a:gd name="adj" fmla="val 5106"/>
-            </a:avLst>
-          </a:prstGeom>
-          <a:solidFill>
-            <a:srgbClr val="000000">
-              <a:alpha val="40000"/>
-            </a:srgbClr>
-          </a:solidFill>
-          <a:ln/>
-        </p:spPr>
-        <p:txBody>
-          <a:bodyPr/>
-          <a:lstStyle/>
-          <a:p>
-            <a:endParaRPr lang="en-US"/>
-          </a:p>
-        </p:txBody>
-      </p:sp>
-      <p:sp>
-        <p:nvSpPr>
-          <p:cNvPr id="26" name="Shape 24"/>
-          <p:cNvSpPr/>
-          <p:nvPr/>
-        </p:nvSpPr>
-        <p:spPr>
-          <a:xfrm>
-            <a:off x="731520" y="4069080"/>
-            <a:ext cx="3429000" cy="2148840"/>
-          </a:xfrm>
-          <a:prstGeom prst="roundRect">
-            <a:avLst>
-              <a:gd name="adj" fmla="val 5106"/>
-            </a:avLst>
-          </a:prstGeom>
-          <a:solidFill>
-            <a:srgbClr val="21262D"/>
-          </a:solidFill>
-          <a:ln w="6350">
-            <a:solidFill>
-              <a:srgbClr val="30363D"/>
-            </a:solidFill>
-            <a:prstDash val="solid"/>
-          </a:ln>
-        </p:spPr>
-        <p:txBody>
-          <a:bodyPr/>
-          <a:lstStyle/>
-          <a:p>
-            <a:endParaRPr lang="en-US"/>
-          </a:p>
-        </p:txBody>
-      </p:sp>
-      <p:sp>
-        <p:nvSpPr>
-          <p:cNvPr id="27" name="Shape 25"/>
-          <p:cNvSpPr/>
-          <p:nvPr/>
-        </p:nvSpPr>
-        <p:spPr>
-          <a:xfrm>
-            <a:off x="868680" y="4069080"/>
-            <a:ext cx="3154680" cy="36576"/>
-          </a:xfrm>
-          <a:prstGeom prst="rect">
-            <a:avLst/>
-          </a:prstGeom>
-          <a:solidFill>
-            <a:srgbClr val="A371F7"/>
-          </a:solidFill>
-          <a:ln/>
-        </p:spPr>
-        <p:txBody>
-          <a:bodyPr/>
-          <a:lstStyle/>
-          <a:p>
-            <a:endParaRPr lang="en-US"/>
-          </a:p>
-        </p:txBody>
-      </p:sp>
-      <p:sp>
-        <p:nvSpPr>
-          <p:cNvPr id="28" name="Text 26"/>
-          <p:cNvSpPr/>
-          <p:nvPr/>
-        </p:nvSpPr>
-        <p:spPr>
-          <a:xfrm>
-            <a:off x="914400" y="4297680"/>
-            <a:ext cx="548640" cy="548640"/>
-          </a:xfrm>
-          <a:prstGeom prst="rect">
-            <a:avLst/>
-          </a:prstGeom>
-          <a:noFill/>
-          <a:ln/>
-        </p:spPr>
-        <p:txBody>
-          <a:bodyPr wrap="square" rtlCol="0" anchor="ctr"/>
-          <a:lstStyle/>
-          <a:p>
-            <a:pPr marL="0" indent="0">
-              <a:buNone/>
-            </a:pPr>
-            <a:r>
-              <a:rPr lang="en-US" sz="2800" dirty="0">
-                <a:solidFill>
-                  <a:srgbClr val="000000"/>
-                </a:solidFill>
-              </a:rPr>
-              <a:t>📊</a:t>
-            </a:r>
-            <a:endParaRPr lang="en-US" sz="2800" dirty="0"/>
-          </a:p>
-        </p:txBody>
-      </p:sp>
-      <p:sp>
-        <p:nvSpPr>
-          <p:cNvPr id="29" name="Text 27"/>
-          <p:cNvSpPr/>
-          <p:nvPr/>
-        </p:nvSpPr>
-        <p:spPr>
-          <a:xfrm>
-            <a:off x="1508760" y="4251960"/>
-            <a:ext cx="2377440" cy="640080"/>
-          </a:xfrm>
-          <a:prstGeom prst="rect">
-            <a:avLst/>
-          </a:prstGeom>
-          <a:noFill/>
-          <a:ln/>
-        </p:spPr>
-        <p:txBody>
-          <a:bodyPr wrap="square" rtlCol="0" anchor="ctr"/>
-          <a:lstStyle/>
-          <a:p>
-            <a:pPr marL="0" indent="0">
-              <a:lnSpc>
-                <a:spcPct val="115000"/>
-              </a:lnSpc>
-              <a:buNone/>
-            </a:pPr>
-            <a:r>
-              <a:rPr lang="en-US" sz="1800" b="1" dirty="0">
-                <a:solidFill>
-                  <a:srgbClr val="E6EDF3"/>
-                </a:solidFill>
-                <a:latin typeface="Segoe UI" pitchFamily="34" charset="0"/>
-                <a:ea typeface="Segoe UI" pitchFamily="34" charset="-122"/>
-                <a:cs typeface="Segoe UI" pitchFamily="34" charset="-120"/>
-              </a:rPr>
-              <a:t>Metrics &amp;</a:t>
-            </a:r>
-            <a:endParaRPr lang="en-US" sz="1800" dirty="0"/>
-          </a:p>
-          <a:p>
-            <a:pPr marL="0" indent="0">
-              <a:lnSpc>
-                <a:spcPct val="115000"/>
-              </a:lnSpc>
-              <a:buNone/>
-            </a:pPr>
-            <a:r>
-              <a:rPr lang="en-US" sz="1800" b="1" dirty="0">
-                <a:solidFill>
-                  <a:srgbClr val="E6EDF3"/>
-                </a:solidFill>
-                <a:latin typeface="Segoe UI" pitchFamily="34" charset="0"/>
-                <a:ea typeface="Segoe UI" pitchFamily="34" charset="-122"/>
-                <a:cs typeface="Segoe UI" pitchFamily="34" charset="-120"/>
-              </a:rPr>
-              <a:t>Analytics</a:t>
-            </a:r>
-            <a:endParaRPr lang="en-US" sz="1800" dirty="0"/>
-          </a:p>
-        </p:txBody>
-      </p:sp>
-      <p:sp>
-        <p:nvSpPr>
-          <p:cNvPr id="30" name="Text 28"/>
-          <p:cNvSpPr/>
-          <p:nvPr/>
-        </p:nvSpPr>
-        <p:spPr>
-          <a:xfrm>
-            <a:off x="914400" y="5120640"/>
-            <a:ext cx="3017520" cy="914400"/>
-          </a:xfrm>
-          <a:prstGeom prst="rect">
-            <a:avLst/>
-          </a:prstGeom>
-          <a:noFill/>
-          <a:ln/>
-        </p:spPr>
-        <p:txBody>
-          <a:bodyPr wrap="square" rtlCol="0" anchor="ctr"/>
-          <a:lstStyle/>
-          <a:p>
-            <a:pPr marL="0" indent="0">
-              <a:lnSpc>
-                <a:spcPct val="130000"/>
-              </a:lnSpc>
-              <a:buNone/>
-            </a:pPr>
-            <a:r>
-              <a:rPr lang="en-US" sz="1500" dirty="0">
-                <a:solidFill>
-                  <a:srgbClr val="8B949E"/>
-                </a:solidFill>
-                <a:latin typeface="Segoe UI" pitchFamily="34" charset="0"/>
-                <a:ea typeface="Segoe UI" pitchFamily="34" charset="-122"/>
-                <a:cs typeface="Segoe UI" pitchFamily="34" charset="-120"/>
-              </a:rPr>
-              <a:t>Daily reports, trend</a:t>
-            </a:r>
-            <a:endParaRPr lang="en-US" sz="1500" dirty="0"/>
-          </a:p>
-          <a:p>
-            <a:pPr marL="0" indent="0">
-              <a:lnSpc>
-                <a:spcPct val="130000"/>
-              </a:lnSpc>
-              <a:buNone/>
-            </a:pPr>
-            <a:r>
-              <a:rPr lang="en-US" sz="1500" dirty="0">
-                <a:solidFill>
-                  <a:srgbClr val="8B949E"/>
-                </a:solidFill>
-                <a:latin typeface="Segoe UI" pitchFamily="34" charset="0"/>
-                <a:ea typeface="Segoe UI" pitchFamily="34" charset="-122"/>
-                <a:cs typeface="Segoe UI" pitchFamily="34" charset="-120"/>
-              </a:rPr>
-              <a:t>analysis, health monitoring</a:t>
-            </a:r>
-            <a:endParaRPr lang="en-US" sz="1500" dirty="0"/>
-          </a:p>
-        </p:txBody>
-      </p:sp>
-      <p:sp>
-        <p:nvSpPr>
-          <p:cNvPr id="31" name="Shape 29"/>
-          <p:cNvSpPr/>
-          <p:nvPr/>
-        </p:nvSpPr>
-        <p:spPr>
-          <a:xfrm>
-            <a:off x="4507992" y="4105656"/>
-            <a:ext cx="3429000" cy="2148840"/>
-          </a:xfrm>
-          <a:prstGeom prst="roundRect">
-            <a:avLst>
-              <a:gd name="adj" fmla="val 5106"/>
-            </a:avLst>
-          </a:prstGeom>
-          <a:solidFill>
-            <a:srgbClr val="000000">
-              <a:alpha val="40000"/>
-            </a:srgbClr>
-          </a:solidFill>
-          <a:ln/>
-        </p:spPr>
-        <p:txBody>
-          <a:bodyPr/>
-          <a:lstStyle/>
-          <a:p>
-            <a:endParaRPr lang="en-US"/>
-          </a:p>
-        </p:txBody>
-      </p:sp>
-      <p:sp>
-        <p:nvSpPr>
-          <p:cNvPr id="32" name="Shape 30"/>
-          <p:cNvSpPr/>
-          <p:nvPr/>
-        </p:nvSpPr>
-        <p:spPr>
-          <a:xfrm>
-            <a:off x="4480560" y="4069080"/>
-            <a:ext cx="3429000" cy="2148840"/>
-          </a:xfrm>
-          <a:prstGeom prst="roundRect">
-            <a:avLst>
-              <a:gd name="adj" fmla="val 5106"/>
-            </a:avLst>
-          </a:prstGeom>
-          <a:solidFill>
-            <a:srgbClr val="21262D"/>
-          </a:solidFill>
-          <a:ln w="6350">
-            <a:solidFill>
-              <a:srgbClr val="30363D"/>
-            </a:solidFill>
-            <a:prstDash val="solid"/>
-          </a:ln>
-        </p:spPr>
-        <p:txBody>
-          <a:bodyPr/>
-          <a:lstStyle/>
-          <a:p>
-            <a:endParaRPr lang="en-US"/>
-          </a:p>
-        </p:txBody>
-      </p:sp>
-      <p:sp>
-        <p:nvSpPr>
-          <p:cNvPr id="33" name="Shape 31"/>
-          <p:cNvSpPr/>
-          <p:nvPr/>
-        </p:nvSpPr>
-        <p:spPr>
-          <a:xfrm>
-            <a:off x="4617720" y="4069080"/>
-            <a:ext cx="3154680" cy="36576"/>
-          </a:xfrm>
-          <a:prstGeom prst="rect">
-            <a:avLst/>
-          </a:prstGeom>
-          <a:solidFill>
-            <a:srgbClr val="238636"/>
-          </a:solidFill>
-          <a:ln/>
-        </p:spPr>
-        <p:txBody>
-          <a:bodyPr/>
-          <a:lstStyle/>
-          <a:p>
-            <a:endParaRPr lang="en-US"/>
-          </a:p>
-        </p:txBody>
-      </p:sp>
-      <p:sp>
-        <p:nvSpPr>
-          <p:cNvPr id="34" name="Text 32"/>
-          <p:cNvSpPr/>
-          <p:nvPr/>
-        </p:nvSpPr>
-        <p:spPr>
-          <a:xfrm>
-            <a:off x="4663440" y="4297680"/>
-            <a:ext cx="548640" cy="548640"/>
-          </a:xfrm>
-          <a:prstGeom prst="rect">
-            <a:avLst/>
-          </a:prstGeom>
-          <a:noFill/>
-          <a:ln/>
-        </p:spPr>
-        <p:txBody>
-          <a:bodyPr wrap="square" rtlCol="0" anchor="ctr"/>
-          <a:lstStyle/>
-          <a:p>
-            <a:pPr marL="0" indent="0">
-              <a:buNone/>
-            </a:pPr>
-            <a:r>
-              <a:rPr lang="en-US" sz="2800" dirty="0">
-                <a:solidFill>
-                  <a:srgbClr val="000000"/>
-                </a:solidFill>
-              </a:rPr>
-              <a:t>🔄</a:t>
-            </a:r>
-            <a:endParaRPr lang="en-US" sz="2800" dirty="0"/>
-          </a:p>
-        </p:txBody>
-      </p:sp>
-      <p:sp>
-        <p:nvSpPr>
-          <p:cNvPr id="35" name="Text 33"/>
-          <p:cNvSpPr/>
-          <p:nvPr/>
-        </p:nvSpPr>
-        <p:spPr>
-          <a:xfrm>
-            <a:off x="5257800" y="4251960"/>
-            <a:ext cx="2377440" cy="640080"/>
-          </a:xfrm>
-          <a:prstGeom prst="rect">
-            <a:avLst/>
-          </a:prstGeom>
-          <a:noFill/>
-          <a:ln/>
-        </p:spPr>
-        <p:txBody>
-          <a:bodyPr wrap="square" rtlCol="0" anchor="ctr"/>
-          <a:lstStyle/>
-          <a:p>
-            <a:pPr marL="0" indent="0">
-              <a:lnSpc>
-                <a:spcPct val="115000"/>
-              </a:lnSpc>
-              <a:buNone/>
-            </a:pPr>
-            <a:r>
-              <a:rPr lang="en-US" sz="1800" b="1" dirty="0">
-                <a:solidFill>
-                  <a:srgbClr val="E6EDF3"/>
-                </a:solidFill>
-                <a:latin typeface="Segoe UI" pitchFamily="34" charset="0"/>
-                <a:ea typeface="Segoe UI" pitchFamily="34" charset="-122"/>
-                <a:cs typeface="Segoe UI" pitchFamily="34" charset="-120"/>
-              </a:rPr>
-              <a:t>Continuous</a:t>
-            </a:r>
-            <a:endParaRPr lang="en-US" sz="1800" dirty="0"/>
-          </a:p>
-          <a:p>
-            <a:pPr marL="0" indent="0">
-              <a:lnSpc>
-                <a:spcPct val="115000"/>
-              </a:lnSpc>
-              <a:buNone/>
-            </a:pPr>
-            <a:r>
-              <a:rPr lang="en-US" sz="1800" b="1" dirty="0">
-                <a:solidFill>
-                  <a:srgbClr val="E6EDF3"/>
-                </a:solidFill>
-                <a:latin typeface="Segoe UI" pitchFamily="34" charset="0"/>
-                <a:ea typeface="Segoe UI" pitchFamily="34" charset="-122"/>
-                <a:cs typeface="Segoe UI" pitchFamily="34" charset="-120"/>
-              </a:rPr>
-              <a:t>Improvement</a:t>
-            </a:r>
-            <a:endParaRPr lang="en-US" sz="1800" dirty="0"/>
-          </a:p>
-        </p:txBody>
-      </p:sp>
-      <p:sp>
-        <p:nvSpPr>
-          <p:cNvPr id="36" name="Text 34"/>
-          <p:cNvSpPr/>
-          <p:nvPr/>
-        </p:nvSpPr>
-        <p:spPr>
-          <a:xfrm>
-            <a:off x="4663440" y="5120640"/>
-            <a:ext cx="3017520" cy="914400"/>
-          </a:xfrm>
-          <a:prstGeom prst="rect">
-            <a:avLst/>
-          </a:prstGeom>
-          <a:noFill/>
-          <a:ln/>
-        </p:spPr>
-        <p:txBody>
-          <a:bodyPr wrap="square" rtlCol="0" anchor="ctr"/>
-          <a:lstStyle/>
-          <a:p>
-            <a:pPr marL="0" indent="0">
-              <a:lnSpc>
-                <a:spcPct val="130000"/>
-              </a:lnSpc>
-              <a:buNone/>
-            </a:pPr>
-            <a:r>
-              <a:rPr lang="en-US" sz="1500" dirty="0">
-                <a:solidFill>
-                  <a:srgbClr val="8B949E"/>
-                </a:solidFill>
-                <a:latin typeface="Segoe UI" pitchFamily="34" charset="0"/>
-                <a:ea typeface="Segoe UI" pitchFamily="34" charset="-122"/>
-                <a:cs typeface="Segoe UI" pitchFamily="34" charset="-120"/>
-              </a:rPr>
-              <a:t>Daily code simplification</a:t>
-            </a:r>
-            <a:endParaRPr lang="en-US" sz="1500" dirty="0"/>
-          </a:p>
-          <a:p>
-            <a:pPr marL="0" indent="0">
-              <a:lnSpc>
-                <a:spcPct val="130000"/>
-              </a:lnSpc>
-              <a:buNone/>
-            </a:pPr>
-            <a:r>
-              <a:rPr lang="en-US" sz="1500" dirty="0">
-                <a:solidFill>
-                  <a:srgbClr val="8B949E"/>
-                </a:solidFill>
-                <a:latin typeface="Segoe UI" pitchFamily="34" charset="0"/>
-                <a:ea typeface="Segoe UI" pitchFamily="34" charset="-122"/>
-                <a:cs typeface="Segoe UI" pitchFamily="34" charset="-120"/>
-              </a:rPr>
-              <a:t>&amp; refactoring</a:t>
-            </a:r>
-            <a:endParaRPr lang="en-US" sz="1500" dirty="0"/>
-          </a:p>
-        </p:txBody>
-      </p:sp>
-      <p:sp>
-        <p:nvSpPr>
-          <p:cNvPr id="37" name="Shape 35"/>
-          <p:cNvSpPr/>
-          <p:nvPr/>
-        </p:nvSpPr>
-        <p:spPr>
-          <a:xfrm>
-            <a:off x="8257032" y="4105656"/>
-            <a:ext cx="3429000" cy="2148840"/>
-          </a:xfrm>
-          <a:prstGeom prst="roundRect">
-            <a:avLst>
-              <a:gd name="adj" fmla="val 5106"/>
-            </a:avLst>
-          </a:prstGeom>
-          <a:solidFill>
-            <a:srgbClr val="000000">
-              <a:alpha val="40000"/>
-            </a:srgbClr>
-          </a:solidFill>
-          <a:ln/>
-        </p:spPr>
-        <p:txBody>
-          <a:bodyPr/>
-          <a:lstStyle/>
-          <a:p>
-            <a:endParaRPr lang="en-US"/>
-          </a:p>
-        </p:txBody>
-      </p:sp>
-      <p:sp>
-        <p:nvSpPr>
-          <p:cNvPr id="38" name="Shape 36"/>
-          <p:cNvSpPr/>
-          <p:nvPr/>
-        </p:nvSpPr>
-        <p:spPr>
-          <a:xfrm>
-            <a:off x="8229600" y="4069080"/>
-            <a:ext cx="3429000" cy="2148840"/>
-          </a:xfrm>
-          <a:prstGeom prst="roundRect">
-            <a:avLst>
-              <a:gd name="adj" fmla="val 5106"/>
-            </a:avLst>
-          </a:prstGeom>
-          <a:solidFill>
-            <a:srgbClr val="21262D"/>
-          </a:solidFill>
-          <a:ln w="6350">
-            <a:solidFill>
-              <a:srgbClr val="30363D"/>
-            </a:solidFill>
-            <a:prstDash val="solid"/>
-          </a:ln>
-        </p:spPr>
-        <p:txBody>
-          <a:bodyPr/>
-          <a:lstStyle/>
-          <a:p>
-            <a:endParaRPr lang="en-US"/>
-          </a:p>
-        </p:txBody>
-      </p:sp>
-      <p:sp>
-        <p:nvSpPr>
-          <p:cNvPr id="39" name="Shape 37"/>
-          <p:cNvSpPr/>
-          <p:nvPr/>
-        </p:nvSpPr>
-        <p:spPr>
-          <a:xfrm>
-            <a:off x="8366760" y="4069080"/>
-            <a:ext cx="3154680" cy="36576"/>
-          </a:xfrm>
-          <a:prstGeom prst="rect">
-            <a:avLst/>
-          </a:prstGeom>
-          <a:solidFill>
-            <a:srgbClr val="D29922"/>
-          </a:solidFill>
-          <a:ln/>
-        </p:spPr>
-        <p:txBody>
-          <a:bodyPr/>
-          <a:lstStyle/>
-          <a:p>
-            <a:endParaRPr lang="en-US"/>
-          </a:p>
-        </p:txBody>
-      </p:sp>
-      <p:sp>
-        <p:nvSpPr>
-          <p:cNvPr id="40" name="Text 38"/>
-          <p:cNvSpPr/>
-          <p:nvPr/>
-        </p:nvSpPr>
-        <p:spPr>
-          <a:xfrm>
-            <a:off x="8412480" y="4297680"/>
-            <a:ext cx="548640" cy="548640"/>
-          </a:xfrm>
-          <a:prstGeom prst="rect">
-            <a:avLst/>
-          </a:prstGeom>
-          <a:noFill/>
-          <a:ln/>
-        </p:spPr>
-        <p:txBody>
-          <a:bodyPr wrap="square" rtlCol="0" anchor="ctr"/>
-          <a:lstStyle/>
-          <a:p>
-            <a:pPr marL="0" indent="0">
-              <a:buNone/>
-            </a:pPr>
-            <a:r>
-              <a:rPr lang="en-US" sz="2800" dirty="0">
-                <a:solidFill>
-                  <a:srgbClr val="000000"/>
-                </a:solidFill>
-              </a:rPr>
-              <a:t>🌐</a:t>
-            </a:r>
-            <a:endParaRPr lang="en-US" sz="2800" dirty="0"/>
-          </a:p>
-        </p:txBody>
-      </p:sp>
-      <p:sp>
-        <p:nvSpPr>
-          <p:cNvPr id="41" name="Text 39"/>
-          <p:cNvSpPr/>
-          <p:nvPr/>
-        </p:nvSpPr>
-        <p:spPr>
-          <a:xfrm>
-            <a:off x="9006840" y="4251960"/>
-            <a:ext cx="2377440" cy="640080"/>
-          </a:xfrm>
-          <a:prstGeom prst="rect">
-            <a:avLst/>
-          </a:prstGeom>
-          <a:noFill/>
-          <a:ln/>
-        </p:spPr>
-        <p:txBody>
-          <a:bodyPr wrap="square" rtlCol="0" anchor="ctr"/>
-          <a:lstStyle/>
-          <a:p>
-            <a:pPr marL="0" indent="0">
-              <a:lnSpc>
-                <a:spcPct val="115000"/>
-              </a:lnSpc>
-              <a:buNone/>
-            </a:pPr>
-            <a:r>
-              <a:rPr lang="en-US" sz="1800" b="1" dirty="0">
-                <a:solidFill>
-                  <a:srgbClr val="E6EDF3"/>
-                </a:solidFill>
-                <a:latin typeface="Segoe UI" pitchFamily="34" charset="0"/>
-                <a:ea typeface="Segoe UI" pitchFamily="34" charset="-122"/>
-                <a:cs typeface="Segoe UI" pitchFamily="34" charset="-120"/>
-              </a:rPr>
-              <a:t>Multi-Repo</a:t>
-            </a:r>
-            <a:endParaRPr lang="en-US" sz="1800" dirty="0"/>
-          </a:p>
-          <a:p>
-            <a:pPr marL="0" indent="0">
-              <a:lnSpc>
-                <a:spcPct val="115000"/>
-              </a:lnSpc>
-              <a:buNone/>
-            </a:pPr>
-            <a:r>
-              <a:rPr lang="en-US" sz="1800" b="1" dirty="0">
-                <a:solidFill>
-                  <a:srgbClr val="E6EDF3"/>
-                </a:solidFill>
-                <a:latin typeface="Segoe UI" pitchFamily="34" charset="0"/>
-                <a:ea typeface="Segoe UI" pitchFamily="34" charset="-122"/>
-                <a:cs typeface="Segoe UI" pitchFamily="34" charset="-120"/>
-              </a:rPr>
-              <a:t>Operations</a:t>
-            </a:r>
-            <a:endParaRPr lang="en-US" sz="1800" dirty="0"/>
-          </a:p>
-        </p:txBody>
-      </p:sp>
-      <p:sp>
-        <p:nvSpPr>
-          <p:cNvPr id="42" name="Text 40"/>
-          <p:cNvSpPr/>
-          <p:nvPr/>
-        </p:nvSpPr>
-        <p:spPr>
-          <a:xfrm>
-            <a:off x="8412480" y="5120640"/>
-            <a:ext cx="3017520" cy="914400"/>
-          </a:xfrm>
-          <a:prstGeom prst="rect">
-            <a:avLst/>
-          </a:prstGeom>
-          <a:noFill/>
-          <a:ln/>
-        </p:spPr>
-        <p:txBody>
-          <a:bodyPr wrap="square" rtlCol="0" anchor="ctr"/>
-          <a:lstStyle/>
-          <a:p>
-            <a:pPr marL="0" indent="0">
-              <a:lnSpc>
-                <a:spcPct val="130000"/>
-              </a:lnSpc>
-              <a:buNone/>
-            </a:pPr>
-            <a:r>
-              <a:rPr lang="en-US" sz="1500" dirty="0">
-                <a:solidFill>
-                  <a:srgbClr val="8B949E"/>
-                </a:solidFill>
-                <a:latin typeface="Segoe UI" pitchFamily="34" charset="0"/>
-                <a:ea typeface="Segoe UI" pitchFamily="34" charset="-122"/>
-                <a:cs typeface="Segoe UI" pitchFamily="34" charset="-120"/>
-              </a:rPr>
-              <a:t>Feature sync across</a:t>
-            </a:r>
-            <a:endParaRPr lang="en-US" sz="1500" dirty="0"/>
-          </a:p>
-          <a:p>
-            <a:pPr marL="0" indent="0">
-              <a:lnSpc>
-                <a:spcPct val="130000"/>
-              </a:lnSpc>
-              <a:buNone/>
-            </a:pPr>
-            <a:r>
-              <a:rPr lang="en-US" sz="1500" dirty="0">
-                <a:solidFill>
-                  <a:srgbClr val="8B949E"/>
-                </a:solidFill>
-                <a:latin typeface="Segoe UI" pitchFamily="34" charset="0"/>
-                <a:ea typeface="Segoe UI" pitchFamily="34" charset="-122"/>
-                <a:cs typeface="Segoe UI" pitchFamily="34" charset="-120"/>
-              </a:rPr>
-              <a:t>repositories</a:t>
-            </a:r>
-            <a:endParaRPr lang="en-US" sz="1500" dirty="0"/>
+                <a:latin typeface="Segoe UI"/>
+                <a:ea typeface="Segoe UI"/>
+                <a:cs typeface="Segoe UI"/>
+              </a:rPr>
+              <a:t>Bonus: Custom Actions Types</a:t>
+            </a:r>
+            <a:endParaRPr sz="3800" b="1" i="0" dirty="0">
+              <a:solidFill>
+                <a:srgbClr val="E6EDF3"/>
+              </a:solidFill>
+              <a:latin typeface="Segoe UI"/>
+              <a:ea typeface="Segoe UI"/>
+              <a:cs typeface="Segoe UI"/>
+            </a:endParaRPr>
           </a:p>
         </p:txBody>
       </p:sp>
     </p:spTree>
+    <p:extLst>
+      <p:ext uri="{BB962C8B-B14F-4D97-AF65-F5344CB8AC3E}">
+        <p14:creationId xmlns:p14="http://schemas.microsoft.com/office/powerpoint/2010/main" val="3153884086"/>
+      </p:ext>
+    </p:extLst>
   </p:cSld>
   <p:clrMapOvr>
     <a:masterClrMapping/>
